--- a/Docs/feira/slides.pptx
+++ b/Docs/feira/slides.pptx
@@ -113,33 +113,33 @@
   <p:extLst>
     <p:ext uri="{521415D9-36F7-43E2-AB2F-B90AF26B5E84}">
       <p14:sectionLst xmlns:p14="http://schemas.microsoft.com/office/powerpoint/2010/main">
-        <p14:section name="Abertura" id="{705d9674-56a8-c2d8-6cca-7a30661c29fe}">
+        <p14:section name="Abertura" id="{02bb8388-f36f-83b3-08ae-097019f62b2c}">
           <p14:sldIdLst>
             <p14:sldId id="256"/>
           </p14:sldIdLst>
         </p14:section>
-        <p14:section name="Problema" id="{14b75776-7d10-b463-7834-3eb214ba2eed}">
+        <p14:section name="Problema" id="{b4f4f385-df14-675d-b691-3168bbc6d178}">
           <p14:sldIdLst>
             <p14:sldId id="257"/>
           </p14:sldIdLst>
         </p14:section>
-        <p14:section name="Como funciona" id="{eb3f31d8-842c-a513-da4c-6a6600db3fb1}">
+        <p14:section name="Como funciona" id="{0f0fbfba-19aa-f58e-2926-82ee3f017905}">
           <p14:sldIdLst>
             <p14:sldId id="258"/>
           </p14:sldIdLst>
         </p14:section>
-        <p14:section name="Demonstração" id="{81f2d949-e036-1f18-5666-545cb45f9d0e}">
+        <p14:section name="Demonstração" id="{0cdbfb42-f167-8a13-5302-639613832c8d}">
           <p14:sldIdLst>
             <p14:sldId id="259"/>
             <p14:sldId id="260"/>
           </p14:sldIdLst>
         </p14:section>
-        <p14:section name="Base da IA" id="{d15d30d8-0f88-bcec-66e1-07b632971183}">
+        <p14:section name="Base da IA" id="{267a4dde-42ca-e23e-7f58-0e631a8f603d}">
           <p14:sldIdLst>
             <p14:sldId id="261"/>
           </p14:sldIdLst>
         </p14:section>
-        <p14:section name="Fecho" id="{3abba143-088c-af56-f2e2-fcc3d20735ea}">
+        <p14:section name="Fecho" id="{623de6c0-8ab9-26c1-7639-92cece0f668d}">
           <p14:sldIdLst>
             <p14:sldId id="262"/>
           </p14:sldIdLst>
@@ -1077,7 +1077,7 @@
           <a:p>
             <a:r>
               <a:rPr lang="en-US" dirty="0"/>
-              <a:t>Demo: login da médica, paciente Roberto, painel de riscos. Para a idade dele, a chance de câncer de intestino em 2 anos é cerca de 2 em 1.000 (0,157%). A balança registrou 84 para 76 kg em 90 dias, o hemograma tem anemia (Hb 10,9), o FIT deu positivo e ele contou que o intestino mudou. O risco passa de 20%: INVESTIGAR. Com 35 maços-ano e 8 anos sem fumar, também a TC de pulmão de baixa dose. A conta exata (45 a 68%, conforme as respostas) não aparece: Naive Bayes superestima pistas correlacionadas. Conferir os números na tela antes da apresentação.</a:t>
+              <a:t>Demo: login da médica, paciente Roberto, painel de riscos. Para a idade dele, a chance de câncer de intestino em 2 anos é cerca de 2 em 1.000 (0,157%). A balança registrou 84 para 76 kg em 90 dias, o hemograma tem anemia (Hb 10,9), o FIT deu positivo e ele contou que o intestino mudou. O risco passa de 20%: INVESTIGAR. Com 35 maços-ano e 8 anos sem fumar, também a TC de pulmão de baixa dose. Se perguntarem pelo número: a conta pura passa de 40% (45 a 68%, conforme as respostas), mas a tela mostra "≥ 20%" porque FIT e anemia andam juntos e o Naive Bayes superestima pistas correlacionadas. Conferir os números na tela antes da apresentação.</a:t>
             </a:r>
             <a:endParaRPr lang="en-US" dirty="0"/>
           </a:p>
@@ -4609,7 +4609,7 @@
                   <a:srgbClr val="0F172A"/>
                 </a:solidFill>
               </a:rPr>
-              <a:t>abaixo de 1%</a:t>
+              <a:t>o resto: &lt; 1% e &lt; 2× a média</a:t>
             </a:r>
             <a:endParaRPr lang="en-US" sz="1800" dirty="0"/>
           </a:p>
@@ -5300,18 +5300,7 @@
                   <a:srgbClr val="0F172A"/>
                 </a:solidFill>
               </a:rPr>
-              <a:t>avaliação médica com colonoscopia. Como ex-fumante, também a TC de pulmão de baixa dose (consenso 2024). </a:t>
-            </a:r>
-            <a:pPr indent="0" marL="0">
-              <a:buNone/>
-            </a:pPr>
-            <a:r>
-              <a:rPr lang="en-US" sz="1400" dirty="0">
-                <a:solidFill>
-                  <a:srgbClr val="475569"/>
-                </a:solidFill>
-              </a:rPr>
-              <a:t>A conta pura passa de 40%; a tela mostra "≥ 20%" porque FIT e anemia andam juntos.</a:t>
+              <a:t>avaliação médica com colonoscopia. Como ex-fumante, também a TC de pulmão de baixa dose (consenso 2024).</a:t>
             </a:r>
             <a:endParaRPr lang="en-US" sz="1400" dirty="0"/>
           </a:p>
@@ -6295,7 +6284,7 @@
                   <a:srgbClr val="0F172A"/>
                 </a:solidFill>
               </a:rPr>
-              <a:t>A IA também diz quando não há motivo para alarme.</a:t>
+              <a:t>A IA também diz quando não há motivo para alarme de câncer.</a:t>
             </a:r>
             <a:endParaRPr lang="en-US" sz="1100" dirty="0"/>
           </a:p>
@@ -8994,7 +8983,7 @@
                   <a:schemeClr val="bg1"/>
                 </a:solidFill>
               </a:rPr>
-              <a:t>Força das pistas vem de estudos ingleses de atenção primária.</a:t>
+              <a:t>Boa parte das pistas vem de estudos de atenção primária (CAPER, Reino Unido) e de meta-análises.</a:t>
             </a:r>
             <a:endParaRPr lang="en-US" sz="1500" dirty="0"/>
           </a:p>

--- a/Docs/feira/slides.pptx
+++ b/Docs/feira/slides.pptx
@@ -12,9 +12,11 @@
     <p:sldId id="260" r:id="rId6"/>
     <p:sldId id="261" r:id="rId7"/>
     <p:sldId id="262" r:id="rId8"/>
+    <p:sldId id="263" r:id="rId9"/>
+    <p:sldId id="264" r:id="rId10"/>
   </p:sldIdLst>
   <p:notesMasterIdLst>
-    <p:notesMasterId r:id="rId9"/>
+    <p:notesMasterId r:id="rId11"/>
   </p:notesMasterIdLst>
   <p:sldSz cx="12192000" cy="6858000"/>
   <p:notesSz cx="6858000" cy="12192000"/>
@@ -113,35 +115,41 @@
   <p:extLst>
     <p:ext uri="{521415D9-36F7-43E2-AB2F-B90AF26B5E84}">
       <p14:sectionLst xmlns:p14="http://schemas.microsoft.com/office/powerpoint/2010/main">
-        <p14:section name="Abertura" id="{02bb8388-f36f-83b3-08ae-097019f62b2c}">
+        <p14:section name="Abertura" id="{423085fa-e94b-7b4e-8f0e-08a5ad8bd51b}">
           <p14:sldIdLst>
             <p14:sldId id="256"/>
           </p14:sldIdLst>
         </p14:section>
-        <p14:section name="Problema" id="{b4f4f385-df14-675d-b691-3168bbc6d178}">
+        <p14:section name="Problema" id="{88cb2771-e419-6f17-dee5-51d4d8a2a28c}">
           <p14:sldIdLst>
             <p14:sldId id="257"/>
           </p14:sldIdLst>
         </p14:section>
-        <p14:section name="Como funciona" id="{0f0fbfba-19aa-f58e-2926-82ee3f017905}">
+        <p14:section name="Proposta" id="{7510d9d3-124f-def0-81ff-f973ba025c4a}">
           <p14:sldIdLst>
             <p14:sldId id="258"/>
           </p14:sldIdLst>
         </p14:section>
-        <p14:section name="Demonstração" id="{0cdbfb42-f167-8a13-5302-639613832c8d}">
+        <p14:section name="Como funciona" id="{884f7b98-c009-0fa8-7c22-2dbee7d709f3}">
           <p14:sldIdLst>
             <p14:sldId id="259"/>
-            <p14:sldId id="260"/>
           </p14:sldIdLst>
         </p14:section>
-        <p14:section name="Base da IA" id="{267a4dde-42ca-e23e-7f58-0e631a8f603d}">
+        <p14:section name="Demonstração" id="{c73d1047-e062-b5e0-8763-4fe139c184fd}">
           <p14:sldIdLst>
+            <p14:sldId id="260"/>
             <p14:sldId id="261"/>
+            <p14:sldId id="262"/>
           </p14:sldIdLst>
         </p14:section>
-        <p14:section name="Fecho" id="{623de6c0-8ab9-26c1-7639-92cece0f668d}">
+        <p14:section name="Base da IA" id="{cf8f482e-2333-f795-0c1c-124b6702df57}">
           <p14:sldIdLst>
-            <p14:sldId id="262"/>
+            <p14:sldId id="263"/>
+          </p14:sldIdLst>
+        </p14:section>
+        <p14:section name="Fecho" id="{f93b621f-ef02-124b-26d1-e9901ea6c6dd}">
+          <p14:sldIdLst>
+            <p14:sldId id="264"/>
           </p14:sldIdLst>
         </p14:section>
       </p14:sectionLst>
@@ -813,7 +821,7 @@
           <a:p>
             <a:r>
               <a:rPr lang="en-US" dirty="0"/>
-              <a:t>Pitch de 30 s: Você sabe qual exame de câncer deveria fazer, e a partir de que idade? Quase ninguém sabe. O HealthInPulse estima o risco de cinco cânceres frequentes no Brasil, mostra o porquê de cada número, com a fonte, e indica o exame de rastreamento. Não é diagnóstico. O teste leva dois minutos e nada é gravado.</a:t>
+              <a:t>Pitch de 30 s: Você sabe quais exames preventivos cabem na sua idade, e se está dentro do normal? Quase ninguém sabe. O HealthInPulse é o app de prevenção ligado à pulseira e à balança da Care Plus. Ele compara os seus dados com os padrões normais da medicina, do Guyton &amp; Hall e de diretrizes oficiais, e diz o próximo passo: manter a rotina, agendar uma consulta ou procurar atendimento agora. E mostra os exames preventivos da sua idade e metas com fonte. Não é diagnóstico. O teste leva dois minutos e nada é gravado. Para o visitante: nada de doença, órgão, risco ou porcentagem.</a:t>
             </a:r>
             <a:endParaRPr lang="en-US" dirty="0"/>
           </a:p>
@@ -901,7 +909,7 @@
           <a:p>
             <a:r>
               <a:rPr lang="en-US" dirty="0"/>
-              <a:t>Câncer achado cedo tem outro desfecho e existem exames de rastreamento. Mas cada exame tem idade e público, e as regras mudaram: em 2025 a mamografia foi ampliada para 50 a 74 anos e o DNA-HPV virou o exame principal do colo do útero; em 2026 o SUS passou a rastrear câncer de intestino com o FIT. Pulmão é recomendação do consenso de 2024, ainda fora do SUS. Próstata: o Ministério da Saúde não recomenda rastrear todos os homens; é decisão compartilhada. Fonte: Docs/base-clinica-oncologia.md.</a:t>
+              <a:t>Exame preventivo na idade certa faz diferença, mas cada exame tem idade e público, e as regras mudaram: em 2025 a mamografia foi ampliada para 50 a 74 anos e o DNA-HPV virou o exame principal no lugar do papanicolau; em 2026 o SUS passou a oferecer o teste de sangue oculto nas fezes dos 50 aos 75. A tomografia de baixa dose é recomendação do consenso de 2024, só para quem fumou muito, ainda fora do SUS. PSA: o Ministério da Saúde não recomenda para todos os homens; é decisão com o médico. Para o visitante, fale do exame e da idade, não da doença que ele previne. Fonte: Docs/base-clinica-oncologia.md.</a:t>
             </a:r>
             <a:endParaRPr lang="en-US" dirty="0"/>
           </a:p>
@@ -989,7 +997,7 @@
           <a:p>
             <a:r>
               <a:rPr lang="en-US" dirty="0"/>
-              <a:t>Raciocínio bayesiano: a mesma lógica de um médico, com a conta à mostra. Ponto de partida: chance em 2 anos para a idade e o sexo, a mesma definição dos estudos CAPER que embasam o NICE. Cada pista multiplica a chance; a força vem de estudos publicados. Limites: 3% investigar (NICE NG12); 1% ou 2 vezes a média, atenção. A próxima pergunta é a que mais muda o resultado, por isso o teste é curto.</a:t>
+              <a:t>O app é de prevenção de uma operadora de saúde. O paciente nunca ouve que tem, ou pode ter, uma doença: é ética da empresa. Ele recebe o próximo passo, como está em relação ao padrão normal, os exames preventivos da idade e metas com fonte. O filtro é no servidor: a resposta da API do paciente não leva nome nem probabilidade de doença. Quem recebe a avaliação de risco é a médica, que sabe interpretar e conversar. Credibilidade: tudo vem de fonte forte e documentada, com o Guyton &amp; Hall como base principal e diretrizes oficiais no mesmo nível.</a:t>
             </a:r>
             <a:endParaRPr lang="en-US" dirty="0"/>
           </a:p>
@@ -1077,7 +1085,7 @@
           <a:p>
             <a:r>
               <a:rPr lang="en-US" dirty="0"/>
-              <a:t>Demo: login da médica, paciente Roberto, painel de riscos. Para a idade dele, a chance de câncer de intestino em 2 anos é cerca de 2 em 1.000 (0,157%). A balança registrou 84 para 76 kg em 90 dias, o hemograma tem anemia (Hb 10,9), o FIT deu positivo e ele contou que o intestino mudou. O risco passa de 20%: INVESTIGAR. Com 35 maços-ano e 8 anos sem fumar, também a TC de pulmão de baixa dose. Se perguntarem pelo número: a conta pura passa de 40% (45 a 68%, conforme as respostas), mas a tela mostra "≥ 20%" porque FIT e anemia andam juntos e o Naive Bayes superestima pistas correlacionadas. Conferir os números na tela antes da apresentação.</a:t>
+              <a:t>Isto é a tela da médica; o paciente e o visitante recebem só o próximo passo. Raciocínio bayesiano: a mesma lógica de um médico, com a conta à mostra. Ponto de partida: chance em 2 anos para a idade e o sexo, a mesma definição dos estudos CAPER que embasam o NICE. Cada pista multiplica a chance; a força vem de estudos publicados. Limites: 3% investigar (NICE NG12); 1% ou 2 vezes a média, atenção. A próxima pergunta é a que mais muda o resultado, por isso o teste é curto.</a:t>
             </a:r>
             <a:endParaRPr lang="en-US" dirty="0"/>
           </a:p>
@@ -1165,7 +1173,7 @@
           <a:p>
             <a:r>
               <a:rPr lang="en-US" dirty="0"/>
-              <a:t>Pacientes fictícios do seed. Marina: 2,2 vezes a média pela mãe (Collaborative Group 2001); rastreamento de alto risco a partir de 10 anos antes do caso mais jovem (CBR/SBM/Febrasgo 2023). João: FIT a cada 2 anos dos 50 aos 75 (INCA 2026); PSA em decisão compartilhada (Nota Técnica 9/2023). Cada persona é também um teste automático.</a:t>
+              <a:t>Os logins não ficam no site: a tela de login abre vazia e não tem mais os cards de demonstração. Este slide é o lugar das senhas da demo. Errou a senha: o usuário continua digitado, só a senha é limpa. A médica não se cadastra: usa a conta ana. No Render a Base da IA é só leitura (KB_EDIT=false); a edição é no notebook do stand.</a:t>
             </a:r>
             <a:endParaRPr lang="en-US" dirty="0"/>
           </a:p>
@@ -1253,7 +1261,7 @@
           <a:p>
             <a:r>
               <a:rPr lang="en-US" dirty="0"/>
-              <a:t>Separar dados (mudam com a ciência) de lógica (como calcular, coberta por testes). Demo: Base da IA, FIT positivo, mudar o valor, voltar ao Roberto e ver o risco mudar, depois Restaurar padrão. No site público a edição fica desligada (KB_EDIT=false).</a:t>
+              <a:t>Conferir na tela do paciente o texto do próximo passo antes de citar. Demo: login da médica (usuário ana, slide 5), paciente Roberto, painel de riscos. Para a idade dele, a chance de câncer de intestino em 2 anos é cerca de 2 em 1.000 (0,157%). A balança registrou 84 para 76 kg em 90 dias, o hemograma tem anemia (Hb 10,9), o FIT deu positivo e ele contou que o intestino mudou. O risco passa de 20%: INVESTIGAR. Com 35 maços-ano e 8 anos sem fumar, também a TC de pulmão de baixa dose. Se perguntarem pelo número: a conta pura passa de 40% (45 a 68%, conforme as respostas), mas a tela mostra "≥ 20%" porque FIT e anemia andam juntos e o Naive Bayes superestima pistas correlacionadas. Conferir os números na tela antes da apresentação.</a:t>
             </a:r>
             <a:endParaRPr lang="en-US" dirty="0"/>
           </a:p>
@@ -1341,7 +1349,7 @@
           <a:p>
             <a:r>
               <a:rPr lang="en-US" dirty="0"/>
-              <a:t>Fecho: não é diagnóstico e não foi calibrado com dados reais; declaramos os limites na tela. O próximo passo seria validar com dados reais. Se quiserem testar, o QR está aqui e no banner: dois minutos, nada é gravado.</a:t>
+              <a:t>Tela da médica: no app de cada um, o paciente vê só o próximo passo, o padrão normal, os exames preventivos e as metas. Pacientes fictícios do seed. Marina: 2,2 vezes a média pela mãe (Collaborative Group 2001); rastreamento de alto risco a partir de 10 anos antes do caso mais jovem (CBR/SBM/Febrasgo 2023). João: FIT a cada 2 anos dos 50 aos 75 (INCA 2026); PSA em decisão compartilhada (Nota Técnica 9/2023). João: STOP-Bang 6 (Chung 2016) e FINDRISC 23 (SBD 2025), PHQ-2 negativo; a médica recebe o alerta. Cada persona é também um teste automático.</a:t>
             </a:r>
             <a:endParaRPr lang="en-US" dirty="0"/>
           </a:p>
@@ -1365,6 +1373,182 @@
             <a:fld id="{F7021451-1387-4CA6-816F-3879F97B5CBC}" type="slidenum">
               <a:rPr lang="en-US"/>
               <a:t>7</a:t>
+            </a:fld>
+            <a:endParaRPr lang="en-US"/>
+          </a:p>
+        </p:txBody>
+      </p:sp>
+    </p:spTree>
+    <p:extLst>
+      <p:ext uri="{BB962C8B-B14F-4D97-AF65-F5344CB8AC3E}">
+        <p14:creationId xmlns:p14="http://schemas.microsoft.com/office/powerpoint/2010/main" val="1024086991"/>
+      </p:ext>
+    </p:extLst>
+  </p:cSld>
+  <p:clrMapOvr>
+    <a:masterClrMapping/>
+  </p:clrMapOvr>
+</p:notes>
+</file>
+
+<file path=ppt/notesSlides/notesSlide8.xml><?xml version="1.0" encoding="utf-8"?>
+<p:notes xmlns:a="http://schemas.openxmlformats.org/drawingml/2006/main" xmlns:r="http://schemas.openxmlformats.org/officeDocument/2006/relationships" xmlns:p="http://schemas.openxmlformats.org/presentationml/2006/main">
+  <p:cSld>
+    <p:spTree>
+      <p:nvGrpSpPr>
+        <p:cNvPr id="1" name=""/>
+        <p:cNvGrpSpPr/>
+        <p:nvPr/>
+      </p:nvGrpSpPr>
+      <p:grpSpPr>
+        <a:xfrm>
+          <a:off x="0" y="0"/>
+          <a:ext cx="0" cy="0"/>
+          <a:chOff x="0" y="0"/>
+          <a:chExt cx="0" cy="0"/>
+        </a:xfrm>
+      </p:grpSpPr>
+      <p:sp>
+        <p:nvSpPr>
+          <p:cNvPr id="2" name="Slide Image Placeholder 1"/>
+          <p:cNvSpPr>
+            <a:spLocks noGrp="1" noRot="1" noChangeAspect="1"/>
+          </p:cNvSpPr>
+          <p:nvPr>
+            <p:ph type="sldImg"/>
+          </p:nvPr>
+        </p:nvSpPr>
+        <p:spPr/>
+      </p:sp>
+      <p:sp>
+        <p:nvSpPr>
+          <p:cNvPr id="3" name="Notes Placeholder 2"/>
+          <p:cNvSpPr>
+            <a:spLocks noGrp="1"/>
+          </p:cNvSpPr>
+          <p:nvPr>
+            <p:ph type="body" idx="1"/>
+          </p:nvPr>
+        </p:nvSpPr>
+        <p:spPr/>
+        <p:txBody>
+          <a:bodyPr/>
+          <a:lstStyle/>
+          <a:p>
+            <a:r>
+              <a:rPr lang="en-US" dirty="0"/>
+              <a:t>Separar dados (mudam com a ciência) de lógica (como calcular, coberta por testes). Demo: Base da IA, FIT positivo, mudar o valor, voltar ao Roberto e ver o risco mudar, depois Restaurar padrão. No site público a edição fica desligada (KB_EDIT=false).</a:t>
+            </a:r>
+            <a:endParaRPr lang="en-US" dirty="0"/>
+          </a:p>
+        </p:txBody>
+      </p:sp>
+      <p:sp>
+        <p:nvSpPr>
+          <p:cNvPr id="4" name="Slide Number Placeholder 3"/>
+          <p:cNvSpPr>
+            <a:spLocks noGrp="1"/>
+          </p:cNvSpPr>
+          <p:nvPr>
+            <p:ph type="sldNum" sz="quarter" idx="10"/>
+          </p:nvPr>
+        </p:nvSpPr>
+        <p:spPr/>
+        <p:txBody>
+          <a:bodyPr/>
+          <a:lstStyle/>
+          <a:p>
+            <a:fld id="{F7021451-1387-4CA6-816F-3879F97B5CBC}" type="slidenum">
+              <a:rPr lang="en-US"/>
+              <a:t>8</a:t>
+            </a:fld>
+            <a:endParaRPr lang="en-US"/>
+          </a:p>
+        </p:txBody>
+      </p:sp>
+    </p:spTree>
+    <p:extLst>
+      <p:ext uri="{BB962C8B-B14F-4D97-AF65-F5344CB8AC3E}">
+        <p14:creationId xmlns:p14="http://schemas.microsoft.com/office/powerpoint/2010/main" val="1024086991"/>
+      </p:ext>
+    </p:extLst>
+  </p:cSld>
+  <p:clrMapOvr>
+    <a:masterClrMapping/>
+  </p:clrMapOvr>
+</p:notes>
+</file>
+
+<file path=ppt/notesSlides/notesSlide9.xml><?xml version="1.0" encoding="utf-8"?>
+<p:notes xmlns:a="http://schemas.openxmlformats.org/drawingml/2006/main" xmlns:r="http://schemas.openxmlformats.org/officeDocument/2006/relationships" xmlns:p="http://schemas.openxmlformats.org/presentationml/2006/main">
+  <p:cSld>
+    <p:spTree>
+      <p:nvGrpSpPr>
+        <p:cNvPr id="1" name=""/>
+        <p:cNvGrpSpPr/>
+        <p:nvPr/>
+      </p:nvGrpSpPr>
+      <p:grpSpPr>
+        <a:xfrm>
+          <a:off x="0" y="0"/>
+          <a:ext cx="0" cy="0"/>
+          <a:chOff x="0" y="0"/>
+          <a:chExt cx="0" cy="0"/>
+        </a:xfrm>
+      </p:grpSpPr>
+      <p:sp>
+        <p:nvSpPr>
+          <p:cNvPr id="2" name="Slide Image Placeholder 1"/>
+          <p:cNvSpPr>
+            <a:spLocks noGrp="1" noRot="1" noChangeAspect="1"/>
+          </p:cNvSpPr>
+          <p:nvPr>
+            <p:ph type="sldImg"/>
+          </p:nvPr>
+        </p:nvSpPr>
+        <p:spPr/>
+      </p:sp>
+      <p:sp>
+        <p:nvSpPr>
+          <p:cNvPr id="3" name="Notes Placeholder 2"/>
+          <p:cNvSpPr>
+            <a:spLocks noGrp="1"/>
+          </p:cNvSpPr>
+          <p:nvPr>
+            <p:ph type="body" idx="1"/>
+          </p:nvPr>
+        </p:nvSpPr>
+        <p:spPr/>
+        <p:txBody>
+          <a:bodyPr/>
+          <a:lstStyle/>
+          <a:p>
+            <a:r>
+              <a:rPr lang="en-US" dirty="0"/>
+              <a:t>Fecho: não é diagnóstico e não foi calibrado com dados reais; declaramos os limites na tela. O paciente e o visitante recebem prevenção (próximo passo, padrão normal, exames preventivos, metas); o risco fica com a médica. O próximo passo seria validar com dados reais. Se quiserem testar, o QR está aqui e no banner: dois minutos, nada é gravado.</a:t>
+            </a:r>
+            <a:endParaRPr lang="en-US" dirty="0"/>
+          </a:p>
+        </p:txBody>
+      </p:sp>
+      <p:sp>
+        <p:nvSpPr>
+          <p:cNvPr id="4" name="Slide Number Placeholder 3"/>
+          <p:cNvSpPr>
+            <a:spLocks noGrp="1"/>
+          </p:cNvSpPr>
+          <p:nvPr>
+            <p:ph type="sldNum" sz="quarter" idx="10"/>
+          </p:nvPr>
+        </p:nvSpPr>
+        <p:spPr/>
+        <p:txBody>
+          <a:bodyPr/>
+          <a:lstStyle/>
+          <a:p>
+            <a:fld id="{F7021451-1387-4CA6-816F-3879F97B5CBC}" type="slidenum">
+              <a:rPr lang="en-US"/>
+              <a:t>9</a:t>
             </a:fld>
             <a:endParaRPr lang="en-US"/>
           </a:p>
@@ -2275,7 +2459,7 @@
                   <a:schemeClr val="accent6"/>
                 </a:solidFill>
               </a:rPr>
-              <a:t>Uma IA que estima o risco de 5 cânceres, mostra o porquê de cada número e indica o exame certo para a sua idade</a:t>
+              <a:t>Um app de prevenção: compara você com os padrões normais da medicina, mostra o próximo passo e os exames preventivos da sua idade</a:t>
             </a:r>
             <a:endParaRPr lang="en-US" sz="2400" dirty="0"/>
           </a:p>
@@ -2338,7 +2522,7 @@
                 <a:ea typeface="Arial" pitchFamily="34" charset="-122"/>
                 <a:cs typeface="Arial" pitchFamily="34" charset="-120"/>
               </a:rPr>
-              <a:t>13</a:t>
+              <a:t>3</a:t>
             </a:r>
             <a:endParaRPr lang="en-US" sz="4400" dirty="0"/>
           </a:p>
@@ -2374,7 +2558,7 @@
                   <a:schemeClr val="accent6"/>
                 </a:solidFill>
               </a:rPr>
-              <a:t>condições: 5 cânceres e 8 doenças crônicas</a:t>
+              <a:t>próximos passos: manter a rotina, agendar consulta ou atendimento agora</a:t>
             </a:r>
             <a:endParaRPr lang="en-US" sz="1400" dirty="0"/>
           </a:p>
@@ -2437,7 +2621,7 @@
                 <a:ea typeface="Arial" pitchFamily="34" charset="-122"/>
                 <a:cs typeface="Arial" pitchFamily="34" charset="-120"/>
               </a:rPr>
-              <a:t>3%</a:t>
+              <a:t>5+3</a:t>
             </a:r>
             <a:endParaRPr lang="en-US" sz="4400" dirty="0"/>
           </a:p>
@@ -2473,7 +2657,7 @@
                   <a:schemeClr val="accent6"/>
                 </a:solidFill>
               </a:rPr>
-              <a:t>limite para "investigar" (diretriz NICE NG12)</a:t>
+              <a:t>cânceres e escores validados, só na tela da médica</a:t>
             </a:r>
             <a:endParaRPr lang="en-US" sz="1400" dirty="0"/>
           </a:p>
@@ -2635,7 +2819,7 @@
                   <a:schemeClr val="tx2"/>
                 </a:solidFill>
               </a:rPr>
-              <a:t>Cada exame tem idade e público certos</a:t>
+              <a:t>Cada exame preventivo tem idade e público certos</a:t>
             </a:r>
             <a:endParaRPr lang="en-US" sz="3400" dirty="0"/>
           </a:p>
@@ -2671,7 +2855,7 @@
                   <a:schemeClr val="accent5"/>
                 </a:solidFill>
               </a:rPr>
-              <a:t>E três dessas regras mudaram em 2025 e 2026. A maioria das pessoas não sabe qual é a sua.</a:t>
+              <a:t>E três dessas regras mudaram em 2025 e 2026. A maioria das pessoas não sabe quais valem para ela.</a:t>
             </a:r>
             <a:endParaRPr lang="en-US" sz="1800" dirty="0"/>
           </a:p>
@@ -2712,24 +2896,24 @@
         </p:nvSpPr>
         <p:spPr>
           <a:xfrm>
-            <a:off x="640080" y="2011680"/>
-            <a:ext cx="1737360" cy="411480"/>
-          </a:xfrm>
-          <a:prstGeom prst="rect">
-            <a:avLst/>
-          </a:prstGeom>
-          <a:noFill/>
-          <a:ln/>
-        </p:spPr>
-        <p:txBody>
-          <a:bodyPr wrap="square" lIns="0" tIns="0" rIns="0" bIns="0" rtlCol="0" anchor="ctr"/>
+            <a:off x="640080" y="1965960"/>
+            <a:ext cx="1737360" cy="640080"/>
+          </a:xfrm>
+          <a:prstGeom prst="rect">
+            <a:avLst/>
+          </a:prstGeom>
+          <a:noFill/>
+          <a:ln/>
+        </p:spPr>
+        <p:txBody>
+          <a:bodyPr wrap="square" lIns="0" tIns="0" rIns="0" bIns="0" rtlCol="0" anchor="t"/>
           <a:lstStyle/>
           <a:p>
             <a:pPr indent="0" marL="0">
               <a:buNone/>
             </a:pPr>
             <a:r>
-              <a:rPr lang="en-US" sz="2000" b="1" dirty="0">
+              <a:rPr lang="en-US" sz="1800" b="1" dirty="0">
                 <a:solidFill>
                   <a:schemeClr val="tx1"/>
                 </a:solidFill>
@@ -2737,9 +2921,9 @@
                 <a:ea typeface="Arial" pitchFamily="34" charset="-122"/>
                 <a:cs typeface="Arial" pitchFamily="34" charset="-120"/>
               </a:rPr>
-              <a:t>Mama</a:t>
-            </a:r>
-            <a:endParaRPr lang="en-US" sz="2000" dirty="0"/>
+              <a:t>Mamografia</a:t>
+            </a:r>
+            <a:endParaRPr lang="en-US" sz="1800" dirty="0"/>
           </a:p>
         </p:txBody>
       </p:sp>
@@ -2751,8 +2935,8 @@
         </p:nvSpPr>
         <p:spPr>
           <a:xfrm>
-            <a:off x="640080" y="2560320"/>
-            <a:ext cx="1737360" cy="685800"/>
+            <a:off x="640080" y="2651760"/>
+            <a:ext cx="1737360" cy="640080"/>
           </a:xfrm>
           <a:prstGeom prst="rect">
             <a:avLst/>
@@ -2790,7 +2974,7 @@
         </p:nvSpPr>
         <p:spPr>
           <a:xfrm>
-            <a:off x="640080" y="3246120"/>
+            <a:off x="640080" y="3291840"/>
             <a:ext cx="1737360" cy="320040"/>
           </a:xfrm>
           <a:prstGeom prst="rect">
@@ -2826,7 +3010,7 @@
         </p:nvSpPr>
         <p:spPr>
           <a:xfrm>
-            <a:off x="640080" y="3703320"/>
+            <a:off x="640080" y="3749040"/>
             <a:ext cx="1737360" cy="914400"/>
           </a:xfrm>
           <a:prstGeom prst="rect">
@@ -2848,7 +3032,7 @@
                   <a:schemeClr val="tx1"/>
                 </a:solidFill>
               </a:rPr>
-              <a:t>Mamografia a cada 2 anos</a:t>
+              <a:t>a cada 2 anos, mulheres</a:t>
             </a:r>
             <a:endParaRPr lang="en-US" sz="1500" dirty="0"/>
           </a:p>
@@ -2862,8 +3046,8 @@
         </p:nvSpPr>
         <p:spPr>
           <a:xfrm>
-            <a:off x="640080" y="4663440"/>
-            <a:ext cx="1737360" cy="640080"/>
+            <a:off x="640080" y="4846320"/>
+            <a:ext cx="1737360" cy="594360"/>
           </a:xfrm>
           <a:prstGeom prst="rect">
             <a:avLst/>
@@ -2983,24 +3167,24 @@
         </p:nvSpPr>
         <p:spPr>
           <a:xfrm>
-            <a:off x="2926080" y="2011680"/>
-            <a:ext cx="1737360" cy="411480"/>
-          </a:xfrm>
-          <a:prstGeom prst="rect">
-            <a:avLst/>
-          </a:prstGeom>
-          <a:noFill/>
-          <a:ln/>
-        </p:spPr>
-        <p:txBody>
-          <a:bodyPr wrap="square" lIns="0" tIns="0" rIns="0" bIns="0" rtlCol="0" anchor="ctr"/>
+            <a:off x="2926080" y="1965960"/>
+            <a:ext cx="1737360" cy="640080"/>
+          </a:xfrm>
+          <a:prstGeom prst="rect">
+            <a:avLst/>
+          </a:prstGeom>
+          <a:noFill/>
+          <a:ln/>
+        </p:spPr>
+        <p:txBody>
+          <a:bodyPr wrap="square" lIns="0" tIns="0" rIns="0" bIns="0" rtlCol="0" anchor="t"/>
           <a:lstStyle/>
           <a:p>
             <a:pPr indent="0" marL="0">
               <a:buNone/>
             </a:pPr>
             <a:r>
-              <a:rPr lang="en-US" sz="2000" b="1" dirty="0">
+              <a:rPr lang="en-US" sz="1800" b="1" dirty="0">
                 <a:solidFill>
                   <a:schemeClr val="tx1"/>
                 </a:solidFill>
@@ -3008,9 +3192,9 @@
                 <a:ea typeface="Arial" pitchFamily="34" charset="-122"/>
                 <a:cs typeface="Arial" pitchFamily="34" charset="-120"/>
               </a:rPr>
-              <a:t>Colo do útero</a:t>
-            </a:r>
-            <a:endParaRPr lang="en-US" sz="2000" dirty="0"/>
+              <a:t>DNA-HPV</a:t>
+            </a:r>
+            <a:endParaRPr lang="en-US" sz="1800" dirty="0"/>
           </a:p>
         </p:txBody>
       </p:sp>
@@ -3022,8 +3206,8 @@
         </p:nvSpPr>
         <p:spPr>
           <a:xfrm>
-            <a:off x="2926080" y="2560320"/>
-            <a:ext cx="1737360" cy="685800"/>
+            <a:off x="2926080" y="2651760"/>
+            <a:ext cx="1737360" cy="640080"/>
           </a:xfrm>
           <a:prstGeom prst="rect">
             <a:avLst/>
@@ -3061,7 +3245,7 @@
         </p:nvSpPr>
         <p:spPr>
           <a:xfrm>
-            <a:off x="2926080" y="3246120"/>
+            <a:off x="2926080" y="3291840"/>
             <a:ext cx="1737360" cy="320040"/>
           </a:xfrm>
           <a:prstGeom prst="rect">
@@ -3097,7 +3281,7 @@
         </p:nvSpPr>
         <p:spPr>
           <a:xfrm>
-            <a:off x="2926080" y="3703320"/>
+            <a:off x="2926080" y="3749040"/>
             <a:ext cx="1737360" cy="914400"/>
           </a:xfrm>
           <a:prstGeom prst="rect">
@@ -3119,7 +3303,7 @@
                   <a:schemeClr val="tx1"/>
                 </a:solidFill>
               </a:rPr>
-              <a:t>Teste de DNA-HPV a cada 5 anos</a:t>
+              <a:t>a cada 5 anos, mulheres (ou papanicolau)</a:t>
             </a:r>
             <a:endParaRPr lang="en-US" sz="1500" dirty="0"/>
           </a:p>
@@ -3133,8 +3317,8 @@
         </p:nvSpPr>
         <p:spPr>
           <a:xfrm>
-            <a:off x="2926080" y="4663440"/>
-            <a:ext cx="1737360" cy="640080"/>
+            <a:off x="2926080" y="4846320"/>
+            <a:ext cx="1737360" cy="594360"/>
           </a:xfrm>
           <a:prstGeom prst="rect">
             <a:avLst/>
@@ -3254,24 +3438,24 @@
         </p:nvSpPr>
         <p:spPr>
           <a:xfrm>
-            <a:off x="5212080" y="2011680"/>
-            <a:ext cx="1737360" cy="411480"/>
-          </a:xfrm>
-          <a:prstGeom prst="rect">
-            <a:avLst/>
-          </a:prstGeom>
-          <a:noFill/>
-          <a:ln/>
-        </p:spPr>
-        <p:txBody>
-          <a:bodyPr wrap="square" lIns="0" tIns="0" rIns="0" bIns="0" rtlCol="0" anchor="ctr"/>
+            <a:off x="5212080" y="1965960"/>
+            <a:ext cx="1737360" cy="640080"/>
+          </a:xfrm>
+          <a:prstGeom prst="rect">
+            <a:avLst/>
+          </a:prstGeom>
+          <a:noFill/>
+          <a:ln/>
+        </p:spPr>
+        <p:txBody>
+          <a:bodyPr wrap="square" lIns="0" tIns="0" rIns="0" bIns="0" rtlCol="0" anchor="t"/>
           <a:lstStyle/>
           <a:p>
             <a:pPr indent="0" marL="0">
               <a:buNone/>
             </a:pPr>
             <a:r>
-              <a:rPr lang="en-US" sz="2000" b="1" dirty="0">
+              <a:rPr lang="en-US" sz="1800" b="1" dirty="0">
                 <a:solidFill>
                   <a:schemeClr val="tx1"/>
                 </a:solidFill>
@@ -3279,9 +3463,9 @@
                 <a:ea typeface="Arial" pitchFamily="34" charset="-122"/>
                 <a:cs typeface="Arial" pitchFamily="34" charset="-120"/>
               </a:rPr>
-              <a:t>Intestino</a:t>
-            </a:r>
-            <a:endParaRPr lang="en-US" sz="2000" dirty="0"/>
+              <a:t>Sangue oculto nas fezes</a:t>
+            </a:r>
+            <a:endParaRPr lang="en-US" sz="1800" dirty="0"/>
           </a:p>
         </p:txBody>
       </p:sp>
@@ -3293,8 +3477,8 @@
         </p:nvSpPr>
         <p:spPr>
           <a:xfrm>
-            <a:off x="5212080" y="2560320"/>
-            <a:ext cx="1737360" cy="685800"/>
+            <a:off x="5212080" y="2651760"/>
+            <a:ext cx="1737360" cy="640080"/>
           </a:xfrm>
           <a:prstGeom prst="rect">
             <a:avLst/>
@@ -3332,7 +3516,7 @@
         </p:nvSpPr>
         <p:spPr>
           <a:xfrm>
-            <a:off x="5212080" y="3246120"/>
+            <a:off x="5212080" y="3291840"/>
             <a:ext cx="1737360" cy="320040"/>
           </a:xfrm>
           <a:prstGeom prst="rect">
@@ -3368,7 +3552,7 @@
         </p:nvSpPr>
         <p:spPr>
           <a:xfrm>
-            <a:off x="5212080" y="3703320"/>
+            <a:off x="5212080" y="3749040"/>
             <a:ext cx="1737360" cy="914400"/>
           </a:xfrm>
           <a:prstGeom prst="rect">
@@ -3390,7 +3574,7 @@
                   <a:schemeClr val="tx1"/>
                 </a:solidFill>
               </a:rPr>
-              <a:t>Sangue oculto nas fezes (FIT) a cada 2 anos</a:t>
+              <a:t>a cada 2 anos, no SUS</a:t>
             </a:r>
             <a:endParaRPr lang="en-US" sz="1500" dirty="0"/>
           </a:p>
@@ -3404,8 +3588,8 @@
         </p:nvSpPr>
         <p:spPr>
           <a:xfrm>
-            <a:off x="5212080" y="4663440"/>
-            <a:ext cx="1737360" cy="640080"/>
+            <a:off x="5212080" y="4846320"/>
+            <a:ext cx="1737360" cy="594360"/>
           </a:xfrm>
           <a:prstGeom prst="rect">
             <a:avLst/>
@@ -3426,7 +3610,7 @@
                   <a:schemeClr val="accent5"/>
                 </a:solidFill>
               </a:rPr>
-              <a:t>INCA, 2026 (SUS)</a:t>
+              <a:t>INCA, 2026</a:t>
             </a:r>
             <a:endParaRPr lang="en-US" sz="1100" dirty="0"/>
           </a:p>
@@ -3525,24 +3709,24 @@
         </p:nvSpPr>
         <p:spPr>
           <a:xfrm>
-            <a:off x="7498080" y="2011680"/>
-            <a:ext cx="1737360" cy="411480"/>
-          </a:xfrm>
-          <a:prstGeom prst="rect">
-            <a:avLst/>
-          </a:prstGeom>
-          <a:noFill/>
-          <a:ln/>
-        </p:spPr>
-        <p:txBody>
-          <a:bodyPr wrap="square" lIns="0" tIns="0" rIns="0" bIns="0" rtlCol="0" anchor="ctr"/>
+            <a:off x="7498080" y="1965960"/>
+            <a:ext cx="1737360" cy="640080"/>
+          </a:xfrm>
+          <a:prstGeom prst="rect">
+            <a:avLst/>
+          </a:prstGeom>
+          <a:noFill/>
+          <a:ln/>
+        </p:spPr>
+        <p:txBody>
+          <a:bodyPr wrap="square" lIns="0" tIns="0" rIns="0" bIns="0" rtlCol="0" anchor="t"/>
           <a:lstStyle/>
           <a:p>
             <a:pPr indent="0" marL="0">
               <a:buNone/>
             </a:pPr>
             <a:r>
-              <a:rPr lang="en-US" sz="2000" b="1" dirty="0">
+              <a:rPr lang="en-US" sz="1800" b="1" dirty="0">
                 <a:solidFill>
                   <a:schemeClr val="tx1"/>
                 </a:solidFill>
@@ -3550,9 +3734,9 @@
                 <a:ea typeface="Arial" pitchFamily="34" charset="-122"/>
                 <a:cs typeface="Arial" pitchFamily="34" charset="-120"/>
               </a:rPr>
-              <a:t>Pulmão</a:t>
-            </a:r>
-            <a:endParaRPr lang="en-US" sz="2000" dirty="0"/>
+              <a:t>TC de baixa dose</a:t>
+            </a:r>
+            <a:endParaRPr lang="en-US" sz="1800" dirty="0"/>
           </a:p>
         </p:txBody>
       </p:sp>
@@ -3564,8 +3748,8 @@
         </p:nvSpPr>
         <p:spPr>
           <a:xfrm>
-            <a:off x="7498080" y="2560320"/>
-            <a:ext cx="1737360" cy="685800"/>
+            <a:off x="7498080" y="2651760"/>
+            <a:ext cx="1737360" cy="640080"/>
           </a:xfrm>
           <a:prstGeom prst="rect">
             <a:avLst/>
@@ -3603,7 +3787,7 @@
         </p:nvSpPr>
         <p:spPr>
           <a:xfrm>
-            <a:off x="7498080" y="3246120"/>
+            <a:off x="7498080" y="3291840"/>
             <a:ext cx="1737360" cy="320040"/>
           </a:xfrm>
           <a:prstGeom prst="rect">
@@ -3639,7 +3823,7 @@
         </p:nvSpPr>
         <p:spPr>
           <a:xfrm>
-            <a:off x="7498080" y="3703320"/>
+            <a:off x="7498080" y="3749040"/>
             <a:ext cx="1737360" cy="914400"/>
           </a:xfrm>
           <a:prstGeom prst="rect">
@@ -3661,7 +3845,7 @@
                   <a:schemeClr val="tx1"/>
                 </a:solidFill>
               </a:rPr>
-              <a:t>TC de baixa dose anual, ≥ 20 maços-ano</a:t>
+              <a:t>todo ano, para quem fumou ≥ 20 maços-ano</a:t>
             </a:r>
             <a:endParaRPr lang="en-US" sz="1500" dirty="0"/>
           </a:p>
@@ -3675,8 +3859,8 @@
         </p:nvSpPr>
         <p:spPr>
           <a:xfrm>
-            <a:off x="7498080" y="4663440"/>
-            <a:ext cx="1737360" cy="640080"/>
+            <a:off x="7498080" y="4846320"/>
+            <a:ext cx="1737360" cy="594360"/>
           </a:xfrm>
           <a:prstGeom prst="rect">
             <a:avLst/>
@@ -3738,24 +3922,24 @@
         </p:nvSpPr>
         <p:spPr>
           <a:xfrm>
-            <a:off x="9784080" y="2011680"/>
-            <a:ext cx="1737360" cy="411480"/>
-          </a:xfrm>
-          <a:prstGeom prst="rect">
-            <a:avLst/>
-          </a:prstGeom>
-          <a:noFill/>
-          <a:ln/>
-        </p:spPr>
-        <p:txBody>
-          <a:bodyPr wrap="square" lIns="0" tIns="0" rIns="0" bIns="0" rtlCol="0" anchor="ctr"/>
+            <a:off x="9784080" y="1965960"/>
+            <a:ext cx="1737360" cy="640080"/>
+          </a:xfrm>
+          <a:prstGeom prst="rect">
+            <a:avLst/>
+          </a:prstGeom>
+          <a:noFill/>
+          <a:ln/>
+        </p:spPr>
+        <p:txBody>
+          <a:bodyPr wrap="square" lIns="0" tIns="0" rIns="0" bIns="0" rtlCol="0" anchor="t"/>
           <a:lstStyle/>
           <a:p>
             <a:pPr indent="0" marL="0">
               <a:buNone/>
             </a:pPr>
             <a:r>
-              <a:rPr lang="en-US" sz="2000" b="1" dirty="0">
+              <a:rPr lang="en-US" sz="1800" b="1" dirty="0">
                 <a:solidFill>
                   <a:schemeClr val="tx1"/>
                 </a:solidFill>
@@ -3763,9 +3947,9 @@
                 <a:ea typeface="Arial" pitchFamily="34" charset="-122"/>
                 <a:cs typeface="Arial" pitchFamily="34" charset="-120"/>
               </a:rPr>
-              <a:t>Próstata</a:t>
-            </a:r>
-            <a:endParaRPr lang="en-US" sz="2000" dirty="0"/>
+              <a:t>PSA</a:t>
+            </a:r>
+            <a:endParaRPr lang="en-US" sz="1800" dirty="0"/>
           </a:p>
         </p:txBody>
       </p:sp>
@@ -3777,8 +3961,8 @@
         </p:nvSpPr>
         <p:spPr>
           <a:xfrm>
-            <a:off x="9784080" y="2560320"/>
-            <a:ext cx="1737360" cy="685800"/>
+            <a:off x="9784080" y="2651760"/>
+            <a:ext cx="1737360" cy="640080"/>
           </a:xfrm>
           <a:prstGeom prst="rect">
             <a:avLst/>
@@ -3816,7 +4000,7 @@
         </p:nvSpPr>
         <p:spPr>
           <a:xfrm>
-            <a:off x="9784080" y="3246120"/>
+            <a:off x="9784080" y="3291840"/>
             <a:ext cx="1737360" cy="320040"/>
           </a:xfrm>
           <a:prstGeom prst="rect">
@@ -3852,7 +4036,7 @@
         </p:nvSpPr>
         <p:spPr>
           <a:xfrm>
-            <a:off x="9784080" y="3703320"/>
+            <a:off x="9784080" y="3749040"/>
             <a:ext cx="1737360" cy="914400"/>
           </a:xfrm>
           <a:prstGeom prst="rect">
@@ -3874,7 +4058,7 @@
                   <a:schemeClr val="tx1"/>
                 </a:solidFill>
               </a:rPr>
-              <a:t>PSA: conversar com o médico</a:t>
+              <a:t>homens: conversar com o médico antes</a:t>
             </a:r>
             <a:endParaRPr lang="en-US" sz="1500" dirty="0"/>
           </a:p>
@@ -3888,8 +4072,8 @@
         </p:nvSpPr>
         <p:spPr>
           <a:xfrm>
-            <a:off x="9784080" y="4663440"/>
-            <a:ext cx="1737360" cy="640080"/>
+            <a:off x="9784080" y="4846320"/>
+            <a:ext cx="1737360" cy="594360"/>
           </a:xfrm>
           <a:prstGeom prst="rect">
             <a:avLst/>
@@ -4018,7 +4202,7 @@
                   <a:schemeClr val="tx2"/>
                 </a:solidFill>
               </a:rPr>
-              <a:t>Como a IA pensa</a:t>
+              <a:t>O paciente vê prevenção. A médica vê o risco.</a:t>
             </a:r>
             <a:endParaRPr lang="en-US" sz="3400" dirty="0"/>
           </a:p>
@@ -4026,18 +4210,18 @@
       </p:sp>
       <p:sp>
         <p:nvSpPr>
-          <p:cNvPr id="3" name="passo-1"/>
+          <p:cNvPr id="3" name="card-paciente"/>
           <p:cNvSpPr/>
           <p:nvPr/>
         </p:nvSpPr>
         <p:spPr>
           <a:xfrm>
-            <a:off x="457200" y="1325880"/>
-            <a:ext cx="3520440" cy="2331720"/>
+            <a:off x="457200" y="1280160"/>
+            <a:ext cx="5486400" cy="4023360"/>
           </a:xfrm>
           <a:prstGeom prst="roundRect">
             <a:avLst>
-              <a:gd name="adj" fmla="val 4706"/>
+              <a:gd name="adj" fmla="val 2727"/>
             </a:avLst>
           </a:prstGeom>
           <a:solidFill>
@@ -4053,14 +4237,50 @@
       </p:sp>
       <p:sp>
         <p:nvSpPr>
-          <p:cNvPr id="4" name="num-1"/>
+          <p:cNvPr id="4" name="Text 2"/>
+          <p:cNvSpPr txBox="1"/>
+          <p:nvPr/>
+        </p:nvSpPr>
+        <p:spPr>
+          <a:xfrm>
+            <a:off x="685800" y="1463040"/>
+            <a:ext cx="5029200" cy="320040"/>
+          </a:xfrm>
+          <a:prstGeom prst="rect">
+            <a:avLst/>
+          </a:prstGeom>
+          <a:noFill/>
+          <a:ln/>
+        </p:spPr>
+        <p:txBody>
+          <a:bodyPr wrap="square" lIns="0" tIns="0" rIns="0" bIns="0" rtlCol="0" anchor="ctr"/>
+          <a:lstStyle/>
+          <a:p>
+            <a:pPr indent="0" marL="0">
+              <a:buNone/>
+            </a:pPr>
+            <a:r>
+              <a:rPr lang="en-US" sz="1200" b="1" spc="100" kern="0" dirty="0">
+                <a:solidFill>
+                  <a:schemeClr val="accent5"/>
+                </a:solidFill>
+              </a:rPr>
+              <a:t>O PACIENTE E O VISITANTE VEEM</a:t>
+            </a:r>
+            <a:endParaRPr lang="en-US" sz="1200" dirty="0"/>
+          </a:p>
+        </p:txBody>
+      </p:sp>
+      <p:sp>
+        <p:nvSpPr>
+          <p:cNvPr id="5" name="ve-num-1"/>
           <p:cNvSpPr/>
           <p:nvPr/>
         </p:nvSpPr>
         <p:spPr>
           <a:xfrm>
-            <a:off x="685800" y="1554480"/>
-            <a:ext cx="457200" cy="457200"/>
+            <a:off x="685800" y="1865376"/>
+            <a:ext cx="402336" cy="402336"/>
           </a:xfrm>
           <a:prstGeom prst="ellipse">
             <a:avLst/>
@@ -4073,14 +4293,14 @@
       </p:sp>
       <p:sp>
         <p:nvSpPr>
-          <p:cNvPr id="5" name="Text 3"/>
+          <p:cNvPr id="6" name="Text 4"/>
           <p:cNvSpPr txBox="1"/>
           <p:nvPr/>
         </p:nvSpPr>
         <p:spPr>
           <a:xfrm>
-            <a:off x="685800" y="1554480"/>
-            <a:ext cx="457200" cy="457200"/>
+            <a:off x="685800" y="1865376"/>
+            <a:ext cx="402336" cy="402336"/>
           </a:xfrm>
           <a:prstGeom prst="rect">
             <a:avLst/>
@@ -4112,14 +4332,84 @@
       </p:sp>
       <p:sp>
         <p:nvSpPr>
-          <p:cNvPr id="6" name="Text 4"/>
+          <p:cNvPr id="7" name="Text 5"/>
           <p:cNvSpPr txBox="1"/>
           <p:nvPr/>
         </p:nvSpPr>
         <p:spPr>
           <a:xfrm>
-            <a:off x="685800" y="2148840"/>
-            <a:ext cx="3063240" cy="411480"/>
+            <a:off x="1280160" y="1828800"/>
+            <a:ext cx="4434840" cy="685800"/>
+          </a:xfrm>
+          <a:prstGeom prst="rect">
+            <a:avLst/>
+          </a:prstGeom>
+          <a:noFill/>
+          <a:ln/>
+        </p:spPr>
+        <p:txBody>
+          <a:bodyPr wrap="square" lIns="0" tIns="0" rIns="0" bIns="0" rtlCol="0" anchor="t"/>
+          <a:lstStyle/>
+          <a:p>
+            <a:pPr indent="0" marL="0">
+              <a:buNone/>
+            </a:pPr>
+            <a:r>
+              <a:rPr lang="en-US" sz="1600" b="1" dirty="0">
+                <a:solidFill>
+                  <a:srgbClr val="0F172A"/>
+                </a:solidFill>
+              </a:rPr>
+              <a:t>Próximo passo</a:t>
+            </a:r>
+            <a:endParaRPr lang="en-US" sz="1600" dirty="0"/>
+          </a:p>
+          <a:p>
+            <a:pPr indent="0" marL="0">
+              <a:buNone/>
+            </a:pPr>
+            <a:r>
+              <a:rPr lang="en-US" sz="1300" dirty="0">
+                <a:solidFill>
+                  <a:srgbClr val="475569"/>
+                </a:solidFill>
+              </a:rPr>
+              <a:t>Manter a rotina, agendar consulta ou procurar atendimento agora (SAMU 192, CVV 188).</a:t>
+            </a:r>
+            <a:endParaRPr lang="en-US" sz="1600" dirty="0"/>
+          </a:p>
+        </p:txBody>
+      </p:sp>
+      <p:sp>
+        <p:nvSpPr>
+          <p:cNvPr id="8" name="ve-num-2"/>
+          <p:cNvSpPr/>
+          <p:nvPr/>
+        </p:nvSpPr>
+        <p:spPr>
+          <a:xfrm>
+            <a:off x="685800" y="2596896"/>
+            <a:ext cx="402336" cy="402336"/>
+          </a:xfrm>
+          <a:prstGeom prst="ellipse">
+            <a:avLst/>
+          </a:prstGeom>
+          <a:solidFill>
+            <a:schemeClr val="accent1"/>
+          </a:solidFill>
+          <a:ln/>
+        </p:spPr>
+      </p:sp>
+      <p:sp>
+        <p:nvSpPr>
+          <p:cNvPr id="9" name="Text 7"/>
+          <p:cNvSpPr txBox="1"/>
+          <p:nvPr/>
+        </p:nvSpPr>
+        <p:spPr>
+          <a:xfrm>
+            <a:off x="685800" y="2596896"/>
+            <a:ext cx="402336" cy="402336"/>
           </a:xfrm>
           <a:prstGeom prst="rect">
             <a:avLst/>
@@ -4131,34 +4421,34 @@
           <a:bodyPr wrap="square" lIns="0" tIns="0" rIns="0" bIns="0" rtlCol="0" anchor="ctr"/>
           <a:lstStyle/>
           <a:p>
-            <a:pPr indent="0" marL="0">
-              <a:buNone/>
-            </a:pPr>
-            <a:r>
-              <a:rPr lang="en-US" sz="2000" b="1" dirty="0">
-                <a:solidFill>
-                  <a:schemeClr val="tx1"/>
+            <a:pPr algn="ctr" indent="0" marL="0">
+              <a:buNone/>
+            </a:pPr>
+            <a:r>
+              <a:rPr lang="en-US" sz="1800" b="1" dirty="0">
+                <a:solidFill>
+                  <a:schemeClr val="bg1"/>
                 </a:solidFill>
                 <a:latin typeface="Arial" pitchFamily="34" charset="0"/>
                 <a:ea typeface="Arial" pitchFamily="34" charset="-122"/>
                 <a:cs typeface="Arial" pitchFamily="34" charset="-120"/>
               </a:rPr>
-              <a:t>Começa pela média</a:t>
-            </a:r>
-            <a:endParaRPr lang="en-US" sz="2000" dirty="0"/>
-          </a:p>
-        </p:txBody>
-      </p:sp>
-      <p:sp>
-        <p:nvSpPr>
-          <p:cNvPr id="7" name="Text 5"/>
+              <a:t>2</a:t>
+            </a:r>
+            <a:endParaRPr lang="en-US" sz="1800" dirty="0"/>
+          </a:p>
+        </p:txBody>
+      </p:sp>
+      <p:sp>
+        <p:nvSpPr>
+          <p:cNvPr id="10" name="Text 8"/>
           <p:cNvSpPr txBox="1"/>
           <p:nvPr/>
         </p:nvSpPr>
         <p:spPr>
           <a:xfrm>
-            <a:off x="685800" y="2606040"/>
-            <a:ext cx="3063240" cy="960120"/>
+            <a:off x="1280160" y="2560320"/>
+            <a:ext cx="4434840" cy="685800"/>
           </a:xfrm>
           <a:prstGeom prst="rect">
             <a:avLst/>
@@ -4174,35 +4464,314 @@
               <a:buNone/>
             </a:pPr>
             <a:r>
-              <a:rPr lang="en-US" sz="1400" dirty="0">
-                <a:solidFill>
-                  <a:schemeClr val="accent5"/>
-                </a:solidFill>
-              </a:rPr>
-              <a:t>Chance de alguém da mesma idade e sexo receber o diagnóstico em 2 anos. INCA (Estimativa 2026) e GLOBOCAN 2022 Brasil.</a:t>
-            </a:r>
-            <a:endParaRPr lang="en-US" sz="1400" dirty="0"/>
-          </a:p>
-        </p:txBody>
-      </p:sp>
-      <p:sp>
-        <p:nvSpPr>
-          <p:cNvPr id="8" name="passo-2"/>
+              <a:rPr lang="en-US" sz="1600" b="1" dirty="0">
+                <a:solidFill>
+                  <a:srgbClr val="0F172A"/>
+                </a:solidFill>
+              </a:rPr>
+              <a:t>Padrão normal</a:t>
+            </a:r>
+            <a:endParaRPr lang="en-US" sz="1600" dirty="0"/>
+          </a:p>
+          <a:p>
+            <a:pPr indent="0" marL="0">
+              <a:buNone/>
+            </a:pPr>
+            <a:r>
+              <a:rPr lang="en-US" sz="1300" dirty="0">
+                <a:solidFill>
+                  <a:srgbClr val="475569"/>
+                </a:solidFill>
+              </a:rPr>
+              <a:t>Ex.: frequência cardíaca de repouso acima da faixa normal (60–100 bpm).</a:t>
+            </a:r>
+            <a:endParaRPr lang="en-US" sz="1600" dirty="0"/>
+          </a:p>
+        </p:txBody>
+      </p:sp>
+      <p:sp>
+        <p:nvSpPr>
+          <p:cNvPr id="11" name="ve-num-3"/>
           <p:cNvSpPr/>
           <p:nvPr/>
         </p:nvSpPr>
         <p:spPr>
           <a:xfrm>
-            <a:off x="4320540" y="1325880"/>
-            <a:ext cx="3520440" cy="2331720"/>
+            <a:off x="685800" y="3328416"/>
+            <a:ext cx="402336" cy="402336"/>
+          </a:xfrm>
+          <a:prstGeom prst="ellipse">
+            <a:avLst/>
+          </a:prstGeom>
+          <a:solidFill>
+            <a:schemeClr val="accent1"/>
+          </a:solidFill>
+          <a:ln/>
+        </p:spPr>
+      </p:sp>
+      <p:sp>
+        <p:nvSpPr>
+          <p:cNvPr id="12" name="Text 10"/>
+          <p:cNvSpPr txBox="1"/>
+          <p:nvPr/>
+        </p:nvSpPr>
+        <p:spPr>
+          <a:xfrm>
+            <a:off x="685800" y="3328416"/>
+            <a:ext cx="402336" cy="402336"/>
+          </a:xfrm>
+          <a:prstGeom prst="rect">
+            <a:avLst/>
+          </a:prstGeom>
+          <a:noFill/>
+          <a:ln/>
+        </p:spPr>
+        <p:txBody>
+          <a:bodyPr wrap="square" lIns="0" tIns="0" rIns="0" bIns="0" rtlCol="0" anchor="ctr"/>
+          <a:lstStyle/>
+          <a:p>
+            <a:pPr algn="ctr" indent="0" marL="0">
+              <a:buNone/>
+            </a:pPr>
+            <a:r>
+              <a:rPr lang="en-US" sz="1800" b="1" dirty="0">
+                <a:solidFill>
+                  <a:schemeClr val="bg1"/>
+                </a:solidFill>
+                <a:latin typeface="Arial" pitchFamily="34" charset="0"/>
+                <a:ea typeface="Arial" pitchFamily="34" charset="-122"/>
+                <a:cs typeface="Arial" pitchFamily="34" charset="-120"/>
+              </a:rPr>
+              <a:t>3</a:t>
+            </a:r>
+            <a:endParaRPr lang="en-US" sz="1800" dirty="0"/>
+          </a:p>
+        </p:txBody>
+      </p:sp>
+      <p:sp>
+        <p:nvSpPr>
+          <p:cNvPr id="13" name="Text 11"/>
+          <p:cNvSpPr txBox="1"/>
+          <p:nvPr/>
+        </p:nvSpPr>
+        <p:spPr>
+          <a:xfrm>
+            <a:off x="1280160" y="3291840"/>
+            <a:ext cx="4434840" cy="685800"/>
+          </a:xfrm>
+          <a:prstGeom prst="rect">
+            <a:avLst/>
+          </a:prstGeom>
+          <a:noFill/>
+          <a:ln/>
+        </p:spPr>
+        <p:txBody>
+          <a:bodyPr wrap="square" lIns="0" tIns="0" rIns="0" bIns="0" rtlCol="0" anchor="t"/>
+          <a:lstStyle/>
+          <a:p>
+            <a:pPr indent="0" marL="0">
+              <a:buNone/>
+            </a:pPr>
+            <a:r>
+              <a:rPr lang="en-US" sz="1600" b="1" dirty="0">
+                <a:solidFill>
+                  <a:srgbClr val="0F172A"/>
+                </a:solidFill>
+              </a:rPr>
+              <a:t>Exames preventivos</a:t>
+            </a:r>
+            <a:endParaRPr lang="en-US" sz="1600" dirty="0"/>
+          </a:p>
+          <a:p>
+            <a:pPr indent="0" marL="0">
+              <a:buNone/>
+            </a:pPr>
+            <a:r>
+              <a:rPr lang="en-US" sz="1300" dirty="0">
+                <a:solidFill>
+                  <a:srgbClr val="475569"/>
+                </a:solidFill>
+              </a:rPr>
+              <a:t>Os da idade e do sexo, pelo nome, sem dizer o que previnem.</a:t>
+            </a:r>
+            <a:endParaRPr lang="en-US" sz="1600" dirty="0"/>
+          </a:p>
+        </p:txBody>
+      </p:sp>
+      <p:sp>
+        <p:nvSpPr>
+          <p:cNvPr id="14" name="ve-num-4"/>
+          <p:cNvSpPr/>
+          <p:nvPr/>
+        </p:nvSpPr>
+        <p:spPr>
+          <a:xfrm>
+            <a:off x="685800" y="4059936"/>
+            <a:ext cx="402336" cy="402336"/>
+          </a:xfrm>
+          <a:prstGeom prst="ellipse">
+            <a:avLst/>
+          </a:prstGeom>
+          <a:solidFill>
+            <a:schemeClr val="accent1"/>
+          </a:solidFill>
+          <a:ln/>
+        </p:spPr>
+      </p:sp>
+      <p:sp>
+        <p:nvSpPr>
+          <p:cNvPr id="15" name="Text 13"/>
+          <p:cNvSpPr txBox="1"/>
+          <p:nvPr/>
+        </p:nvSpPr>
+        <p:spPr>
+          <a:xfrm>
+            <a:off x="685800" y="4059936"/>
+            <a:ext cx="402336" cy="402336"/>
+          </a:xfrm>
+          <a:prstGeom prst="rect">
+            <a:avLst/>
+          </a:prstGeom>
+          <a:noFill/>
+          <a:ln/>
+        </p:spPr>
+        <p:txBody>
+          <a:bodyPr wrap="square" lIns="0" tIns="0" rIns="0" bIns="0" rtlCol="0" anchor="ctr"/>
+          <a:lstStyle/>
+          <a:p>
+            <a:pPr algn="ctr" indent="0" marL="0">
+              <a:buNone/>
+            </a:pPr>
+            <a:r>
+              <a:rPr lang="en-US" sz="1800" b="1" dirty="0">
+                <a:solidFill>
+                  <a:schemeClr val="bg1"/>
+                </a:solidFill>
+                <a:latin typeface="Arial" pitchFamily="34" charset="0"/>
+                <a:ea typeface="Arial" pitchFamily="34" charset="-122"/>
+                <a:cs typeface="Arial" pitchFamily="34" charset="-120"/>
+              </a:rPr>
+              <a:t>4</a:t>
+            </a:r>
+            <a:endParaRPr lang="en-US" sz="1800" dirty="0"/>
+          </a:p>
+        </p:txBody>
+      </p:sp>
+      <p:sp>
+        <p:nvSpPr>
+          <p:cNvPr id="16" name="Text 14"/>
+          <p:cNvSpPr txBox="1"/>
+          <p:nvPr/>
+        </p:nvSpPr>
+        <p:spPr>
+          <a:xfrm>
+            <a:off x="1280160" y="4023360"/>
+            <a:ext cx="4434840" cy="685800"/>
+          </a:xfrm>
+          <a:prstGeom prst="rect">
+            <a:avLst/>
+          </a:prstGeom>
+          <a:noFill/>
+          <a:ln/>
+        </p:spPr>
+        <p:txBody>
+          <a:bodyPr wrap="square" lIns="0" tIns="0" rIns="0" bIns="0" rtlCol="0" anchor="t"/>
+          <a:lstStyle/>
+          <a:p>
+            <a:pPr indent="0" marL="0">
+              <a:buNone/>
+            </a:pPr>
+            <a:r>
+              <a:rPr lang="en-US" sz="1600" b="1" dirty="0">
+                <a:solidFill>
+                  <a:srgbClr val="0F172A"/>
+                </a:solidFill>
+              </a:rPr>
+              <a:t>Metas com fonte</a:t>
+            </a:r>
+            <a:endParaRPr lang="en-US" sz="1600" dirty="0"/>
+          </a:p>
+          <a:p>
+            <a:pPr indent="0" marL="0">
+              <a:buNone/>
+            </a:pPr>
+            <a:r>
+              <a:rPr lang="en-US" sz="1300" dirty="0">
+                <a:solidFill>
+                  <a:srgbClr val="475569"/>
+                </a:solidFill>
+              </a:rPr>
+              <a:t>Parar de fumar; 150 min de atividade por semana (OMS).</a:t>
+            </a:r>
+            <a:endParaRPr lang="en-US" sz="1600" dirty="0"/>
+          </a:p>
+        </p:txBody>
+      </p:sp>
+      <p:sp>
+        <p:nvSpPr>
+          <p:cNvPr id="17" name="Text 15"/>
+          <p:cNvSpPr txBox="1"/>
+          <p:nvPr/>
+        </p:nvSpPr>
+        <p:spPr>
+          <a:xfrm>
+            <a:off x="685800" y="4846320"/>
+            <a:ext cx="5029200" cy="320040"/>
+          </a:xfrm>
+          <a:prstGeom prst="rect">
+            <a:avLst/>
+          </a:prstGeom>
+          <a:noFill/>
+          <a:ln/>
+        </p:spPr>
+        <p:txBody>
+          <a:bodyPr wrap="square" lIns="0" tIns="0" rIns="0" bIns="0" rtlCol="0" anchor="ctr"/>
+          <a:lstStyle/>
+          <a:p>
+            <a:pPr indent="0" marL="0">
+              <a:buNone/>
+            </a:pPr>
+            <a:r>
+              <a:rPr lang="en-US" sz="1300" b="1" dirty="0">
+                <a:solidFill>
+                  <a:srgbClr val="003F7E"/>
+                </a:solidFill>
+              </a:rPr>
+              <a:t>Nunca: </a:t>
+            </a:r>
+            <a:pPr indent="0" marL="0">
+              <a:buNone/>
+            </a:pPr>
+            <a:r>
+              <a:rPr lang="en-US" sz="1300" dirty="0">
+                <a:solidFill>
+                  <a:srgbClr val="0F172A"/>
+                </a:solidFill>
+              </a:rPr>
+              <a:t>doença, órgão, "risco de" ou porcentagem.</a:t>
+            </a:r>
+            <a:endParaRPr lang="en-US" sz="1300" dirty="0"/>
+          </a:p>
+        </p:txBody>
+      </p:sp>
+      <p:sp>
+        <p:nvSpPr>
+          <p:cNvPr id="18" name="card-medica"/>
+          <p:cNvSpPr/>
+          <p:nvPr/>
+        </p:nvSpPr>
+        <p:spPr>
+          <a:xfrm>
+            <a:off x="6263640" y="1280160"/>
+            <a:ext cx="5440680" cy="4023360"/>
           </a:xfrm>
           <a:prstGeom prst="roundRect">
             <a:avLst>
-              <a:gd name="adj" fmla="val 4706"/>
+              <a:gd name="adj" fmla="val 2727"/>
             </a:avLst>
           </a:prstGeom>
           <a:solidFill>
-            <a:schemeClr val="bg2"/>
+            <a:srgbClr val="E6F7FD"/>
           </a:solidFill>
           <a:ln w="12700">
             <a:solidFill>
@@ -4214,34 +4783,14 @@
       </p:sp>
       <p:sp>
         <p:nvSpPr>
-          <p:cNvPr id="9" name="num-2"/>
-          <p:cNvSpPr/>
-          <p:nvPr/>
-        </p:nvSpPr>
-        <p:spPr>
-          <a:xfrm>
-            <a:off x="4549140" y="1554480"/>
-            <a:ext cx="457200" cy="457200"/>
-          </a:xfrm>
-          <a:prstGeom prst="ellipse">
-            <a:avLst/>
-          </a:prstGeom>
-          <a:solidFill>
-            <a:schemeClr val="accent1"/>
-          </a:solidFill>
-          <a:ln/>
-        </p:spPr>
-      </p:sp>
-      <p:sp>
-        <p:nvSpPr>
-          <p:cNvPr id="10" name="Text 8"/>
+          <p:cNvPr id="19" name="Text 17"/>
           <p:cNvSpPr txBox="1"/>
           <p:nvPr/>
         </p:nvSpPr>
         <p:spPr>
           <a:xfrm>
-            <a:off x="4549140" y="1554480"/>
-            <a:ext cx="457200" cy="457200"/>
+            <a:off x="6492240" y="1463040"/>
+            <a:ext cx="4983480" cy="320040"/>
           </a:xfrm>
           <a:prstGeom prst="rect">
             <a:avLst/>
@@ -4253,317 +4802,20 @@
           <a:bodyPr wrap="square" lIns="0" tIns="0" rIns="0" bIns="0" rtlCol="0" anchor="ctr"/>
           <a:lstStyle/>
           <a:p>
-            <a:pPr algn="ctr" indent="0" marL="0">
-              <a:buNone/>
-            </a:pPr>
-            <a:r>
-              <a:rPr lang="en-US" sz="1800" b="1" dirty="0">
-                <a:solidFill>
-                  <a:schemeClr val="bg1"/>
-                </a:solidFill>
-                <a:latin typeface="Arial" pitchFamily="34" charset="0"/>
-                <a:ea typeface="Arial" pitchFamily="34" charset="-122"/>
-                <a:cs typeface="Arial" pitchFamily="34" charset="-120"/>
-              </a:rPr>
-              <a:t>2</a:t>
-            </a:r>
-            <a:endParaRPr lang="en-US" sz="1800" dirty="0"/>
-          </a:p>
-        </p:txBody>
-      </p:sp>
-      <p:sp>
-        <p:nvSpPr>
-          <p:cNvPr id="11" name="Text 9"/>
-          <p:cNvSpPr txBox="1"/>
-          <p:nvPr/>
-        </p:nvSpPr>
-        <p:spPr>
-          <a:xfrm>
-            <a:off x="4549140" y="2148840"/>
-            <a:ext cx="3063240" cy="411480"/>
-          </a:xfrm>
-          <a:prstGeom prst="rect">
-            <a:avLst/>
-          </a:prstGeom>
-          <a:noFill/>
-          <a:ln/>
-        </p:spPr>
-        <p:txBody>
-          <a:bodyPr wrap="square" lIns="0" tIns="0" rIns="0" bIns="0" rtlCol="0" anchor="ctr"/>
-          <a:lstStyle/>
-          <a:p>
             <a:pPr indent="0" marL="0">
               <a:buNone/>
             </a:pPr>
             <a:r>
-              <a:rPr lang="en-US" sz="2000" b="1" dirty="0">
-                <a:solidFill>
-                  <a:schemeClr val="tx1"/>
-                </a:solidFill>
-                <a:latin typeface="Arial" pitchFamily="34" charset="0"/>
-                <a:ea typeface="Arial" pitchFamily="34" charset="-122"/>
-                <a:cs typeface="Arial" pitchFamily="34" charset="-120"/>
-              </a:rPr>
-              <a:t>Cada pista multiplica</a:t>
-            </a:r>
-            <a:endParaRPr lang="en-US" sz="2000" dirty="0"/>
-          </a:p>
-        </p:txBody>
-      </p:sp>
-      <p:sp>
-        <p:nvSpPr>
-          <p:cNvPr id="12" name="Text 10"/>
-          <p:cNvSpPr txBox="1"/>
-          <p:nvPr/>
-        </p:nvSpPr>
-        <p:spPr>
-          <a:xfrm>
-            <a:off x="4549140" y="2606040"/>
-            <a:ext cx="3063240" cy="960120"/>
-          </a:xfrm>
-          <a:prstGeom prst="rect">
-            <a:avLst/>
-          </a:prstGeom>
-          <a:noFill/>
-          <a:ln/>
-        </p:spPr>
-        <p:txBody>
-          <a:bodyPr wrap="square" lIns="0" tIns="0" rIns="0" bIns="0" rtlCol="0" anchor="t"/>
-          <a:lstStyle/>
-          <a:p>
-            <a:pPr indent="0" marL="0">
-              <a:buNone/>
-            </a:pPr>
-            <a:r>
-              <a:rPr lang="en-US" sz="1400" dirty="0">
+              <a:rPr lang="en-US" sz="1200" b="1" spc="100" kern="0" dirty="0">
                 <a:solidFill>
                   <a:schemeClr val="accent5"/>
                 </a:solidFill>
               </a:rPr>
-              <a:t>Sintomas, exames e a balança mudam a chance. A força (LR) vem de estudos: FIT positivo ×13, nódulo na mama ×55.</a:t>
-            </a:r>
-            <a:endParaRPr lang="en-US" sz="1400" dirty="0"/>
-          </a:p>
-        </p:txBody>
-      </p:sp>
-      <p:sp>
-        <p:nvSpPr>
-          <p:cNvPr id="13" name="passo-3"/>
-          <p:cNvSpPr/>
-          <p:nvPr/>
-        </p:nvSpPr>
-        <p:spPr>
-          <a:xfrm>
-            <a:off x="8183880" y="1325880"/>
-            <a:ext cx="3520440" cy="2331720"/>
-          </a:xfrm>
-          <a:prstGeom prst="roundRect">
-            <a:avLst>
-              <a:gd name="adj" fmla="val 4706"/>
-            </a:avLst>
-          </a:prstGeom>
-          <a:solidFill>
-            <a:schemeClr val="bg2"/>
-          </a:solidFill>
-          <a:ln w="12700">
-            <a:solidFill>
-              <a:schemeClr val="accent6"/>
-            </a:solidFill>
-            <a:prstDash val="solid"/>
-          </a:ln>
-        </p:spPr>
-      </p:sp>
-      <p:sp>
-        <p:nvSpPr>
-          <p:cNvPr id="14" name="num-3"/>
-          <p:cNvSpPr/>
-          <p:nvPr/>
-        </p:nvSpPr>
-        <p:spPr>
-          <a:xfrm>
-            <a:off x="8412480" y="1554480"/>
-            <a:ext cx="457200" cy="457200"/>
-          </a:xfrm>
-          <a:prstGeom prst="ellipse">
-            <a:avLst/>
-          </a:prstGeom>
-          <a:solidFill>
-            <a:schemeClr val="accent1"/>
-          </a:solidFill>
-          <a:ln/>
-        </p:spPr>
-      </p:sp>
-      <p:sp>
-        <p:nvSpPr>
-          <p:cNvPr id="15" name="Text 13"/>
-          <p:cNvSpPr txBox="1"/>
-          <p:nvPr/>
-        </p:nvSpPr>
-        <p:spPr>
-          <a:xfrm>
-            <a:off x="8412480" y="1554480"/>
-            <a:ext cx="457200" cy="457200"/>
-          </a:xfrm>
-          <a:prstGeom prst="rect">
-            <a:avLst/>
-          </a:prstGeom>
-          <a:noFill/>
-          <a:ln/>
-        </p:spPr>
-        <p:txBody>
-          <a:bodyPr wrap="square" lIns="0" tIns="0" rIns="0" bIns="0" rtlCol="0" anchor="ctr"/>
-          <a:lstStyle/>
-          <a:p>
-            <a:pPr algn="ctr" indent="0" marL="0">
-              <a:buNone/>
-            </a:pPr>
-            <a:r>
-              <a:rPr lang="en-US" sz="1800" b="1" dirty="0">
-                <a:solidFill>
-                  <a:schemeClr val="bg1"/>
-                </a:solidFill>
-                <a:latin typeface="Arial" pitchFamily="34" charset="0"/>
-                <a:ea typeface="Arial" pitchFamily="34" charset="-122"/>
-                <a:cs typeface="Arial" pitchFamily="34" charset="-120"/>
-              </a:rPr>
-              <a:t>3</a:t>
-            </a:r>
-            <a:endParaRPr lang="en-US" sz="1800" dirty="0"/>
-          </a:p>
-        </p:txBody>
-      </p:sp>
-      <p:sp>
-        <p:nvSpPr>
-          <p:cNvPr id="16" name="Text 14"/>
-          <p:cNvSpPr txBox="1"/>
-          <p:nvPr/>
-        </p:nvSpPr>
-        <p:spPr>
-          <a:xfrm>
-            <a:off x="8412480" y="2148840"/>
-            <a:ext cx="3063240" cy="411480"/>
-          </a:xfrm>
-          <a:prstGeom prst="rect">
-            <a:avLst/>
-          </a:prstGeom>
-          <a:noFill/>
-          <a:ln/>
-        </p:spPr>
-        <p:txBody>
-          <a:bodyPr wrap="square" lIns="0" tIns="0" rIns="0" bIns="0" rtlCol="0" anchor="ctr"/>
-          <a:lstStyle/>
-          <a:p>
-            <a:pPr indent="0" marL="0">
-              <a:buNone/>
-            </a:pPr>
-            <a:r>
-              <a:rPr lang="en-US" sz="2000" b="1" dirty="0">
-                <a:solidFill>
-                  <a:schemeClr val="tx1"/>
-                </a:solidFill>
-                <a:latin typeface="Arial" pitchFamily="34" charset="0"/>
-                <a:ea typeface="Arial" pitchFamily="34" charset="-122"/>
-                <a:cs typeface="Arial" pitchFamily="34" charset="-120"/>
-              </a:rPr>
-              <a:t>Compara com limites</a:t>
-            </a:r>
-            <a:endParaRPr lang="en-US" sz="2000" dirty="0"/>
-          </a:p>
-        </p:txBody>
-      </p:sp>
-      <p:sp>
-        <p:nvSpPr>
-          <p:cNvPr id="17" name="Text 15"/>
-          <p:cNvSpPr txBox="1"/>
-          <p:nvPr/>
-        </p:nvSpPr>
-        <p:spPr>
-          <a:xfrm>
-            <a:off x="8412480" y="2606040"/>
-            <a:ext cx="3063240" cy="960120"/>
-          </a:xfrm>
-          <a:prstGeom prst="rect">
-            <a:avLst/>
-          </a:prstGeom>
-          <a:noFill/>
-          <a:ln/>
-        </p:spPr>
-        <p:txBody>
-          <a:bodyPr wrap="square" lIns="0" tIns="0" rIns="0" bIns="0" rtlCol="0" anchor="t"/>
-          <a:lstStyle/>
-          <a:p>
-            <a:pPr indent="0" marL="0">
-              <a:buNone/>
-            </a:pPr>
-            <a:r>
-              <a:rPr lang="en-US" sz="1400" dirty="0">
-                <a:solidFill>
-                  <a:schemeClr val="accent5"/>
-                </a:solidFill>
-              </a:rPr>
-              <a:t>O resultado vira uma categoria. O limite de 3% para investigar é o da diretriz NICE NG12.</a:t>
-            </a:r>
-            <a:endParaRPr lang="en-US" sz="1400" dirty="0"/>
-          </a:p>
-        </p:txBody>
-      </p:sp>
-      <p:sp>
-        <p:nvSpPr>
-          <p:cNvPr id="18" name="Text 16"/>
-          <p:cNvSpPr txBox="1"/>
-          <p:nvPr/>
-        </p:nvSpPr>
-        <p:spPr>
-          <a:xfrm>
-            <a:off x="457200" y="3931920"/>
-            <a:ext cx="7315200" cy="320040"/>
-          </a:xfrm>
-          <a:prstGeom prst="rect">
-            <a:avLst/>
-          </a:prstGeom>
-          <a:noFill/>
-          <a:ln/>
-        </p:spPr>
-        <p:txBody>
-          <a:bodyPr wrap="square" lIns="0" tIns="0" rIns="0" bIns="0" rtlCol="0" anchor="ctr"/>
-          <a:lstStyle/>
-          <a:p>
-            <a:pPr indent="0" marL="0">
-              <a:buNone/>
-            </a:pPr>
-            <a:r>
-              <a:rPr lang="en-US" sz="1400" b="1" dirty="0">
-                <a:solidFill>
-                  <a:schemeClr val="tx2"/>
-                </a:solidFill>
-              </a:rPr>
-              <a:t>Categorias (oncologia nunca em vermelho)</a:t>
-            </a:r>
-            <a:endParaRPr lang="en-US" sz="1400" dirty="0"/>
-          </a:p>
-        </p:txBody>
-      </p:sp>
-      <p:sp>
-        <p:nvSpPr>
-          <p:cNvPr id="19" name="nivel-1"/>
-          <p:cNvSpPr/>
-          <p:nvPr/>
-        </p:nvSpPr>
-        <p:spPr>
-          <a:xfrm>
-            <a:off x="457200" y="4343400"/>
-            <a:ext cx="3520440" cy="868680"/>
-          </a:xfrm>
-          <a:prstGeom prst="roundRect">
-            <a:avLst>
-              <a:gd name="adj" fmla="val 10526"/>
-            </a:avLst>
-          </a:prstGeom>
-          <a:solidFill>
-            <a:srgbClr val="DCFCE7"/>
-          </a:solidFill>
-          <a:ln/>
-        </p:spPr>
+              <a:t>A MÉDICA VÊ</a:t>
+            </a:r>
+            <a:endParaRPr lang="en-US" sz="1200" dirty="0"/>
+          </a:p>
+        </p:txBody>
       </p:sp>
       <p:sp>
         <p:nvSpPr>
@@ -4573,33 +4825,124 @@
         </p:nvSpPr>
         <p:spPr>
           <a:xfrm>
-            <a:off x="685800" y="4343400"/>
-            <a:ext cx="3063240" cy="868680"/>
-          </a:xfrm>
-          <a:prstGeom prst="rect">
-            <a:avLst/>
-          </a:prstGeom>
-          <a:noFill/>
-          <a:ln/>
-        </p:spPr>
-        <p:txBody>
-          <a:bodyPr wrap="square" lIns="0" tIns="0" rIns="0" bIns="0" rtlCol="0" anchor="ctr"/>
+            <a:off x="6492240" y="1874520"/>
+            <a:ext cx="4983480" cy="3200400"/>
+          </a:xfrm>
+          <a:prstGeom prst="rect">
+            <a:avLst/>
+          </a:prstGeom>
+          <a:noFill/>
+          <a:ln/>
+        </p:spPr>
+        <p:txBody>
+          <a:bodyPr wrap="square" lIns="0" tIns="0" rIns="0" bIns="0" rtlCol="0" anchor="t"/>
+          <a:lstStyle/>
+          <a:p>
+            <a:pPr marL="342900" indent="-342900">
+              <a:spcAft>
+                <a:spcPts val="1000"/>
+              </a:spcAft>
+              <a:buSzPct val="100000"/>
+              <a:buChar char="•"/>
+            </a:pPr>
+            <a:r>
+              <a:rPr lang="en-US" sz="1500" dirty="0">
+                <a:solidFill>
+                  <a:schemeClr val="tx1"/>
+                </a:solidFill>
+              </a:rPr>
+              <a:t>Risco de 5 cânceres e 3 escores validados (STOP-Bang, FINDRISC, PHQ-9), com o porquê e a fonte.</a:t>
+            </a:r>
+            <a:endParaRPr lang="en-US" sz="1500" dirty="0"/>
+          </a:p>
+          <a:p>
+            <a:pPr marL="342900" indent="-342900">
+              <a:spcAft>
+                <a:spcPts val="1000"/>
+              </a:spcAft>
+              <a:buSzPct val="100000"/>
+              <a:buChar char="•"/>
+            </a:pPr>
+            <a:r>
+              <a:rPr lang="en-US" sz="1500" dirty="0">
+                <a:solidFill>
+                  <a:schemeClr val="tx1"/>
+                </a:solidFill>
+              </a:rPr>
+              <a:t>Ex.: "risco de câncer colorretal nos próximos 2 anos", sempre como triagem de risco, não diagnóstico.</a:t>
+            </a:r>
+            <a:endParaRPr lang="en-US" sz="1500" dirty="0"/>
+          </a:p>
+          <a:p>
+            <a:pPr marL="342900" indent="-342900">
+              <a:spcAft>
+                <a:spcPts val="1000"/>
+              </a:spcAft>
+              <a:buSzPct val="100000"/>
+              <a:buChar char="•"/>
+            </a:pPr>
+            <a:r>
+              <a:rPr lang="en-US" sz="1500" dirty="0">
+                <a:solidFill>
+                  <a:schemeClr val="tx1"/>
+                </a:solidFill>
+              </a:rPr>
+              <a:t>O alerta de INVESTIGAR e a Base da IA, que ela pode editar.</a:t>
+            </a:r>
+            <a:endParaRPr lang="en-US" sz="1500" dirty="0"/>
+          </a:p>
+          <a:p>
+            <a:pPr marL="342900" indent="-342900">
+              <a:spcAft>
+                <a:spcPts val="1000"/>
+              </a:spcAft>
+              <a:buSzPct val="100000"/>
+              <a:buChar char="•"/>
+            </a:pPr>
+            <a:r>
+              <a:rPr lang="en-US" sz="1500" dirty="0">
+                <a:solidFill>
+                  <a:schemeClr val="tx1"/>
+                </a:solidFill>
+              </a:rPr>
+              <a:t>Quem conversa sobre risco com o paciente é ela, na consulta.</a:t>
+            </a:r>
+            <a:endParaRPr lang="en-US" sz="1500" dirty="0"/>
+          </a:p>
+        </p:txBody>
+      </p:sp>
+      <p:sp>
+        <p:nvSpPr>
+          <p:cNvPr id="21" name="Text 19"/>
+          <p:cNvSpPr txBox="1"/>
+          <p:nvPr/>
+        </p:nvSpPr>
+        <p:spPr>
+          <a:xfrm>
+            <a:off x="457200" y="5486400"/>
+            <a:ext cx="11247120" cy="685800"/>
+          </a:xfrm>
+          <a:prstGeom prst="rect">
+            <a:avLst/>
+          </a:prstGeom>
+          <a:noFill/>
+          <a:ln/>
+        </p:spPr>
+        <p:txBody>
+          <a:bodyPr wrap="square" lIns="0" tIns="0" rIns="0" bIns="0" rtlCol="0" anchor="t"/>
           <a:lstStyle/>
           <a:p>
             <a:pPr indent="0" marL="0">
               <a:buNone/>
             </a:pPr>
             <a:r>
-              <a:rPr lang="en-US" sz="1800" b="1" dirty="0">
-                <a:solidFill>
-                  <a:srgbClr val="15803D"/>
-                </a:solidFill>
-              </a:rPr>
-              <a:t>ROTINA</a:t>
-            </a:r>
-            <a:endParaRPr lang="en-US" sz="1800" dirty="0"/>
-          </a:p>
-          <a:p>
+              <a:rPr lang="en-US" sz="1400" b="1" dirty="0">
+                <a:solidFill>
+                  <a:srgbClr val="003F7E"/>
+                </a:solidFill>
+              </a:rPr>
+              <a:t>De onde vêm os números: </a:t>
+            </a:r>
             <a:pPr indent="0" marL="0">
               <a:buNone/>
             </a:pPr>
@@ -4609,220 +4952,7 @@
                   <a:srgbClr val="0F172A"/>
                 </a:solidFill>
               </a:rPr>
-              <a:t>o resto: &lt; 1% e &lt; 2× a média</a:t>
-            </a:r>
-            <a:endParaRPr lang="en-US" sz="1800" dirty="0"/>
-          </a:p>
-        </p:txBody>
-      </p:sp>
-      <p:sp>
-        <p:nvSpPr>
-          <p:cNvPr id="21" name="nivel-2"/>
-          <p:cNvSpPr/>
-          <p:nvPr/>
-        </p:nvSpPr>
-        <p:spPr>
-          <a:xfrm>
-            <a:off x="4320540" y="4343400"/>
-            <a:ext cx="3520440" cy="868680"/>
-          </a:xfrm>
-          <a:prstGeom prst="roundRect">
-            <a:avLst>
-              <a:gd name="adj" fmla="val 10526"/>
-            </a:avLst>
-          </a:prstGeom>
-          <a:solidFill>
-            <a:srgbClr val="FEF3C7"/>
-          </a:solidFill>
-          <a:ln/>
-        </p:spPr>
-      </p:sp>
-      <p:sp>
-        <p:nvSpPr>
-          <p:cNvPr id="22" name="Text 20"/>
-          <p:cNvSpPr txBox="1"/>
-          <p:nvPr/>
-        </p:nvSpPr>
-        <p:spPr>
-          <a:xfrm>
-            <a:off x="4549140" y="4343400"/>
-            <a:ext cx="3063240" cy="868680"/>
-          </a:xfrm>
-          <a:prstGeom prst="rect">
-            <a:avLst/>
-          </a:prstGeom>
-          <a:noFill/>
-          <a:ln/>
-        </p:spPr>
-        <p:txBody>
-          <a:bodyPr wrap="square" lIns="0" tIns="0" rIns="0" bIns="0" rtlCol="0" anchor="ctr"/>
-          <a:lstStyle/>
-          <a:p>
-            <a:pPr indent="0" marL="0">
-              <a:buNone/>
-            </a:pPr>
-            <a:r>
-              <a:rPr lang="en-US" sz="1800" b="1" dirty="0">
-                <a:solidFill>
-                  <a:srgbClr val="B45309"/>
-                </a:solidFill>
-              </a:rPr>
-              <a:t>ATENÇÃO</a:t>
-            </a:r>
-            <a:endParaRPr lang="en-US" sz="1800" dirty="0"/>
-          </a:p>
-          <a:p>
-            <a:pPr indent="0" marL="0">
-              <a:buNone/>
-            </a:pPr>
-            <a:r>
-              <a:rPr lang="en-US" sz="1400" dirty="0">
-                <a:solidFill>
-                  <a:srgbClr val="0F172A"/>
-                </a:solidFill>
-              </a:rPr>
-              <a:t>≥ 1% ou 2× a média da idade</a:t>
-            </a:r>
-            <a:endParaRPr lang="en-US" sz="1800" dirty="0"/>
-          </a:p>
-        </p:txBody>
-      </p:sp>
-      <p:sp>
-        <p:nvSpPr>
-          <p:cNvPr id="23" name="nivel-3"/>
-          <p:cNvSpPr/>
-          <p:nvPr/>
-        </p:nvSpPr>
-        <p:spPr>
-          <a:xfrm>
-            <a:off x="8183880" y="4343400"/>
-            <a:ext cx="3520440" cy="868680"/>
-          </a:xfrm>
-          <a:prstGeom prst="roundRect">
-            <a:avLst>
-              <a:gd name="adj" fmla="val 10526"/>
-            </a:avLst>
-          </a:prstGeom>
-          <a:solidFill>
-            <a:srgbClr val="FFEDD5"/>
-          </a:solidFill>
-          <a:ln/>
-        </p:spPr>
-      </p:sp>
-      <p:sp>
-        <p:nvSpPr>
-          <p:cNvPr id="24" name="Text 22"/>
-          <p:cNvSpPr txBox="1"/>
-          <p:nvPr/>
-        </p:nvSpPr>
-        <p:spPr>
-          <a:xfrm>
-            <a:off x="8412480" y="4343400"/>
-            <a:ext cx="3063240" cy="868680"/>
-          </a:xfrm>
-          <a:prstGeom prst="rect">
-            <a:avLst/>
-          </a:prstGeom>
-          <a:noFill/>
-          <a:ln/>
-        </p:spPr>
-        <p:txBody>
-          <a:bodyPr wrap="square" lIns="0" tIns="0" rIns="0" bIns="0" rtlCol="0" anchor="ctr"/>
-          <a:lstStyle/>
-          <a:p>
-            <a:pPr indent="0" marL="0">
-              <a:buNone/>
-            </a:pPr>
-            <a:r>
-              <a:rPr lang="en-US" sz="1800" b="1" dirty="0">
-                <a:solidFill>
-                  <a:srgbClr val="C2410C"/>
-                </a:solidFill>
-              </a:rPr>
-              <a:t>INVESTIGAR</a:t>
-            </a:r>
-            <a:endParaRPr lang="en-US" sz="1800" dirty="0"/>
-          </a:p>
-          <a:p>
-            <a:pPr indent="0" marL="0">
-              <a:buNone/>
-            </a:pPr>
-            <a:r>
-              <a:rPr lang="en-US" sz="1400" dirty="0">
-                <a:solidFill>
-                  <a:srgbClr val="0F172A"/>
-                </a:solidFill>
-              </a:rPr>
-              <a:t>≥ 3%: procure avaliação</a:t>
-            </a:r>
-            <a:endParaRPr lang="en-US" sz="1800" dirty="0"/>
-          </a:p>
-        </p:txBody>
-      </p:sp>
-      <p:sp>
-        <p:nvSpPr>
-          <p:cNvPr id="25" name="Text 23"/>
-          <p:cNvSpPr txBox="1"/>
-          <p:nvPr/>
-        </p:nvSpPr>
-        <p:spPr>
-          <a:xfrm>
-            <a:off x="457200" y="5440680"/>
-            <a:ext cx="11247120" cy="640080"/>
-          </a:xfrm>
-          <a:prstGeom prst="rect">
-            <a:avLst/>
-          </a:prstGeom>
-          <a:noFill/>
-          <a:ln/>
-        </p:spPr>
-        <p:txBody>
-          <a:bodyPr wrap="square" lIns="0" tIns="0" rIns="0" bIns="0" rtlCol="0" anchor="t"/>
-          <a:lstStyle/>
-          <a:p>
-            <a:pPr indent="0" marL="0">
-              <a:buNone/>
-            </a:pPr>
-            <a:r>
-              <a:rPr lang="en-US" sz="1400" b="1" dirty="0">
-                <a:solidFill>
-                  <a:srgbClr val="003F7E"/>
-                </a:solidFill>
-              </a:rPr>
-              <a:t>A conta: </a:t>
-            </a:r>
-            <a:pPr indent="0" marL="0">
-              <a:buNone/>
-            </a:pPr>
-            <a:r>
-              <a:rPr lang="en-US" sz="1400" dirty="0">
-                <a:solidFill>
-                  <a:srgbClr val="0F172A"/>
-                </a:solidFill>
-              </a:rPr>
-              <a:t>logit(chance final) = logit(chance de partida) + Σ ln(LR de cada pista).  </a:t>
-            </a:r>
-            <a:pPr indent="0" marL="0">
-              <a:buNone/>
-            </a:pPr>
-            <a:r>
-              <a:rPr lang="en-US" sz="1400" b="1" dirty="0">
-                <a:solidFill>
-                  <a:srgbClr val="003F7E"/>
-                </a:solidFill>
-              </a:rPr>
-              <a:t>Próxima pergunta: </a:t>
-            </a:r>
-            <a:pPr indent="0" marL="0">
-              <a:buNone/>
-            </a:pPr>
-            <a:r>
-              <a:rPr lang="en-US" sz="1400" dirty="0">
-                <a:solidFill>
-                  <a:srgbClr val="0F172A"/>
-                </a:solidFill>
-              </a:rPr>
-              <a:t>a que mais muda o risco (Σ |ln LR| ÷ custo).</a:t>
+              <a:t>Guyton &amp; Hall, Tratado de Fisiologia Médica (base principal) · INCA · OMS · Ministério da Saúde · NICE · SBC · SBD. Toda fonte é documentada; número sem fonte sai do motor.</a:t>
             </a:r>
             <a:endParaRPr lang="en-US" sz="1400" dirty="0"/>
           </a:p>
@@ -4900,7 +5030,65 @@
       </p:grpSpPr>
       <p:sp>
         <p:nvSpPr>
-          <p:cNvPr id="2" name="Text 0"/>
+          <p:cNvPr id="2" name="selo-tela-medica"/>
+          <p:cNvSpPr/>
+          <p:nvPr/>
+        </p:nvSpPr>
+        <p:spPr>
+          <a:xfrm>
+            <a:off x="457200" y="91440"/>
+            <a:ext cx="1600200" cy="274320"/>
+          </a:xfrm>
+          <a:prstGeom prst="roundRect">
+            <a:avLst>
+              <a:gd name="adj" fmla="val 50000"/>
+            </a:avLst>
+          </a:prstGeom>
+          <a:solidFill>
+            <a:srgbClr val="E6F7FD"/>
+          </a:solidFill>
+          <a:ln/>
+        </p:spPr>
+      </p:sp>
+      <p:sp>
+        <p:nvSpPr>
+          <p:cNvPr id="3" name="Text 1"/>
+          <p:cNvSpPr txBox="1"/>
+          <p:nvPr/>
+        </p:nvSpPr>
+        <p:spPr>
+          <a:xfrm>
+            <a:off x="457200" y="91440"/>
+            <a:ext cx="1600200" cy="274320"/>
+          </a:xfrm>
+          <a:prstGeom prst="rect">
+            <a:avLst/>
+          </a:prstGeom>
+          <a:noFill/>
+          <a:ln/>
+        </p:spPr>
+        <p:txBody>
+          <a:bodyPr wrap="square" lIns="0" tIns="0" rIns="0" bIns="0" rtlCol="0" anchor="ctr"/>
+          <a:lstStyle/>
+          <a:p>
+            <a:pPr algn="ctr" indent="0" marL="0">
+              <a:buNone/>
+            </a:pPr>
+            <a:r>
+              <a:rPr lang="en-US" sz="1000" b="1" spc="100" kern="0" dirty="0">
+                <a:solidFill>
+                  <a:srgbClr val="000000"/>
+                </a:solidFill>
+              </a:rPr>
+              <a:t>TELA DA MÉDICA</a:t>
+            </a:r>
+            <a:endParaRPr lang="en-US" sz="1000" dirty="0"/>
+          </a:p>
+        </p:txBody>
+      </p:sp>
+      <p:sp>
+        <p:nvSpPr>
+          <p:cNvPr id="4" name="Text 0"/>
           <p:cNvSpPr/>
           <p:nvPr>
             <p:ph idx="100" type="title" hasCustomPrompt="1"/>
@@ -4930,7 +5118,7 @@
                   <a:schemeClr val="tx2"/>
                 </a:solidFill>
               </a:rPr>
-              <a:t>Sr. Roberto, 63: de 2 em 1.000 para INVESTIGAR</a:t>
+              <a:t>Como a IA estima o risco para a médica</a:t>
             </a:r>
             <a:endParaRPr lang="en-US" sz="3400" dirty="0"/>
           </a:p>
@@ -4938,54 +5126,18 @@
       </p:sp>
       <p:sp>
         <p:nvSpPr>
-          <p:cNvPr id="3" name="Text 1"/>
-          <p:cNvSpPr txBox="1"/>
-          <p:nvPr/>
-        </p:nvSpPr>
-        <p:spPr>
-          <a:xfrm>
-            <a:off x="457200" y="1097280"/>
-            <a:ext cx="11247120" cy="411480"/>
-          </a:xfrm>
-          <a:prstGeom prst="rect">
-            <a:avLst/>
-          </a:prstGeom>
-          <a:noFill/>
-          <a:ln/>
-        </p:spPr>
-        <p:txBody>
-          <a:bodyPr wrap="square" lIns="0" tIns="0" rIns="0" bIns="0" rtlCol="0" anchor="ctr"/>
-          <a:lstStyle/>
-          <a:p>
-            <a:pPr indent="0" marL="0">
-              <a:buNone/>
-            </a:pPr>
-            <a:r>
-              <a:rPr lang="en-US" sz="1600" dirty="0">
-                <a:solidFill>
-                  <a:schemeClr val="accent5"/>
-                </a:solidFill>
-              </a:rPr>
-              <a:t>Ex-fumante (35 maços-ano, parou há 8 anos). Contou que o intestino mudou e anda cansado.</a:t>
-            </a:r>
-            <a:endParaRPr lang="en-US" sz="1600" dirty="0"/>
-          </a:p>
-        </p:txBody>
-      </p:sp>
-      <p:sp>
-        <p:nvSpPr>
-          <p:cNvPr id="4" name="card-numeros"/>
+          <p:cNvPr id="5" name="passo-1"/>
           <p:cNvSpPr/>
           <p:nvPr/>
         </p:nvSpPr>
         <p:spPr>
           <a:xfrm>
-            <a:off x="457200" y="1737360"/>
-            <a:ext cx="4206240" cy="3429000"/>
+            <a:off x="457200" y="1325880"/>
+            <a:ext cx="3520440" cy="2331720"/>
           </a:xfrm>
           <a:prstGeom prst="roundRect">
             <a:avLst>
-              <a:gd name="adj" fmla="val 3200"/>
+              <a:gd name="adj" fmla="val 4706"/>
             </a:avLst>
           </a:prstGeom>
           <a:solidFill>
@@ -5001,14 +5153,34 @@
       </p:sp>
       <p:sp>
         <p:nvSpPr>
-          <p:cNvPr id="5" name="Text 3"/>
+          <p:cNvPr id="6" name="num-1"/>
+          <p:cNvSpPr/>
+          <p:nvPr/>
+        </p:nvSpPr>
+        <p:spPr>
+          <a:xfrm>
+            <a:off x="685800" y="1554480"/>
+            <a:ext cx="457200" cy="457200"/>
+          </a:xfrm>
+          <a:prstGeom prst="ellipse">
+            <a:avLst/>
+          </a:prstGeom>
+          <a:solidFill>
+            <a:schemeClr val="accent1"/>
+          </a:solidFill>
+          <a:ln/>
+        </p:spPr>
+      </p:sp>
+      <p:sp>
+        <p:nvSpPr>
+          <p:cNvPr id="7" name="Text 5"/>
           <p:cNvSpPr txBox="1"/>
           <p:nvPr/>
         </p:nvSpPr>
         <p:spPr>
           <a:xfrm>
-            <a:off x="731520" y="1874520"/>
-            <a:ext cx="3657600" cy="731520"/>
+            <a:off x="685800" y="1554480"/>
+            <a:ext cx="457200" cy="457200"/>
           </a:xfrm>
           <a:prstGeom prst="rect">
             <a:avLst/>
@@ -5020,118 +5192,82 @@
           <a:bodyPr wrap="square" lIns="0" tIns="0" rIns="0" bIns="0" rtlCol="0" anchor="ctr"/>
           <a:lstStyle/>
           <a:p>
-            <a:pPr indent="0" marL="0">
-              <a:buNone/>
-            </a:pPr>
-            <a:r>
-              <a:rPr lang="en-US" sz="4400" b="1" dirty="0">
-                <a:solidFill>
-                  <a:schemeClr val="tx2"/>
+            <a:pPr algn="ctr" indent="0" marL="0">
+              <a:buNone/>
+            </a:pPr>
+            <a:r>
+              <a:rPr lang="en-US" sz="1800" b="1" dirty="0">
+                <a:solidFill>
+                  <a:schemeClr val="bg1"/>
                 </a:solidFill>
                 <a:latin typeface="Arial" pitchFamily="34" charset="0"/>
                 <a:ea typeface="Arial" pitchFamily="34" charset="-122"/>
                 <a:cs typeface="Arial" pitchFamily="34" charset="-120"/>
               </a:rPr>
-              <a:t>0,16%</a:t>
-            </a:r>
-            <a:endParaRPr lang="en-US" sz="4400" dirty="0"/>
-          </a:p>
-        </p:txBody>
-      </p:sp>
-      <p:sp>
-        <p:nvSpPr>
-          <p:cNvPr id="6" name="Text 4"/>
+              <a:t>1</a:t>
+            </a:r>
+            <a:endParaRPr lang="en-US" sz="1800" dirty="0"/>
+          </a:p>
+        </p:txBody>
+      </p:sp>
+      <p:sp>
+        <p:nvSpPr>
+          <p:cNvPr id="8" name="Text 6"/>
           <p:cNvSpPr txBox="1"/>
           <p:nvPr/>
         </p:nvSpPr>
         <p:spPr>
           <a:xfrm>
-            <a:off x="731520" y="2606040"/>
-            <a:ext cx="3657600" cy="548640"/>
-          </a:xfrm>
-          <a:prstGeom prst="rect">
-            <a:avLst/>
-          </a:prstGeom>
-          <a:noFill/>
-          <a:ln/>
-        </p:spPr>
-        <p:txBody>
-          <a:bodyPr wrap="square" lIns="0" tIns="0" rIns="0" bIns="0" rtlCol="0" anchor="t"/>
+            <a:off x="685800" y="2148840"/>
+            <a:ext cx="3063240" cy="411480"/>
+          </a:xfrm>
+          <a:prstGeom prst="rect">
+            <a:avLst/>
+          </a:prstGeom>
+          <a:noFill/>
+          <a:ln/>
+        </p:spPr>
+        <p:txBody>
+          <a:bodyPr wrap="square" lIns="0" tIns="0" rIns="0" bIns="0" rtlCol="0" anchor="ctr"/>
           <a:lstStyle/>
           <a:p>
             <a:pPr indent="0" marL="0">
               <a:buNone/>
             </a:pPr>
             <a:r>
-              <a:rPr lang="en-US" sz="1400" dirty="0">
-                <a:solidFill>
-                  <a:schemeClr val="accent5"/>
-                </a:solidFill>
-              </a:rPr>
-              <a:t>média de homens de 60–64 anos em 2 anos (~2 em 1.000)</a:t>
-            </a:r>
-            <a:endParaRPr lang="en-US" sz="1400" dirty="0"/>
-          </a:p>
-        </p:txBody>
-      </p:sp>
-      <p:sp>
-        <p:nvSpPr>
-          <p:cNvPr id="7" name="Text 5"/>
-          <p:cNvSpPr txBox="1"/>
-          <p:nvPr/>
-        </p:nvSpPr>
-        <p:spPr>
-          <a:xfrm>
-            <a:off x="731520" y="3291840"/>
-            <a:ext cx="3657600" cy="731520"/>
-          </a:xfrm>
-          <a:prstGeom prst="rect">
-            <a:avLst/>
-          </a:prstGeom>
-          <a:noFill/>
-          <a:ln/>
-        </p:spPr>
-        <p:txBody>
-          <a:bodyPr wrap="square" lIns="0" tIns="0" rIns="0" bIns="0" rtlCol="0" anchor="ctr"/>
-          <a:lstStyle/>
-          <a:p>
-            <a:pPr indent="0" marL="0">
-              <a:buNone/>
-            </a:pPr>
-            <a:r>
-              <a:rPr lang="en-US" sz="4400" b="1" dirty="0">
-                <a:solidFill>
-                  <a:srgbClr val="C2410C"/>
+              <a:rPr lang="en-US" sz="2000" b="1" dirty="0">
+                <a:solidFill>
+                  <a:schemeClr val="tx1"/>
                 </a:solidFill>
                 <a:latin typeface="Arial" pitchFamily="34" charset="0"/>
                 <a:ea typeface="Arial" pitchFamily="34" charset="-122"/>
                 <a:cs typeface="Arial" pitchFamily="34" charset="-120"/>
               </a:rPr>
-              <a:t>≥ 20%</a:t>
-            </a:r>
-            <a:endParaRPr lang="en-US" sz="4400" dirty="0"/>
-          </a:p>
-        </p:txBody>
-      </p:sp>
-      <p:sp>
-        <p:nvSpPr>
-          <p:cNvPr id="8" name="Text 6"/>
+              <a:t>Começa pela média</a:t>
+            </a:r>
+            <a:endParaRPr lang="en-US" sz="2000" dirty="0"/>
+          </a:p>
+        </p:txBody>
+      </p:sp>
+      <p:sp>
+        <p:nvSpPr>
+          <p:cNvPr id="9" name="Text 7"/>
           <p:cNvSpPr txBox="1"/>
           <p:nvPr/>
         </p:nvSpPr>
         <p:spPr>
           <a:xfrm>
-            <a:off x="731520" y="4023360"/>
-            <a:ext cx="3657600" cy="365760"/>
-          </a:xfrm>
-          <a:prstGeom prst="rect">
-            <a:avLst/>
-          </a:prstGeom>
-          <a:noFill/>
-          <a:ln/>
-        </p:spPr>
-        <p:txBody>
-          <a:bodyPr wrap="square" lIns="0" tIns="0" rIns="0" bIns="0" rtlCol="0" anchor="ctr"/>
+            <a:off x="685800" y="2606040"/>
+            <a:ext cx="3063240" cy="960120"/>
+          </a:xfrm>
+          <a:prstGeom prst="rect">
+            <a:avLst/>
+          </a:prstGeom>
+          <a:noFill/>
+          <a:ln/>
+        </p:spPr>
+        <p:txBody>
+          <a:bodyPr wrap="square" lIns="0" tIns="0" rIns="0" bIns="0" rtlCol="0" anchor="t"/>
           <a:lstStyle/>
           <a:p>
             <a:pPr indent="0" marL="0">
@@ -5143,7 +5279,7 @@
                   <a:schemeClr val="accent5"/>
                 </a:solidFill>
               </a:rPr>
-              <a:t>com as pistas: mais de 1 em 5</a:t>
+              <a:t>Chance de alguém da mesma idade e sexo receber o diagnóstico em 2 anos. INCA (Estimativa 2026) e GLOBOCAN 2022 Brasil.</a:t>
             </a:r>
             <a:endParaRPr lang="en-US" sz="1400" dirty="0"/>
           </a:p>
@@ -5151,18 +5287,520 @@
       </p:sp>
       <p:sp>
         <p:nvSpPr>
-          <p:cNvPr id="9" name="selo-roberto"/>
+          <p:cNvPr id="10" name="passo-2"/>
           <p:cNvSpPr/>
           <p:nvPr/>
         </p:nvSpPr>
         <p:spPr>
           <a:xfrm>
-            <a:off x="731520" y="4526280"/>
-            <a:ext cx="2926080" cy="384048"/>
+            <a:off x="4320540" y="1325880"/>
+            <a:ext cx="3520440" cy="2331720"/>
           </a:xfrm>
           <a:prstGeom prst="roundRect">
             <a:avLst>
-              <a:gd name="adj" fmla="val 50000"/>
+              <a:gd name="adj" fmla="val 4706"/>
+            </a:avLst>
+          </a:prstGeom>
+          <a:solidFill>
+            <a:schemeClr val="bg2"/>
+          </a:solidFill>
+          <a:ln w="12700">
+            <a:solidFill>
+              <a:schemeClr val="accent6"/>
+            </a:solidFill>
+            <a:prstDash val="solid"/>
+          </a:ln>
+        </p:spPr>
+      </p:sp>
+      <p:sp>
+        <p:nvSpPr>
+          <p:cNvPr id="11" name="num-2"/>
+          <p:cNvSpPr/>
+          <p:nvPr/>
+        </p:nvSpPr>
+        <p:spPr>
+          <a:xfrm>
+            <a:off x="4549140" y="1554480"/>
+            <a:ext cx="457200" cy="457200"/>
+          </a:xfrm>
+          <a:prstGeom prst="ellipse">
+            <a:avLst/>
+          </a:prstGeom>
+          <a:solidFill>
+            <a:schemeClr val="accent1"/>
+          </a:solidFill>
+          <a:ln/>
+        </p:spPr>
+      </p:sp>
+      <p:sp>
+        <p:nvSpPr>
+          <p:cNvPr id="12" name="Text 10"/>
+          <p:cNvSpPr txBox="1"/>
+          <p:nvPr/>
+        </p:nvSpPr>
+        <p:spPr>
+          <a:xfrm>
+            <a:off x="4549140" y="1554480"/>
+            <a:ext cx="457200" cy="457200"/>
+          </a:xfrm>
+          <a:prstGeom prst="rect">
+            <a:avLst/>
+          </a:prstGeom>
+          <a:noFill/>
+          <a:ln/>
+        </p:spPr>
+        <p:txBody>
+          <a:bodyPr wrap="square" lIns="0" tIns="0" rIns="0" bIns="0" rtlCol="0" anchor="ctr"/>
+          <a:lstStyle/>
+          <a:p>
+            <a:pPr algn="ctr" indent="0" marL="0">
+              <a:buNone/>
+            </a:pPr>
+            <a:r>
+              <a:rPr lang="en-US" sz="1800" b="1" dirty="0">
+                <a:solidFill>
+                  <a:schemeClr val="bg1"/>
+                </a:solidFill>
+                <a:latin typeface="Arial" pitchFamily="34" charset="0"/>
+                <a:ea typeface="Arial" pitchFamily="34" charset="-122"/>
+                <a:cs typeface="Arial" pitchFamily="34" charset="-120"/>
+              </a:rPr>
+              <a:t>2</a:t>
+            </a:r>
+            <a:endParaRPr lang="en-US" sz="1800" dirty="0"/>
+          </a:p>
+        </p:txBody>
+      </p:sp>
+      <p:sp>
+        <p:nvSpPr>
+          <p:cNvPr id="13" name="Text 11"/>
+          <p:cNvSpPr txBox="1"/>
+          <p:nvPr/>
+        </p:nvSpPr>
+        <p:spPr>
+          <a:xfrm>
+            <a:off x="4549140" y="2148840"/>
+            <a:ext cx="3063240" cy="411480"/>
+          </a:xfrm>
+          <a:prstGeom prst="rect">
+            <a:avLst/>
+          </a:prstGeom>
+          <a:noFill/>
+          <a:ln/>
+        </p:spPr>
+        <p:txBody>
+          <a:bodyPr wrap="square" lIns="0" tIns="0" rIns="0" bIns="0" rtlCol="0" anchor="ctr"/>
+          <a:lstStyle/>
+          <a:p>
+            <a:pPr indent="0" marL="0">
+              <a:buNone/>
+            </a:pPr>
+            <a:r>
+              <a:rPr lang="en-US" sz="2000" b="1" dirty="0">
+                <a:solidFill>
+                  <a:schemeClr val="tx1"/>
+                </a:solidFill>
+                <a:latin typeface="Arial" pitchFamily="34" charset="0"/>
+                <a:ea typeface="Arial" pitchFamily="34" charset="-122"/>
+                <a:cs typeface="Arial" pitchFamily="34" charset="-120"/>
+              </a:rPr>
+              <a:t>Cada pista multiplica</a:t>
+            </a:r>
+            <a:endParaRPr lang="en-US" sz="2000" dirty="0"/>
+          </a:p>
+        </p:txBody>
+      </p:sp>
+      <p:sp>
+        <p:nvSpPr>
+          <p:cNvPr id="14" name="Text 12"/>
+          <p:cNvSpPr txBox="1"/>
+          <p:nvPr/>
+        </p:nvSpPr>
+        <p:spPr>
+          <a:xfrm>
+            <a:off x="4549140" y="2606040"/>
+            <a:ext cx="3063240" cy="960120"/>
+          </a:xfrm>
+          <a:prstGeom prst="rect">
+            <a:avLst/>
+          </a:prstGeom>
+          <a:noFill/>
+          <a:ln/>
+        </p:spPr>
+        <p:txBody>
+          <a:bodyPr wrap="square" lIns="0" tIns="0" rIns="0" bIns="0" rtlCol="0" anchor="t"/>
+          <a:lstStyle/>
+          <a:p>
+            <a:pPr indent="0" marL="0">
+              <a:buNone/>
+            </a:pPr>
+            <a:r>
+              <a:rPr lang="en-US" sz="1400" dirty="0">
+                <a:solidFill>
+                  <a:schemeClr val="accent5"/>
+                </a:solidFill>
+              </a:rPr>
+              <a:t>Sintomas, exames e a balança mudam a chance. A força (LR) vem de estudos: FIT positivo ×13, nódulo na mama ×55.</a:t>
+            </a:r>
+            <a:endParaRPr lang="en-US" sz="1400" dirty="0"/>
+          </a:p>
+        </p:txBody>
+      </p:sp>
+      <p:sp>
+        <p:nvSpPr>
+          <p:cNvPr id="15" name="passo-3"/>
+          <p:cNvSpPr/>
+          <p:nvPr/>
+        </p:nvSpPr>
+        <p:spPr>
+          <a:xfrm>
+            <a:off x="8183880" y="1325880"/>
+            <a:ext cx="3520440" cy="2331720"/>
+          </a:xfrm>
+          <a:prstGeom prst="roundRect">
+            <a:avLst>
+              <a:gd name="adj" fmla="val 4706"/>
+            </a:avLst>
+          </a:prstGeom>
+          <a:solidFill>
+            <a:schemeClr val="bg2"/>
+          </a:solidFill>
+          <a:ln w="12700">
+            <a:solidFill>
+              <a:schemeClr val="accent6"/>
+            </a:solidFill>
+            <a:prstDash val="solid"/>
+          </a:ln>
+        </p:spPr>
+      </p:sp>
+      <p:sp>
+        <p:nvSpPr>
+          <p:cNvPr id="16" name="num-3"/>
+          <p:cNvSpPr/>
+          <p:nvPr/>
+        </p:nvSpPr>
+        <p:spPr>
+          <a:xfrm>
+            <a:off x="8412480" y="1554480"/>
+            <a:ext cx="457200" cy="457200"/>
+          </a:xfrm>
+          <a:prstGeom prst="ellipse">
+            <a:avLst/>
+          </a:prstGeom>
+          <a:solidFill>
+            <a:schemeClr val="accent1"/>
+          </a:solidFill>
+          <a:ln/>
+        </p:spPr>
+      </p:sp>
+      <p:sp>
+        <p:nvSpPr>
+          <p:cNvPr id="17" name="Text 15"/>
+          <p:cNvSpPr txBox="1"/>
+          <p:nvPr/>
+        </p:nvSpPr>
+        <p:spPr>
+          <a:xfrm>
+            <a:off x="8412480" y="1554480"/>
+            <a:ext cx="457200" cy="457200"/>
+          </a:xfrm>
+          <a:prstGeom prst="rect">
+            <a:avLst/>
+          </a:prstGeom>
+          <a:noFill/>
+          <a:ln/>
+        </p:spPr>
+        <p:txBody>
+          <a:bodyPr wrap="square" lIns="0" tIns="0" rIns="0" bIns="0" rtlCol="0" anchor="ctr"/>
+          <a:lstStyle/>
+          <a:p>
+            <a:pPr algn="ctr" indent="0" marL="0">
+              <a:buNone/>
+            </a:pPr>
+            <a:r>
+              <a:rPr lang="en-US" sz="1800" b="1" dirty="0">
+                <a:solidFill>
+                  <a:schemeClr val="bg1"/>
+                </a:solidFill>
+                <a:latin typeface="Arial" pitchFamily="34" charset="0"/>
+                <a:ea typeface="Arial" pitchFamily="34" charset="-122"/>
+                <a:cs typeface="Arial" pitchFamily="34" charset="-120"/>
+              </a:rPr>
+              <a:t>3</a:t>
+            </a:r>
+            <a:endParaRPr lang="en-US" sz="1800" dirty="0"/>
+          </a:p>
+        </p:txBody>
+      </p:sp>
+      <p:sp>
+        <p:nvSpPr>
+          <p:cNvPr id="18" name="Text 16"/>
+          <p:cNvSpPr txBox="1"/>
+          <p:nvPr/>
+        </p:nvSpPr>
+        <p:spPr>
+          <a:xfrm>
+            <a:off x="8412480" y="2148840"/>
+            <a:ext cx="3063240" cy="411480"/>
+          </a:xfrm>
+          <a:prstGeom prst="rect">
+            <a:avLst/>
+          </a:prstGeom>
+          <a:noFill/>
+          <a:ln/>
+        </p:spPr>
+        <p:txBody>
+          <a:bodyPr wrap="square" lIns="0" tIns="0" rIns="0" bIns="0" rtlCol="0" anchor="ctr"/>
+          <a:lstStyle/>
+          <a:p>
+            <a:pPr indent="0" marL="0">
+              <a:buNone/>
+            </a:pPr>
+            <a:r>
+              <a:rPr lang="en-US" sz="2000" b="1" dirty="0">
+                <a:solidFill>
+                  <a:schemeClr val="tx1"/>
+                </a:solidFill>
+                <a:latin typeface="Arial" pitchFamily="34" charset="0"/>
+                <a:ea typeface="Arial" pitchFamily="34" charset="-122"/>
+                <a:cs typeface="Arial" pitchFamily="34" charset="-120"/>
+              </a:rPr>
+              <a:t>Compara com limites</a:t>
+            </a:r>
+            <a:endParaRPr lang="en-US" sz="2000" dirty="0"/>
+          </a:p>
+        </p:txBody>
+      </p:sp>
+      <p:sp>
+        <p:nvSpPr>
+          <p:cNvPr id="19" name="Text 17"/>
+          <p:cNvSpPr txBox="1"/>
+          <p:nvPr/>
+        </p:nvSpPr>
+        <p:spPr>
+          <a:xfrm>
+            <a:off x="8412480" y="2606040"/>
+            <a:ext cx="3063240" cy="960120"/>
+          </a:xfrm>
+          <a:prstGeom prst="rect">
+            <a:avLst/>
+          </a:prstGeom>
+          <a:noFill/>
+          <a:ln/>
+        </p:spPr>
+        <p:txBody>
+          <a:bodyPr wrap="square" lIns="0" tIns="0" rIns="0" bIns="0" rtlCol="0" anchor="t"/>
+          <a:lstStyle/>
+          <a:p>
+            <a:pPr indent="0" marL="0">
+              <a:buNone/>
+            </a:pPr>
+            <a:r>
+              <a:rPr lang="en-US" sz="1400" dirty="0">
+                <a:solidFill>
+                  <a:schemeClr val="accent5"/>
+                </a:solidFill>
+              </a:rPr>
+              <a:t>O resultado vira uma categoria. O limite de 3% para investigar é o da diretriz NICE NG12.</a:t>
+            </a:r>
+            <a:endParaRPr lang="en-US" sz="1400" dirty="0"/>
+          </a:p>
+        </p:txBody>
+      </p:sp>
+      <p:sp>
+        <p:nvSpPr>
+          <p:cNvPr id="20" name="Text 18"/>
+          <p:cNvSpPr txBox="1"/>
+          <p:nvPr/>
+        </p:nvSpPr>
+        <p:spPr>
+          <a:xfrm>
+            <a:off x="457200" y="3931920"/>
+            <a:ext cx="7315200" cy="320040"/>
+          </a:xfrm>
+          <a:prstGeom prst="rect">
+            <a:avLst/>
+          </a:prstGeom>
+          <a:noFill/>
+          <a:ln/>
+        </p:spPr>
+        <p:txBody>
+          <a:bodyPr wrap="square" lIns="0" tIns="0" rIns="0" bIns="0" rtlCol="0" anchor="ctr"/>
+          <a:lstStyle/>
+          <a:p>
+            <a:pPr indent="0" marL="0">
+              <a:buNone/>
+            </a:pPr>
+            <a:r>
+              <a:rPr lang="en-US" sz="1400" b="1" dirty="0">
+                <a:solidFill>
+                  <a:schemeClr val="tx2"/>
+                </a:solidFill>
+              </a:rPr>
+              <a:t>Categorias que a médica vê (nunca em vermelho)</a:t>
+            </a:r>
+            <a:endParaRPr lang="en-US" sz="1400" dirty="0"/>
+          </a:p>
+        </p:txBody>
+      </p:sp>
+      <p:sp>
+        <p:nvSpPr>
+          <p:cNvPr id="21" name="nivel-1"/>
+          <p:cNvSpPr/>
+          <p:nvPr/>
+        </p:nvSpPr>
+        <p:spPr>
+          <a:xfrm>
+            <a:off x="457200" y="4343400"/>
+            <a:ext cx="3520440" cy="868680"/>
+          </a:xfrm>
+          <a:prstGeom prst="roundRect">
+            <a:avLst>
+              <a:gd name="adj" fmla="val 10526"/>
+            </a:avLst>
+          </a:prstGeom>
+          <a:solidFill>
+            <a:srgbClr val="DCFCE7"/>
+          </a:solidFill>
+          <a:ln/>
+        </p:spPr>
+      </p:sp>
+      <p:sp>
+        <p:nvSpPr>
+          <p:cNvPr id="22" name="Text 20"/>
+          <p:cNvSpPr txBox="1"/>
+          <p:nvPr/>
+        </p:nvSpPr>
+        <p:spPr>
+          <a:xfrm>
+            <a:off x="685800" y="4343400"/>
+            <a:ext cx="3063240" cy="868680"/>
+          </a:xfrm>
+          <a:prstGeom prst="rect">
+            <a:avLst/>
+          </a:prstGeom>
+          <a:noFill/>
+          <a:ln/>
+        </p:spPr>
+        <p:txBody>
+          <a:bodyPr wrap="square" lIns="0" tIns="0" rIns="0" bIns="0" rtlCol="0" anchor="ctr"/>
+          <a:lstStyle/>
+          <a:p>
+            <a:pPr indent="0" marL="0">
+              <a:buNone/>
+            </a:pPr>
+            <a:r>
+              <a:rPr lang="en-US" sz="1800" b="1" dirty="0">
+                <a:solidFill>
+                  <a:srgbClr val="15803D"/>
+                </a:solidFill>
+              </a:rPr>
+              <a:t>ROTINA</a:t>
+            </a:r>
+            <a:endParaRPr lang="en-US" sz="1800" dirty="0"/>
+          </a:p>
+          <a:p>
+            <a:pPr indent="0" marL="0">
+              <a:buNone/>
+            </a:pPr>
+            <a:r>
+              <a:rPr lang="en-US" sz="1400" dirty="0">
+                <a:solidFill>
+                  <a:srgbClr val="0F172A"/>
+                </a:solidFill>
+              </a:rPr>
+              <a:t>o resto: &lt; 1% e &lt; 2× a média</a:t>
+            </a:r>
+            <a:endParaRPr lang="en-US" sz="1800" dirty="0"/>
+          </a:p>
+        </p:txBody>
+      </p:sp>
+      <p:sp>
+        <p:nvSpPr>
+          <p:cNvPr id="23" name="nivel-2"/>
+          <p:cNvSpPr/>
+          <p:nvPr/>
+        </p:nvSpPr>
+        <p:spPr>
+          <a:xfrm>
+            <a:off x="4320540" y="4343400"/>
+            <a:ext cx="3520440" cy="868680"/>
+          </a:xfrm>
+          <a:prstGeom prst="roundRect">
+            <a:avLst>
+              <a:gd name="adj" fmla="val 10526"/>
+            </a:avLst>
+          </a:prstGeom>
+          <a:solidFill>
+            <a:srgbClr val="FEF3C7"/>
+          </a:solidFill>
+          <a:ln/>
+        </p:spPr>
+      </p:sp>
+      <p:sp>
+        <p:nvSpPr>
+          <p:cNvPr id="24" name="Text 22"/>
+          <p:cNvSpPr txBox="1"/>
+          <p:nvPr/>
+        </p:nvSpPr>
+        <p:spPr>
+          <a:xfrm>
+            <a:off x="4549140" y="4343400"/>
+            <a:ext cx="3063240" cy="868680"/>
+          </a:xfrm>
+          <a:prstGeom prst="rect">
+            <a:avLst/>
+          </a:prstGeom>
+          <a:noFill/>
+          <a:ln/>
+        </p:spPr>
+        <p:txBody>
+          <a:bodyPr wrap="square" lIns="0" tIns="0" rIns="0" bIns="0" rtlCol="0" anchor="ctr"/>
+          <a:lstStyle/>
+          <a:p>
+            <a:pPr indent="0" marL="0">
+              <a:buNone/>
+            </a:pPr>
+            <a:r>
+              <a:rPr lang="en-US" sz="1800" b="1" dirty="0">
+                <a:solidFill>
+                  <a:srgbClr val="B45309"/>
+                </a:solidFill>
+              </a:rPr>
+              <a:t>ATENÇÃO</a:t>
+            </a:r>
+            <a:endParaRPr lang="en-US" sz="1800" dirty="0"/>
+          </a:p>
+          <a:p>
+            <a:pPr indent="0" marL="0">
+              <a:buNone/>
+            </a:pPr>
+            <a:r>
+              <a:rPr lang="en-US" sz="1400" dirty="0">
+                <a:solidFill>
+                  <a:srgbClr val="0F172A"/>
+                </a:solidFill>
+              </a:rPr>
+              <a:t>≥ 1% ou 2× a média da idade</a:t>
+            </a:r>
+            <a:endParaRPr lang="en-US" sz="1800" dirty="0"/>
+          </a:p>
+        </p:txBody>
+      </p:sp>
+      <p:sp>
+        <p:nvSpPr>
+          <p:cNvPr id="25" name="nivel-3"/>
+          <p:cNvSpPr/>
+          <p:nvPr/>
+        </p:nvSpPr>
+        <p:spPr>
+          <a:xfrm>
+            <a:off x="8183880" y="4343400"/>
+            <a:ext cx="3520440" cy="868680"/>
+          </a:xfrm>
+          <a:prstGeom prst="roundRect">
+            <a:avLst>
+              <a:gd name="adj" fmla="val 10526"/>
             </a:avLst>
           </a:prstGeom>
           <a:solidFill>
@@ -5173,14 +5811,14 @@
       </p:sp>
       <p:sp>
         <p:nvSpPr>
-          <p:cNvPr id="10" name="Text 8"/>
+          <p:cNvPr id="26" name="Text 24"/>
           <p:cNvSpPr txBox="1"/>
           <p:nvPr/>
         </p:nvSpPr>
         <p:spPr>
           <a:xfrm>
-            <a:off x="731520" y="4526280"/>
-            <a:ext cx="2926080" cy="384048"/>
+            <a:off x="8412480" y="4343400"/>
+            <a:ext cx="3063240" cy="868680"/>
           </a:xfrm>
           <a:prstGeom prst="rect">
             <a:avLst/>
@@ -5192,104 +5830,88 @@
           <a:bodyPr wrap="square" lIns="0" tIns="0" rIns="0" bIns="0" rtlCol="0" anchor="ctr"/>
           <a:lstStyle/>
           <a:p>
-            <a:pPr algn="ctr" indent="0" marL="0">
-              <a:buNone/>
-            </a:pPr>
-            <a:r>
-              <a:rPr lang="en-US" sz="1400" b="1" spc="100" kern="0" dirty="0">
+            <a:pPr indent="0" marL="0">
+              <a:buNone/>
+            </a:pPr>
+            <a:r>
+              <a:rPr lang="en-US" sz="1800" b="1" dirty="0">
                 <a:solidFill>
                   <a:srgbClr val="C2410C"/>
                 </a:solidFill>
               </a:rPr>
-              <a:t>COLORRETAL · INVESTIGAR</a:t>
-            </a:r>
-            <a:endParaRPr lang="en-US" sz="1400" dirty="0"/>
-          </a:p>
-        </p:txBody>
-      </p:sp>
-      <p:graphicFrame>
-        <p:nvGraphicFramePr>
-          <p:cNvPr id="11" name="Chart 0" descr=""/>
-          <p:cNvGraphicFramePr/>
-          <p:nvPr/>
-        </p:nvGraphicFramePr>
-        <p:xfrm>
-          <a:off x="4937760" y="1737360"/>
-          <a:ext cx="6766560" cy="3063240"/>
-        </p:xfrm>
-        <a:graphic xmlns:a="http://schemas.openxmlformats.org/drawingml/2006/main">
-          <a:graphicData uri="http://schemas.openxmlformats.org/drawingml/2006/chart">
-            <c:chart xmlns:c="http://schemas.openxmlformats.org/drawingml/2006/chart" r:id="rId1"/>
-          </a:graphicData>
-        </a:graphic>
-      </p:graphicFrame>
-      <p:sp>
-        <p:nvSpPr>
-          <p:cNvPr id="12" name="Text 9"/>
+              <a:t>INVESTIGAR</a:t>
+            </a:r>
+            <a:endParaRPr lang="en-US" sz="1800" dirty="0"/>
+          </a:p>
+          <a:p>
+            <a:pPr indent="0" marL="0">
+              <a:buNone/>
+            </a:pPr>
+            <a:r>
+              <a:rPr lang="en-US" sz="1400" dirty="0">
+                <a:solidFill>
+                  <a:srgbClr val="0F172A"/>
+                </a:solidFill>
+              </a:rPr>
+              <a:t>≥ 3%: procure avaliação</a:t>
+            </a:r>
+            <a:endParaRPr lang="en-US" sz="1800" dirty="0"/>
+          </a:p>
+        </p:txBody>
+      </p:sp>
+      <p:sp>
+        <p:nvSpPr>
+          <p:cNvPr id="27" name="Text 25"/>
           <p:cNvSpPr txBox="1"/>
           <p:nvPr/>
         </p:nvSpPr>
         <p:spPr>
           <a:xfrm>
-            <a:off x="4937760" y="4846320"/>
-            <a:ext cx="6766560" cy="365760"/>
-          </a:xfrm>
-          <a:prstGeom prst="rect">
-            <a:avLst/>
-          </a:prstGeom>
-          <a:noFill/>
-          <a:ln/>
-        </p:spPr>
-        <p:txBody>
-          <a:bodyPr wrap="square" lIns="0" tIns="0" rIns="0" bIns="0" rtlCol="0" anchor="ctr"/>
+            <a:off x="457200" y="5440680"/>
+            <a:ext cx="11247120" cy="640080"/>
+          </a:xfrm>
+          <a:prstGeom prst="rect">
+            <a:avLst/>
+          </a:prstGeom>
+          <a:noFill/>
+          <a:ln/>
+        </p:spPr>
+        <p:txBody>
+          <a:bodyPr wrap="square" lIns="0" tIns="0" rIns="0" bIns="0" rtlCol="0" anchor="t"/>
           <a:lstStyle/>
           <a:p>
             <a:pPr indent="0" marL="0">
               <a:buNone/>
             </a:pPr>
             <a:r>
-              <a:rPr lang="en-US" sz="1100" dirty="0">
-                <a:solidFill>
-                  <a:schemeClr val="accent5"/>
-                </a:solidFill>
-              </a:rPr>
-              <a:t>Fontes: Lee 2014 (FIT, 19 estudos); Hamilton 2005 (CAPER colorretal, 349 casos). Prior: GLOBOCAN 2022 calibrado pelo INCA 2026.</a:t>
-            </a:r>
-            <a:endParaRPr lang="en-US" sz="1100" dirty="0"/>
-          </a:p>
-        </p:txBody>
-      </p:sp>
-      <p:sp>
-        <p:nvSpPr>
-          <p:cNvPr id="13" name="Text 10"/>
-          <p:cNvSpPr txBox="1"/>
-          <p:nvPr/>
-        </p:nvSpPr>
-        <p:spPr>
-          <a:xfrm>
-            <a:off x="457200" y="5577840"/>
-            <a:ext cx="11247120" cy="640080"/>
-          </a:xfrm>
-          <a:prstGeom prst="rect">
-            <a:avLst/>
-          </a:prstGeom>
-          <a:noFill/>
-          <a:ln/>
-        </p:spPr>
-        <p:txBody>
-          <a:bodyPr wrap="square" lIns="0" tIns="0" rIns="0" bIns="0" rtlCol="0" anchor="t"/>
-          <a:lstStyle/>
-          <a:p>
+              <a:rPr lang="en-US" sz="1400" b="1" dirty="0">
+                <a:solidFill>
+                  <a:srgbClr val="003F7E"/>
+                </a:solidFill>
+              </a:rPr>
+              <a:t>A conta: </a:t>
+            </a:r>
             <a:pPr indent="0" marL="0">
               <a:buNone/>
             </a:pPr>
             <a:r>
+              <a:rPr lang="en-US" sz="1400" dirty="0">
+                <a:solidFill>
+                  <a:srgbClr val="0F172A"/>
+                </a:solidFill>
+              </a:rPr>
+              <a:t>logit(chance final) = logit(chance de partida) + Σ ln(LR de cada pista).  </a:t>
+            </a:r>
+            <a:pPr indent="0" marL="0">
+              <a:buNone/>
+            </a:pPr>
+            <a:r>
               <a:rPr lang="en-US" sz="1400" b="1" dirty="0">
                 <a:solidFill>
                   <a:srgbClr val="003F7E"/>
                 </a:solidFill>
               </a:rPr>
-              <a:t>Próximo passo: </a:t>
+              <a:t>Próxima pergunta: </a:t>
             </a:r>
             <a:pPr indent="0" marL="0">
               <a:buNone/>
@@ -5300,7 +5922,7 @@
                   <a:srgbClr val="0F172A"/>
                 </a:solidFill>
               </a:rPr>
-              <a:t>avaliação médica com colonoscopia. Como ex-fumante, também a TC de pulmão de baixa dose (consenso 2024).</a:t>
+              <a:t>a que mais muda o risco (Σ |ln LR| ÷ custo).</a:t>
             </a:r>
             <a:endParaRPr lang="en-US" sz="1400" dirty="0"/>
           </a:p>
@@ -5408,7 +6030,7 @@
                   <a:schemeClr val="tx2"/>
                 </a:solidFill>
               </a:rPr>
-              <a:t>Três pacientes, três histórias</a:t>
+              <a:t>Logins da demo</a:t>
             </a:r>
             <a:endParaRPr lang="en-US" sz="3400" dirty="0"/>
           </a:p>
@@ -5416,41 +6038,14 @@
       </p:sp>
       <p:sp>
         <p:nvSpPr>
-          <p:cNvPr id="3" name="paciente-1"/>
-          <p:cNvSpPr/>
-          <p:nvPr/>
-        </p:nvSpPr>
-        <p:spPr>
-          <a:xfrm>
-            <a:off x="457200" y="1280160"/>
-            <a:ext cx="3520440" cy="4892040"/>
-          </a:xfrm>
-          <a:prstGeom prst="roundRect">
-            <a:avLst>
-              <a:gd name="adj" fmla="val 3117"/>
-            </a:avLst>
-          </a:prstGeom>
-          <a:solidFill>
-            <a:schemeClr val="bg2"/>
-          </a:solidFill>
-          <a:ln w="12700">
-            <a:solidFill>
-              <a:schemeClr val="accent6"/>
-            </a:solidFill>
-            <a:prstDash val="solid"/>
-          </a:ln>
-        </p:spPr>
-      </p:sp>
-      <p:sp>
-        <p:nvSpPr>
-          <p:cNvPr id="4" name="Text 2"/>
+          <p:cNvPr id="3" name="Text 1"/>
           <p:cNvSpPr txBox="1"/>
           <p:nvPr/>
         </p:nvSpPr>
         <p:spPr>
           <a:xfrm>
-            <a:off x="685800" y="1508760"/>
-            <a:ext cx="3063240" cy="411480"/>
+            <a:off x="457200" y="1097280"/>
+            <a:ext cx="11247120" cy="457200"/>
           </a:xfrm>
           <a:prstGeom prst="rect">
             <a:avLst/>
@@ -5466,88 +6061,1059 @@
               <a:buNone/>
             </a:pPr>
             <a:r>
-              <a:rPr lang="en-US" sz="2000" b="1" dirty="0">
-                <a:solidFill>
-                  <a:schemeClr val="tx1"/>
-                </a:solidFill>
-                <a:latin typeface="Arial" pitchFamily="34" charset="0"/>
-                <a:ea typeface="Arial" pitchFamily="34" charset="-122"/>
-                <a:cs typeface="Arial" pitchFamily="34" charset="-120"/>
-              </a:rPr>
-              <a:t>Roberto Alves, 63</a:t>
-            </a:r>
-            <a:endParaRPr lang="en-US" sz="2000" dirty="0"/>
-          </a:p>
-        </p:txBody>
-      </p:sp>
-      <p:sp>
-        <p:nvSpPr>
-          <p:cNvPr id="5" name="nivel-paciente-1"/>
-          <p:cNvSpPr/>
-          <p:nvPr/>
-        </p:nvSpPr>
-        <p:spPr>
-          <a:xfrm>
-            <a:off x="685800" y="2011680"/>
-            <a:ext cx="3063240" cy="384048"/>
-          </a:xfrm>
-          <a:prstGeom prst="roundRect">
-            <a:avLst>
-              <a:gd name="adj" fmla="val 50000"/>
-            </a:avLst>
-          </a:prstGeom>
-          <a:solidFill>
-            <a:srgbClr val="FFEDD5"/>
-          </a:solidFill>
-          <a:ln/>
-        </p:spPr>
-      </p:sp>
-      <p:sp>
-        <p:nvSpPr>
-          <p:cNvPr id="6" name="Text 4"/>
+              <a:rPr lang="en-US" sz="1800" dirty="0">
+                <a:solidFill>
+                  <a:schemeClr val="accent5"/>
+                </a:solidFill>
+              </a:rPr>
+              <a:t>A tela de login abre vazia: digite o usuário (não é e-mail) e a senha. Contas fictícias.</a:t>
+            </a:r>
+            <a:endParaRPr lang="en-US" sz="1800" dirty="0"/>
+          </a:p>
+        </p:txBody>
+      </p:sp>
+      <p:graphicFrame>
+        <p:nvGraphicFramePr>
+          <p:cNvPr id="6" name="Table 0"/>
+          <p:cNvGraphicFramePr>
+            <a:graphicFrameLocks noGrp="1"/>
+          </p:cNvGraphicFramePr>
+          <p:nvPr>
+            <p:extLst>
+              <p:ext uri="{D42A27DB-BD31-4B8C-83A1-F6EECF244321}">
+                <p14:modId xmlns:p14="http://schemas.microsoft.com/office/powerpoint/2010/main" val="1579011935"/>
+              </p:ext>
+            </p:extLst>
+          </p:nvPr>
+        </p:nvGraphicFramePr>
+        <p:xfrm>
+          <a:off x="457200" y="1691640"/>
+          <a:ext cx="11247120" cy="914400"/>
+        </p:xfrm>
+        <a:graphic>
+          <a:graphicData uri="http://schemas.openxmlformats.org/drawingml/2006/table">
+            <a:tbl>
+              <a:tblPr/>
+              <a:tblGrid>
+                <a:gridCol w="5120640"/>
+                <a:gridCol w="2743200"/>
+                <a:gridCol w="3383280"/>
+              </a:tblGrid>
+              <a:tr h="457200">
+                <a:tc>
+                  <a:txBody>
+                    <a:bodyPr/>
+                    <a:lstStyle/>
+                    <a:p>
+                      <a:pPr indent="0" marL="0">
+                        <a:buNone/>
+                      </a:pPr>
+                      <a:r>
+                        <a:rPr lang="en-US" sz="1400" b="1" dirty="0">
+                          <a:solidFill>
+                            <a:srgbClr val="FFFFFF"/>
+                          </a:solidFill>
+                        </a:rPr>
+                        <a:t>Quem</a:t>
+                      </a:r>
+                      <a:endParaRPr lang="en-US" sz="1400" dirty="0"/>
+                    </a:p>
+                  </a:txBody>
+                  <a:tcPr marL="137160" marR="137160" marT="0" marB="0" anchor="ctr">
+                    <a:lnL w="9525" cap="flat" cmpd="sng" algn="ctr">
+                      <a:solidFill>
+                        <a:srgbClr val="D4E3F1"/>
+                      </a:solidFill>
+                      <a:prstDash val="solid"/>
+                      <a:round/>
+                      <a:headEnd type="none" w="med" len="med"/>
+                      <a:tailEnd type="none" w="med" len="med"/>
+                    </a:lnL>
+                    <a:lnR w="9525" cap="flat" cmpd="sng" algn="ctr">
+                      <a:solidFill>
+                        <a:srgbClr val="D4E3F1"/>
+                      </a:solidFill>
+                      <a:prstDash val="solid"/>
+                      <a:round/>
+                      <a:headEnd type="none" w="med" len="med"/>
+                      <a:tailEnd type="none" w="med" len="med"/>
+                    </a:lnR>
+                    <a:lnT w="9525" cap="flat" cmpd="sng" algn="ctr">
+                      <a:solidFill>
+                        <a:srgbClr val="D4E3F1"/>
+                      </a:solidFill>
+                      <a:prstDash val="solid"/>
+                      <a:round/>
+                      <a:headEnd type="none" w="med" len="med"/>
+                      <a:tailEnd type="none" w="med" len="med"/>
+                    </a:lnT>
+                    <a:lnB w="9525" cap="flat" cmpd="sng" algn="ctr">
+                      <a:solidFill>
+                        <a:srgbClr val="D4E3F1"/>
+                      </a:solidFill>
+                      <a:prstDash val="solid"/>
+                      <a:round/>
+                      <a:headEnd type="none" w="med" len="med"/>
+                      <a:tailEnd type="none" w="med" len="med"/>
+                    </a:lnB>
+                    <a:solidFill>
+                      <a:srgbClr val="003F7E"/>
+                    </a:solidFill>
+                  </a:tcPr>
+                </a:tc>
+                <a:tc>
+                  <a:txBody>
+                    <a:bodyPr/>
+                    <a:lstStyle/>
+                    <a:p>
+                      <a:pPr indent="0" marL="0">
+                        <a:buNone/>
+                      </a:pPr>
+                      <a:r>
+                        <a:rPr lang="en-US" sz="1400" b="1" dirty="0">
+                          <a:solidFill>
+                            <a:srgbClr val="FFFFFF"/>
+                          </a:solidFill>
+                        </a:rPr>
+                        <a:t>Usuário</a:t>
+                      </a:r>
+                      <a:endParaRPr lang="en-US" sz="1400" dirty="0"/>
+                    </a:p>
+                  </a:txBody>
+                  <a:tcPr marL="137160" marR="137160" marT="0" marB="0" anchor="ctr">
+                    <a:lnL w="9525" cap="flat" cmpd="sng" algn="ctr">
+                      <a:solidFill>
+                        <a:srgbClr val="D4E3F1"/>
+                      </a:solidFill>
+                      <a:prstDash val="solid"/>
+                      <a:round/>
+                      <a:headEnd type="none" w="med" len="med"/>
+                      <a:tailEnd type="none" w="med" len="med"/>
+                    </a:lnL>
+                    <a:lnR w="9525" cap="flat" cmpd="sng" algn="ctr">
+                      <a:solidFill>
+                        <a:srgbClr val="D4E3F1"/>
+                      </a:solidFill>
+                      <a:prstDash val="solid"/>
+                      <a:round/>
+                      <a:headEnd type="none" w="med" len="med"/>
+                      <a:tailEnd type="none" w="med" len="med"/>
+                    </a:lnR>
+                    <a:lnT w="9525" cap="flat" cmpd="sng" algn="ctr">
+                      <a:solidFill>
+                        <a:srgbClr val="D4E3F1"/>
+                      </a:solidFill>
+                      <a:prstDash val="solid"/>
+                      <a:round/>
+                      <a:headEnd type="none" w="med" len="med"/>
+                      <a:tailEnd type="none" w="med" len="med"/>
+                    </a:lnT>
+                    <a:lnB w="9525" cap="flat" cmpd="sng" algn="ctr">
+                      <a:solidFill>
+                        <a:srgbClr val="D4E3F1"/>
+                      </a:solidFill>
+                      <a:prstDash val="solid"/>
+                      <a:round/>
+                      <a:headEnd type="none" w="med" len="med"/>
+                      <a:tailEnd type="none" w="med" len="med"/>
+                    </a:lnB>
+                    <a:solidFill>
+                      <a:srgbClr val="003F7E"/>
+                    </a:solidFill>
+                  </a:tcPr>
+                </a:tc>
+                <a:tc>
+                  <a:txBody>
+                    <a:bodyPr/>
+                    <a:lstStyle/>
+                    <a:p>
+                      <a:pPr indent="0" marL="0">
+                        <a:buNone/>
+                      </a:pPr>
+                      <a:r>
+                        <a:rPr lang="en-US" sz="1400" b="1" dirty="0">
+                          <a:solidFill>
+                            <a:srgbClr val="FFFFFF"/>
+                          </a:solidFill>
+                        </a:rPr>
+                        <a:t>Senha</a:t>
+                      </a:r>
+                      <a:endParaRPr lang="en-US" sz="1400" dirty="0"/>
+                    </a:p>
+                  </a:txBody>
+                  <a:tcPr marL="137160" marR="137160" marT="0" marB="0" anchor="ctr">
+                    <a:lnL w="9525" cap="flat" cmpd="sng" algn="ctr">
+                      <a:solidFill>
+                        <a:srgbClr val="D4E3F1"/>
+                      </a:solidFill>
+                      <a:prstDash val="solid"/>
+                      <a:round/>
+                      <a:headEnd type="none" w="med" len="med"/>
+                      <a:tailEnd type="none" w="med" len="med"/>
+                    </a:lnL>
+                    <a:lnR w="9525" cap="flat" cmpd="sng" algn="ctr">
+                      <a:solidFill>
+                        <a:srgbClr val="D4E3F1"/>
+                      </a:solidFill>
+                      <a:prstDash val="solid"/>
+                      <a:round/>
+                      <a:headEnd type="none" w="med" len="med"/>
+                      <a:tailEnd type="none" w="med" len="med"/>
+                    </a:lnR>
+                    <a:lnT w="9525" cap="flat" cmpd="sng" algn="ctr">
+                      <a:solidFill>
+                        <a:srgbClr val="D4E3F1"/>
+                      </a:solidFill>
+                      <a:prstDash val="solid"/>
+                      <a:round/>
+                      <a:headEnd type="none" w="med" len="med"/>
+                      <a:tailEnd type="none" w="med" len="med"/>
+                    </a:lnT>
+                    <a:lnB w="9525" cap="flat" cmpd="sng" algn="ctr">
+                      <a:solidFill>
+                        <a:srgbClr val="D4E3F1"/>
+                      </a:solidFill>
+                      <a:prstDash val="solid"/>
+                      <a:round/>
+                      <a:headEnd type="none" w="med" len="med"/>
+                      <a:tailEnd type="none" w="med" len="med"/>
+                    </a:lnB>
+                    <a:solidFill>
+                      <a:srgbClr val="003F7E"/>
+                    </a:solidFill>
+                  </a:tcPr>
+                </a:tc>
+              </a:tr>
+              <a:tr h="777240">
+                <a:tc>
+                  <a:txBody>
+                    <a:bodyPr/>
+                    <a:lstStyle/>
+                    <a:p>
+                      <a:pPr indent="0" marL="0">
+                        <a:buNone/>
+                      </a:pPr>
+                      <a:r>
+                        <a:rPr lang="en-US" sz="1800" b="1" dirty="0">
+                          <a:solidFill>
+                            <a:srgbClr val="0F172A"/>
+                          </a:solidFill>
+                        </a:rPr>
+                        <a:t>Dra. Ana Beatriz Souza</a:t>
+                      </a:r>
+                      <a:endParaRPr lang="en-US" sz="1200" dirty="0"/>
+                    </a:p>
+                    <a:p>
+                      <a:pPr indent="0" marL="0">
+                        <a:buNone/>
+                      </a:pPr>
+                      <a:r>
+                        <a:rPr lang="en-US" sz="1300" dirty="0">
+                          <a:solidFill>
+                            <a:srgbClr val="475569"/>
+                          </a:solidFill>
+                        </a:rPr>
+                        <a:t>médica · painel de riscos e Base da IA</a:t>
+                      </a:r>
+                      <a:endParaRPr lang="en-US" sz="1200" dirty="0"/>
+                    </a:p>
+                  </a:txBody>
+                  <a:tcPr marL="137160" marR="137160" marT="0" marB="0" anchor="ctr">
+                    <a:lnL w="9525" cap="flat" cmpd="sng" algn="ctr">
+                      <a:solidFill>
+                        <a:srgbClr val="D4E3F1"/>
+                      </a:solidFill>
+                      <a:prstDash val="solid"/>
+                      <a:round/>
+                      <a:headEnd type="none" w="med" len="med"/>
+                      <a:tailEnd type="none" w="med" len="med"/>
+                    </a:lnL>
+                    <a:lnR w="9525" cap="flat" cmpd="sng" algn="ctr">
+                      <a:solidFill>
+                        <a:srgbClr val="D4E3F1"/>
+                      </a:solidFill>
+                      <a:prstDash val="solid"/>
+                      <a:round/>
+                      <a:headEnd type="none" w="med" len="med"/>
+                      <a:tailEnd type="none" w="med" len="med"/>
+                    </a:lnR>
+                    <a:lnT w="9525" cap="flat" cmpd="sng" algn="ctr">
+                      <a:solidFill>
+                        <a:srgbClr val="D4E3F1"/>
+                      </a:solidFill>
+                      <a:prstDash val="solid"/>
+                      <a:round/>
+                      <a:headEnd type="none" w="med" len="med"/>
+                      <a:tailEnd type="none" w="med" len="med"/>
+                    </a:lnT>
+                    <a:lnB w="9525" cap="flat" cmpd="sng" algn="ctr">
+                      <a:solidFill>
+                        <a:srgbClr val="D4E3F1"/>
+                      </a:solidFill>
+                      <a:prstDash val="solid"/>
+                      <a:round/>
+                      <a:headEnd type="none" w="med" len="med"/>
+                      <a:tailEnd type="none" w="med" len="med"/>
+                    </a:lnB>
+                  </a:tcPr>
+                </a:tc>
+                <a:tc>
+                  <a:txBody>
+                    <a:bodyPr/>
+                    <a:lstStyle/>
+                    <a:p>
+                      <a:pPr indent="0" marL="0">
+                        <a:buNone/>
+                      </a:pPr>
+                      <a:r>
+                        <a:rPr lang="en-US" sz="2600" b="1" dirty="0">
+                          <a:solidFill>
+                            <a:srgbClr val="003F7E"/>
+                          </a:solidFill>
+                          <a:latin typeface="Courier New" pitchFamily="34" charset="0"/>
+                          <a:ea typeface="Courier New" pitchFamily="34" charset="-122"/>
+                          <a:cs typeface="Courier New" pitchFamily="34" charset="-120"/>
+                        </a:rPr>
+                        <a:t>ana</a:t>
+                      </a:r>
+                      <a:endParaRPr lang="en-US" sz="2600" dirty="0">
+                        <a:latin typeface="Courier New" charset="0"/>
+                        <a:ea typeface="Courier New" charset="0"/>
+                        <a:cs typeface="Courier New" charset="0"/>
+                      </a:endParaRPr>
+                    </a:p>
+                  </a:txBody>
+                  <a:tcPr marL="137160" marR="137160" marT="0" marB="0" anchor="ctr">
+                    <a:lnL w="9525" cap="flat" cmpd="sng" algn="ctr">
+                      <a:solidFill>
+                        <a:srgbClr val="D4E3F1"/>
+                      </a:solidFill>
+                      <a:prstDash val="solid"/>
+                      <a:round/>
+                      <a:headEnd type="none" w="med" len="med"/>
+                      <a:tailEnd type="none" w="med" len="med"/>
+                    </a:lnL>
+                    <a:lnR w="9525" cap="flat" cmpd="sng" algn="ctr">
+                      <a:solidFill>
+                        <a:srgbClr val="D4E3F1"/>
+                      </a:solidFill>
+                      <a:prstDash val="solid"/>
+                      <a:round/>
+                      <a:headEnd type="none" w="med" len="med"/>
+                      <a:tailEnd type="none" w="med" len="med"/>
+                    </a:lnR>
+                    <a:lnT w="9525" cap="flat" cmpd="sng" algn="ctr">
+                      <a:solidFill>
+                        <a:srgbClr val="D4E3F1"/>
+                      </a:solidFill>
+                      <a:prstDash val="solid"/>
+                      <a:round/>
+                      <a:headEnd type="none" w="med" len="med"/>
+                      <a:tailEnd type="none" w="med" len="med"/>
+                    </a:lnT>
+                    <a:lnB w="9525" cap="flat" cmpd="sng" algn="ctr">
+                      <a:solidFill>
+                        <a:srgbClr val="D4E3F1"/>
+                      </a:solidFill>
+                      <a:prstDash val="solid"/>
+                      <a:round/>
+                      <a:headEnd type="none" w="med" len="med"/>
+                      <a:tailEnd type="none" w="med" len="med"/>
+                    </a:lnB>
+                  </a:tcPr>
+                </a:tc>
+                <a:tc>
+                  <a:txBody>
+                    <a:bodyPr/>
+                    <a:lstStyle/>
+                    <a:p>
+                      <a:pPr indent="0" marL="0">
+                        <a:buNone/>
+                      </a:pPr>
+                      <a:r>
+                        <a:rPr lang="en-US" sz="2600" b="1" dirty="0">
+                          <a:solidFill>
+                            <a:srgbClr val="003F7E"/>
+                          </a:solidFill>
+                          <a:latin typeface="Courier New" pitchFamily="34" charset="0"/>
+                          <a:ea typeface="Courier New" pitchFamily="34" charset="-122"/>
+                          <a:cs typeface="Courier New" pitchFamily="34" charset="-120"/>
+                        </a:rPr>
+                        <a:t>Doctor@123</a:t>
+                      </a:r>
+                      <a:endParaRPr lang="en-US" sz="2600" dirty="0">
+                        <a:latin typeface="Courier New" charset="0"/>
+                        <a:ea typeface="Courier New" charset="0"/>
+                        <a:cs typeface="Courier New" charset="0"/>
+                      </a:endParaRPr>
+                    </a:p>
+                  </a:txBody>
+                  <a:tcPr marL="137160" marR="137160" marT="0" marB="0" anchor="ctr">
+                    <a:lnL w="9525" cap="flat" cmpd="sng" algn="ctr">
+                      <a:solidFill>
+                        <a:srgbClr val="D4E3F1"/>
+                      </a:solidFill>
+                      <a:prstDash val="solid"/>
+                      <a:round/>
+                      <a:headEnd type="none" w="med" len="med"/>
+                      <a:tailEnd type="none" w="med" len="med"/>
+                    </a:lnL>
+                    <a:lnR w="9525" cap="flat" cmpd="sng" algn="ctr">
+                      <a:solidFill>
+                        <a:srgbClr val="D4E3F1"/>
+                      </a:solidFill>
+                      <a:prstDash val="solid"/>
+                      <a:round/>
+                      <a:headEnd type="none" w="med" len="med"/>
+                      <a:tailEnd type="none" w="med" len="med"/>
+                    </a:lnR>
+                    <a:lnT w="9525" cap="flat" cmpd="sng" algn="ctr">
+                      <a:solidFill>
+                        <a:srgbClr val="D4E3F1"/>
+                      </a:solidFill>
+                      <a:prstDash val="solid"/>
+                      <a:round/>
+                      <a:headEnd type="none" w="med" len="med"/>
+                      <a:tailEnd type="none" w="med" len="med"/>
+                    </a:lnT>
+                    <a:lnB w="9525" cap="flat" cmpd="sng" algn="ctr">
+                      <a:solidFill>
+                        <a:srgbClr val="D4E3F1"/>
+                      </a:solidFill>
+                      <a:prstDash val="solid"/>
+                      <a:round/>
+                      <a:headEnd type="none" w="med" len="med"/>
+                      <a:tailEnd type="none" w="med" len="med"/>
+                    </a:lnB>
+                  </a:tcPr>
+                </a:tc>
+              </a:tr>
+              <a:tr h="777240">
+                <a:tc>
+                  <a:txBody>
+                    <a:bodyPr/>
+                    <a:lstStyle/>
+                    <a:p>
+                      <a:pPr indent="0" marL="0">
+                        <a:buNone/>
+                      </a:pPr>
+                      <a:r>
+                        <a:rPr lang="en-US" sz="1800" b="1" dirty="0">
+                          <a:solidFill>
+                            <a:srgbClr val="0F172A"/>
+                          </a:solidFill>
+                        </a:rPr>
+                        <a:t>Roberto Alves Pereira, 63</a:t>
+                      </a:r>
+                      <a:endParaRPr lang="en-US" sz="1200" dirty="0"/>
+                    </a:p>
+                    <a:p>
+                      <a:pPr indent="0" marL="0">
+                        <a:buNone/>
+                      </a:pPr>
+                      <a:r>
+                        <a:rPr lang="en-US" sz="1300" dirty="0">
+                          <a:solidFill>
+                            <a:srgbClr val="475569"/>
+                          </a:solidFill>
+                        </a:rPr>
+                        <a:t>paciente · o caso da demonstração</a:t>
+                      </a:r>
+                      <a:endParaRPr lang="en-US" sz="1200" dirty="0"/>
+                    </a:p>
+                  </a:txBody>
+                  <a:tcPr marL="137160" marR="137160" marT="0" marB="0" anchor="ctr">
+                    <a:lnL w="9525" cap="flat" cmpd="sng" algn="ctr">
+                      <a:solidFill>
+                        <a:srgbClr val="D4E3F1"/>
+                      </a:solidFill>
+                      <a:prstDash val="solid"/>
+                      <a:round/>
+                      <a:headEnd type="none" w="med" len="med"/>
+                      <a:tailEnd type="none" w="med" len="med"/>
+                    </a:lnL>
+                    <a:lnR w="9525" cap="flat" cmpd="sng" algn="ctr">
+                      <a:solidFill>
+                        <a:srgbClr val="D4E3F1"/>
+                      </a:solidFill>
+                      <a:prstDash val="solid"/>
+                      <a:round/>
+                      <a:headEnd type="none" w="med" len="med"/>
+                      <a:tailEnd type="none" w="med" len="med"/>
+                    </a:lnR>
+                    <a:lnT w="9525" cap="flat" cmpd="sng" algn="ctr">
+                      <a:solidFill>
+                        <a:srgbClr val="D4E3F1"/>
+                      </a:solidFill>
+                      <a:prstDash val="solid"/>
+                      <a:round/>
+                      <a:headEnd type="none" w="med" len="med"/>
+                      <a:tailEnd type="none" w="med" len="med"/>
+                    </a:lnT>
+                    <a:lnB w="9525" cap="flat" cmpd="sng" algn="ctr">
+                      <a:solidFill>
+                        <a:srgbClr val="D4E3F1"/>
+                      </a:solidFill>
+                      <a:prstDash val="solid"/>
+                      <a:round/>
+                      <a:headEnd type="none" w="med" len="med"/>
+                      <a:tailEnd type="none" w="med" len="med"/>
+                    </a:lnB>
+                  </a:tcPr>
+                </a:tc>
+                <a:tc>
+                  <a:txBody>
+                    <a:bodyPr/>
+                    <a:lstStyle/>
+                    <a:p>
+                      <a:pPr indent="0" marL="0">
+                        <a:buNone/>
+                      </a:pPr>
+                      <a:r>
+                        <a:rPr lang="en-US" sz="2600" b="1" dirty="0">
+                          <a:solidFill>
+                            <a:srgbClr val="003F7E"/>
+                          </a:solidFill>
+                          <a:latin typeface="Courier New" pitchFamily="34" charset="0"/>
+                          <a:ea typeface="Courier New" pitchFamily="34" charset="-122"/>
+                          <a:cs typeface="Courier New" pitchFamily="34" charset="-120"/>
+                        </a:rPr>
+                        <a:t>roberto</a:t>
+                      </a:r>
+                      <a:endParaRPr lang="en-US" sz="2600" dirty="0">
+                        <a:latin typeface="Courier New" charset="0"/>
+                        <a:ea typeface="Courier New" charset="0"/>
+                        <a:cs typeface="Courier New" charset="0"/>
+                      </a:endParaRPr>
+                    </a:p>
+                  </a:txBody>
+                  <a:tcPr marL="137160" marR="137160" marT="0" marB="0" anchor="ctr">
+                    <a:lnL w="9525" cap="flat" cmpd="sng" algn="ctr">
+                      <a:solidFill>
+                        <a:srgbClr val="D4E3F1"/>
+                      </a:solidFill>
+                      <a:prstDash val="solid"/>
+                      <a:round/>
+                      <a:headEnd type="none" w="med" len="med"/>
+                      <a:tailEnd type="none" w="med" len="med"/>
+                    </a:lnL>
+                    <a:lnR w="9525" cap="flat" cmpd="sng" algn="ctr">
+                      <a:solidFill>
+                        <a:srgbClr val="D4E3F1"/>
+                      </a:solidFill>
+                      <a:prstDash val="solid"/>
+                      <a:round/>
+                      <a:headEnd type="none" w="med" len="med"/>
+                      <a:tailEnd type="none" w="med" len="med"/>
+                    </a:lnR>
+                    <a:lnT w="9525" cap="flat" cmpd="sng" algn="ctr">
+                      <a:solidFill>
+                        <a:srgbClr val="D4E3F1"/>
+                      </a:solidFill>
+                      <a:prstDash val="solid"/>
+                      <a:round/>
+                      <a:headEnd type="none" w="med" len="med"/>
+                      <a:tailEnd type="none" w="med" len="med"/>
+                    </a:lnT>
+                    <a:lnB w="9525" cap="flat" cmpd="sng" algn="ctr">
+                      <a:solidFill>
+                        <a:srgbClr val="D4E3F1"/>
+                      </a:solidFill>
+                      <a:prstDash val="solid"/>
+                      <a:round/>
+                      <a:headEnd type="none" w="med" len="med"/>
+                      <a:tailEnd type="none" w="med" len="med"/>
+                    </a:lnB>
+                  </a:tcPr>
+                </a:tc>
+                <a:tc>
+                  <a:txBody>
+                    <a:bodyPr/>
+                    <a:lstStyle/>
+                    <a:p>
+                      <a:pPr indent="0" marL="0">
+                        <a:buNone/>
+                      </a:pPr>
+                      <a:r>
+                        <a:rPr lang="en-US" sz="2600" b="1" dirty="0">
+                          <a:solidFill>
+                            <a:srgbClr val="003F7E"/>
+                          </a:solidFill>
+                          <a:latin typeface="Courier New" pitchFamily="34" charset="0"/>
+                          <a:ea typeface="Courier New" pitchFamily="34" charset="-122"/>
+                          <a:cs typeface="Courier New" pitchFamily="34" charset="-120"/>
+                        </a:rPr>
+                        <a:t>Roberto@123</a:t>
+                      </a:r>
+                      <a:endParaRPr lang="en-US" sz="2600" dirty="0">
+                        <a:latin typeface="Courier New" charset="0"/>
+                        <a:ea typeface="Courier New" charset="0"/>
+                        <a:cs typeface="Courier New" charset="0"/>
+                      </a:endParaRPr>
+                    </a:p>
+                  </a:txBody>
+                  <a:tcPr marL="137160" marR="137160" marT="0" marB="0" anchor="ctr">
+                    <a:lnL w="9525" cap="flat" cmpd="sng" algn="ctr">
+                      <a:solidFill>
+                        <a:srgbClr val="D4E3F1"/>
+                      </a:solidFill>
+                      <a:prstDash val="solid"/>
+                      <a:round/>
+                      <a:headEnd type="none" w="med" len="med"/>
+                      <a:tailEnd type="none" w="med" len="med"/>
+                    </a:lnL>
+                    <a:lnR w="9525" cap="flat" cmpd="sng" algn="ctr">
+                      <a:solidFill>
+                        <a:srgbClr val="D4E3F1"/>
+                      </a:solidFill>
+                      <a:prstDash val="solid"/>
+                      <a:round/>
+                      <a:headEnd type="none" w="med" len="med"/>
+                      <a:tailEnd type="none" w="med" len="med"/>
+                    </a:lnR>
+                    <a:lnT w="9525" cap="flat" cmpd="sng" algn="ctr">
+                      <a:solidFill>
+                        <a:srgbClr val="D4E3F1"/>
+                      </a:solidFill>
+                      <a:prstDash val="solid"/>
+                      <a:round/>
+                      <a:headEnd type="none" w="med" len="med"/>
+                      <a:tailEnd type="none" w="med" len="med"/>
+                    </a:lnT>
+                    <a:lnB w="9525" cap="flat" cmpd="sng" algn="ctr">
+                      <a:solidFill>
+                        <a:srgbClr val="D4E3F1"/>
+                      </a:solidFill>
+                      <a:prstDash val="solid"/>
+                      <a:round/>
+                      <a:headEnd type="none" w="med" len="med"/>
+                      <a:tailEnd type="none" w="med" len="med"/>
+                    </a:lnB>
+                  </a:tcPr>
+                </a:tc>
+              </a:tr>
+              <a:tr h="777240">
+                <a:tc>
+                  <a:txBody>
+                    <a:bodyPr/>
+                    <a:lstStyle/>
+                    <a:p>
+                      <a:pPr indent="0" marL="0">
+                        <a:buNone/>
+                      </a:pPr>
+                      <a:r>
+                        <a:rPr lang="en-US" sz="1800" b="1" dirty="0">
+                          <a:solidFill>
+                            <a:srgbClr val="0F172A"/>
+                          </a:solidFill>
+                        </a:rPr>
+                        <a:t>João Carlos Mendes, 58</a:t>
+                      </a:r>
+                      <a:endParaRPr lang="en-US" sz="1200" dirty="0"/>
+                    </a:p>
+                    <a:p>
+                      <a:pPr indent="0" marL="0">
+                        <a:buNone/>
+                      </a:pPr>
+                      <a:r>
+                        <a:rPr lang="en-US" sz="1300" dirty="0">
+                          <a:solidFill>
+                            <a:srgbClr val="475569"/>
+                          </a:solidFill>
+                        </a:rPr>
+                        <a:t>paciente · triagem ao vivo</a:t>
+                      </a:r>
+                      <a:endParaRPr lang="en-US" sz="1200" dirty="0"/>
+                    </a:p>
+                  </a:txBody>
+                  <a:tcPr marL="137160" marR="137160" marT="0" marB="0" anchor="ctr">
+                    <a:lnL w="9525" cap="flat" cmpd="sng" algn="ctr">
+                      <a:solidFill>
+                        <a:srgbClr val="D4E3F1"/>
+                      </a:solidFill>
+                      <a:prstDash val="solid"/>
+                      <a:round/>
+                      <a:headEnd type="none" w="med" len="med"/>
+                      <a:tailEnd type="none" w="med" len="med"/>
+                    </a:lnL>
+                    <a:lnR w="9525" cap="flat" cmpd="sng" algn="ctr">
+                      <a:solidFill>
+                        <a:srgbClr val="D4E3F1"/>
+                      </a:solidFill>
+                      <a:prstDash val="solid"/>
+                      <a:round/>
+                      <a:headEnd type="none" w="med" len="med"/>
+                      <a:tailEnd type="none" w="med" len="med"/>
+                    </a:lnR>
+                    <a:lnT w="9525" cap="flat" cmpd="sng" algn="ctr">
+                      <a:solidFill>
+                        <a:srgbClr val="D4E3F1"/>
+                      </a:solidFill>
+                      <a:prstDash val="solid"/>
+                      <a:round/>
+                      <a:headEnd type="none" w="med" len="med"/>
+                      <a:tailEnd type="none" w="med" len="med"/>
+                    </a:lnT>
+                    <a:lnB w="9525" cap="flat" cmpd="sng" algn="ctr">
+                      <a:solidFill>
+                        <a:srgbClr val="D4E3F1"/>
+                      </a:solidFill>
+                      <a:prstDash val="solid"/>
+                      <a:round/>
+                      <a:headEnd type="none" w="med" len="med"/>
+                      <a:tailEnd type="none" w="med" len="med"/>
+                    </a:lnB>
+                  </a:tcPr>
+                </a:tc>
+                <a:tc>
+                  <a:txBody>
+                    <a:bodyPr/>
+                    <a:lstStyle/>
+                    <a:p>
+                      <a:pPr indent="0" marL="0">
+                        <a:buNone/>
+                      </a:pPr>
+                      <a:r>
+                        <a:rPr lang="en-US" sz="2600" b="1" dirty="0">
+                          <a:solidFill>
+                            <a:srgbClr val="003F7E"/>
+                          </a:solidFill>
+                          <a:latin typeface="Courier New" pitchFamily="34" charset="0"/>
+                          <a:ea typeface="Courier New" pitchFamily="34" charset="-122"/>
+                          <a:cs typeface="Courier New" pitchFamily="34" charset="-120"/>
+                        </a:rPr>
+                        <a:t>joao</a:t>
+                      </a:r>
+                      <a:endParaRPr lang="en-US" sz="2600" dirty="0">
+                        <a:latin typeface="Courier New" charset="0"/>
+                        <a:ea typeface="Courier New" charset="0"/>
+                        <a:cs typeface="Courier New" charset="0"/>
+                      </a:endParaRPr>
+                    </a:p>
+                  </a:txBody>
+                  <a:tcPr marL="137160" marR="137160" marT="0" marB="0" anchor="ctr">
+                    <a:lnL w="9525" cap="flat" cmpd="sng" algn="ctr">
+                      <a:solidFill>
+                        <a:srgbClr val="D4E3F1"/>
+                      </a:solidFill>
+                      <a:prstDash val="solid"/>
+                      <a:round/>
+                      <a:headEnd type="none" w="med" len="med"/>
+                      <a:tailEnd type="none" w="med" len="med"/>
+                    </a:lnL>
+                    <a:lnR w="9525" cap="flat" cmpd="sng" algn="ctr">
+                      <a:solidFill>
+                        <a:srgbClr val="D4E3F1"/>
+                      </a:solidFill>
+                      <a:prstDash val="solid"/>
+                      <a:round/>
+                      <a:headEnd type="none" w="med" len="med"/>
+                      <a:tailEnd type="none" w="med" len="med"/>
+                    </a:lnR>
+                    <a:lnT w="9525" cap="flat" cmpd="sng" algn="ctr">
+                      <a:solidFill>
+                        <a:srgbClr val="D4E3F1"/>
+                      </a:solidFill>
+                      <a:prstDash val="solid"/>
+                      <a:round/>
+                      <a:headEnd type="none" w="med" len="med"/>
+                      <a:tailEnd type="none" w="med" len="med"/>
+                    </a:lnT>
+                    <a:lnB w="9525" cap="flat" cmpd="sng" algn="ctr">
+                      <a:solidFill>
+                        <a:srgbClr val="D4E3F1"/>
+                      </a:solidFill>
+                      <a:prstDash val="solid"/>
+                      <a:round/>
+                      <a:headEnd type="none" w="med" len="med"/>
+                      <a:tailEnd type="none" w="med" len="med"/>
+                    </a:lnB>
+                  </a:tcPr>
+                </a:tc>
+                <a:tc>
+                  <a:txBody>
+                    <a:bodyPr/>
+                    <a:lstStyle/>
+                    <a:p>
+                      <a:pPr indent="0" marL="0">
+                        <a:buNone/>
+                      </a:pPr>
+                      <a:r>
+                        <a:rPr lang="en-US" sz="2600" b="1" dirty="0">
+                          <a:solidFill>
+                            <a:srgbClr val="003F7E"/>
+                          </a:solidFill>
+                          <a:latin typeface="Courier New" pitchFamily="34" charset="0"/>
+                          <a:ea typeface="Courier New" pitchFamily="34" charset="-122"/>
+                          <a:cs typeface="Courier New" pitchFamily="34" charset="-120"/>
+                        </a:rPr>
+                        <a:t>Joao@123</a:t>
+                      </a:r>
+                      <a:endParaRPr lang="en-US" sz="2600" dirty="0">
+                        <a:latin typeface="Courier New" charset="0"/>
+                        <a:ea typeface="Courier New" charset="0"/>
+                        <a:cs typeface="Courier New" charset="0"/>
+                      </a:endParaRPr>
+                    </a:p>
+                  </a:txBody>
+                  <a:tcPr marL="137160" marR="137160" marT="0" marB="0" anchor="ctr">
+                    <a:lnL w="9525" cap="flat" cmpd="sng" algn="ctr">
+                      <a:solidFill>
+                        <a:srgbClr val="D4E3F1"/>
+                      </a:solidFill>
+                      <a:prstDash val="solid"/>
+                      <a:round/>
+                      <a:headEnd type="none" w="med" len="med"/>
+                      <a:tailEnd type="none" w="med" len="med"/>
+                    </a:lnL>
+                    <a:lnR w="9525" cap="flat" cmpd="sng" algn="ctr">
+                      <a:solidFill>
+                        <a:srgbClr val="D4E3F1"/>
+                      </a:solidFill>
+                      <a:prstDash val="solid"/>
+                      <a:round/>
+                      <a:headEnd type="none" w="med" len="med"/>
+                      <a:tailEnd type="none" w="med" len="med"/>
+                    </a:lnR>
+                    <a:lnT w="9525" cap="flat" cmpd="sng" algn="ctr">
+                      <a:solidFill>
+                        <a:srgbClr val="D4E3F1"/>
+                      </a:solidFill>
+                      <a:prstDash val="solid"/>
+                      <a:round/>
+                      <a:headEnd type="none" w="med" len="med"/>
+                      <a:tailEnd type="none" w="med" len="med"/>
+                    </a:lnT>
+                    <a:lnB w="9525" cap="flat" cmpd="sng" algn="ctr">
+                      <a:solidFill>
+                        <a:srgbClr val="D4E3F1"/>
+                      </a:solidFill>
+                      <a:prstDash val="solid"/>
+                      <a:round/>
+                      <a:headEnd type="none" w="med" len="med"/>
+                      <a:tailEnd type="none" w="med" len="med"/>
+                    </a:lnB>
+                  </a:tcPr>
+                </a:tc>
+              </a:tr>
+              <a:tr h="777240">
+                <a:tc>
+                  <a:txBody>
+                    <a:bodyPr/>
+                    <a:lstStyle/>
+                    <a:p>
+                      <a:pPr indent="0" marL="0">
+                        <a:buNone/>
+                      </a:pPr>
+                      <a:r>
+                        <a:rPr lang="en-US" sz="1800" b="1" dirty="0">
+                          <a:solidFill>
+                            <a:srgbClr val="0F172A"/>
+                          </a:solidFill>
+                        </a:rPr>
+                        <a:t>Marina Azevedo Lima, 34</a:t>
+                      </a:r>
+                      <a:endParaRPr lang="en-US" sz="1200" dirty="0"/>
+                    </a:p>
+                    <a:p>
+                      <a:pPr indent="0" marL="0">
+                        <a:buNone/>
+                      </a:pPr>
+                      <a:r>
+                        <a:rPr lang="en-US" sz="1300" dirty="0">
+                          <a:solidFill>
+                            <a:srgbClr val="475569"/>
+                          </a:solidFill>
+                        </a:rPr>
+                        <a:t>paciente · história da família</a:t>
+                      </a:r>
+                      <a:endParaRPr lang="en-US" sz="1200" dirty="0"/>
+                    </a:p>
+                  </a:txBody>
+                  <a:tcPr marL="137160" marR="137160" marT="0" marB="0" anchor="ctr">
+                    <a:lnL w="9525" cap="flat" cmpd="sng" algn="ctr">
+                      <a:solidFill>
+                        <a:srgbClr val="D4E3F1"/>
+                      </a:solidFill>
+                      <a:prstDash val="solid"/>
+                      <a:round/>
+                      <a:headEnd type="none" w="med" len="med"/>
+                      <a:tailEnd type="none" w="med" len="med"/>
+                    </a:lnL>
+                    <a:lnR w="9525" cap="flat" cmpd="sng" algn="ctr">
+                      <a:solidFill>
+                        <a:srgbClr val="D4E3F1"/>
+                      </a:solidFill>
+                      <a:prstDash val="solid"/>
+                      <a:round/>
+                      <a:headEnd type="none" w="med" len="med"/>
+                      <a:tailEnd type="none" w="med" len="med"/>
+                    </a:lnR>
+                    <a:lnT w="9525" cap="flat" cmpd="sng" algn="ctr">
+                      <a:solidFill>
+                        <a:srgbClr val="D4E3F1"/>
+                      </a:solidFill>
+                      <a:prstDash val="solid"/>
+                      <a:round/>
+                      <a:headEnd type="none" w="med" len="med"/>
+                      <a:tailEnd type="none" w="med" len="med"/>
+                    </a:lnT>
+                    <a:lnB w="9525" cap="flat" cmpd="sng" algn="ctr">
+                      <a:solidFill>
+                        <a:srgbClr val="D4E3F1"/>
+                      </a:solidFill>
+                      <a:prstDash val="solid"/>
+                      <a:round/>
+                      <a:headEnd type="none" w="med" len="med"/>
+                      <a:tailEnd type="none" w="med" len="med"/>
+                    </a:lnB>
+                  </a:tcPr>
+                </a:tc>
+                <a:tc>
+                  <a:txBody>
+                    <a:bodyPr/>
+                    <a:lstStyle/>
+                    <a:p>
+                      <a:pPr indent="0" marL="0">
+                        <a:buNone/>
+                      </a:pPr>
+                      <a:r>
+                        <a:rPr lang="en-US" sz="2600" b="1" dirty="0">
+                          <a:solidFill>
+                            <a:srgbClr val="003F7E"/>
+                          </a:solidFill>
+                          <a:latin typeface="Courier New" pitchFamily="34" charset="0"/>
+                          <a:ea typeface="Courier New" pitchFamily="34" charset="-122"/>
+                          <a:cs typeface="Courier New" pitchFamily="34" charset="-120"/>
+                        </a:rPr>
+                        <a:t>marina</a:t>
+                      </a:r>
+                      <a:endParaRPr lang="en-US" sz="2600" dirty="0">
+                        <a:latin typeface="Courier New" charset="0"/>
+                        <a:ea typeface="Courier New" charset="0"/>
+                        <a:cs typeface="Courier New" charset="0"/>
+                      </a:endParaRPr>
+                    </a:p>
+                  </a:txBody>
+                  <a:tcPr marL="137160" marR="137160" marT="0" marB="0" anchor="ctr">
+                    <a:lnL w="9525" cap="flat" cmpd="sng" algn="ctr">
+                      <a:solidFill>
+                        <a:srgbClr val="D4E3F1"/>
+                      </a:solidFill>
+                      <a:prstDash val="solid"/>
+                      <a:round/>
+                      <a:headEnd type="none" w="med" len="med"/>
+                      <a:tailEnd type="none" w="med" len="med"/>
+                    </a:lnL>
+                    <a:lnR w="9525" cap="flat" cmpd="sng" algn="ctr">
+                      <a:solidFill>
+                        <a:srgbClr val="D4E3F1"/>
+                      </a:solidFill>
+                      <a:prstDash val="solid"/>
+                      <a:round/>
+                      <a:headEnd type="none" w="med" len="med"/>
+                      <a:tailEnd type="none" w="med" len="med"/>
+                    </a:lnR>
+                    <a:lnT w="9525" cap="flat" cmpd="sng" algn="ctr">
+                      <a:solidFill>
+                        <a:srgbClr val="D4E3F1"/>
+                      </a:solidFill>
+                      <a:prstDash val="solid"/>
+                      <a:round/>
+                      <a:headEnd type="none" w="med" len="med"/>
+                      <a:tailEnd type="none" w="med" len="med"/>
+                    </a:lnT>
+                    <a:lnB w="9525" cap="flat" cmpd="sng" algn="ctr">
+                      <a:solidFill>
+                        <a:srgbClr val="D4E3F1"/>
+                      </a:solidFill>
+                      <a:prstDash val="solid"/>
+                      <a:round/>
+                      <a:headEnd type="none" w="med" len="med"/>
+                      <a:tailEnd type="none" w="med" len="med"/>
+                    </a:lnB>
+                  </a:tcPr>
+                </a:tc>
+                <a:tc>
+                  <a:txBody>
+                    <a:bodyPr/>
+                    <a:lstStyle/>
+                    <a:p>
+                      <a:pPr indent="0" marL="0">
+                        <a:buNone/>
+                      </a:pPr>
+                      <a:r>
+                        <a:rPr lang="en-US" sz="2600" b="1" dirty="0">
+                          <a:solidFill>
+                            <a:srgbClr val="003F7E"/>
+                          </a:solidFill>
+                          <a:latin typeface="Courier New" pitchFamily="34" charset="0"/>
+                          <a:ea typeface="Courier New" pitchFamily="34" charset="-122"/>
+                          <a:cs typeface="Courier New" pitchFamily="34" charset="-120"/>
+                        </a:rPr>
+                        <a:t>Marina@123</a:t>
+                      </a:r>
+                      <a:endParaRPr lang="en-US" sz="2600" dirty="0">
+                        <a:latin typeface="Courier New" charset="0"/>
+                        <a:ea typeface="Courier New" charset="0"/>
+                        <a:cs typeface="Courier New" charset="0"/>
+                      </a:endParaRPr>
+                    </a:p>
+                  </a:txBody>
+                  <a:tcPr marL="137160" marR="137160" marT="0" marB="0" anchor="ctr">
+                    <a:lnL w="9525" cap="flat" cmpd="sng" algn="ctr">
+                      <a:solidFill>
+                        <a:srgbClr val="D4E3F1"/>
+                      </a:solidFill>
+                      <a:prstDash val="solid"/>
+                      <a:round/>
+                      <a:headEnd type="none" w="med" len="med"/>
+                      <a:tailEnd type="none" w="med" len="med"/>
+                    </a:lnL>
+                    <a:lnR w="9525" cap="flat" cmpd="sng" algn="ctr">
+                      <a:solidFill>
+                        <a:srgbClr val="D4E3F1"/>
+                      </a:solidFill>
+                      <a:prstDash val="solid"/>
+                      <a:round/>
+                      <a:headEnd type="none" w="med" len="med"/>
+                      <a:tailEnd type="none" w="med" len="med"/>
+                    </a:lnR>
+                    <a:lnT w="9525" cap="flat" cmpd="sng" algn="ctr">
+                      <a:solidFill>
+                        <a:srgbClr val="D4E3F1"/>
+                      </a:solidFill>
+                      <a:prstDash val="solid"/>
+                      <a:round/>
+                      <a:headEnd type="none" w="med" len="med"/>
+                      <a:tailEnd type="none" w="med" len="med"/>
+                    </a:lnT>
+                    <a:lnB w="9525" cap="flat" cmpd="sng" algn="ctr">
+                      <a:solidFill>
+                        <a:srgbClr val="D4E3F1"/>
+                      </a:solidFill>
+                      <a:prstDash val="solid"/>
+                      <a:round/>
+                      <a:headEnd type="none" w="med" len="med"/>
+                      <a:tailEnd type="none" w="med" len="med"/>
+                    </a:lnB>
+                  </a:tcPr>
+                </a:tc>
+              </a:tr>
+            </a:tbl>
+          </a:graphicData>
+        </a:graphic>
+      </p:graphicFrame>
+      <p:sp>
+        <p:nvSpPr>
+          <p:cNvPr id="5" name="Text 2"/>
           <p:cNvSpPr txBox="1"/>
           <p:nvPr/>
         </p:nvSpPr>
         <p:spPr>
           <a:xfrm>
-            <a:off x="685800" y="2011680"/>
-            <a:ext cx="3063240" cy="384048"/>
-          </a:xfrm>
-          <a:prstGeom prst="rect">
-            <a:avLst/>
-          </a:prstGeom>
-          <a:noFill/>
-          <a:ln/>
-        </p:spPr>
-        <p:txBody>
-          <a:bodyPr wrap="square" lIns="0" tIns="0" rIns="0" bIns="0" rtlCol="0" anchor="ctr"/>
-          <a:lstStyle/>
-          <a:p>
-            <a:pPr algn="ctr" indent="0" marL="0">
-              <a:buNone/>
-            </a:pPr>
-            <a:r>
-              <a:rPr lang="en-US" sz="1400" b="1" spc="100" kern="0" dirty="0">
-                <a:solidFill>
-                  <a:srgbClr val="C2410C"/>
-                </a:solidFill>
-              </a:rPr>
-              <a:t>COLORRETAL · INVESTIGAR</a:t>
-            </a:r>
-            <a:endParaRPr lang="en-US" sz="1400" dirty="0"/>
-          </a:p>
-        </p:txBody>
-      </p:sp>
-      <p:sp>
-        <p:nvSpPr>
-          <p:cNvPr id="7" name="Text 5"/>
-          <p:cNvSpPr txBox="1"/>
-          <p:nvPr/>
-        </p:nvSpPr>
-        <p:spPr>
-          <a:xfrm>
-            <a:off x="685800" y="2606040"/>
-            <a:ext cx="3063240" cy="1005840"/>
+            <a:off x="457200" y="5440680"/>
+            <a:ext cx="11247120" cy="731520"/>
           </a:xfrm>
           <a:prstGeom prst="rect">
             <a:avLst/>
@@ -5561,24 +7127,21 @@
           <a:p>
             <a:pPr indent="0" marL="0">
               <a:spcAft>
-                <a:spcPts val="200"/>
+                <a:spcPts val="400"/>
               </a:spcAft>
               <a:buNone/>
             </a:pPr>
             <a:r>
-              <a:rPr lang="en-US" sz="1100" b="1" spc="100" kern="0" dirty="0">
-                <a:solidFill>
-                  <a:srgbClr val="475569"/>
-                </a:solidFill>
-              </a:rPr>
-              <a:t>OS DADOS</a:t>
-            </a:r>
-            <a:endParaRPr lang="en-US" sz="1100" dirty="0"/>
-          </a:p>
-          <a:p>
+              <a:rPr lang="en-US" sz="1400" b="1" dirty="0">
+                <a:solidFill>
+                  <a:srgbClr val="003F7E"/>
+                </a:solidFill>
+              </a:rPr>
+              <a:t>Médica e paciente em janelas separadas </a:t>
+            </a:r>
             <a:pPr indent="0" marL="0">
               <a:spcAft>
-                <a:spcPts val="200"/>
+                <a:spcPts val="400"/>
               </a:spcAft>
               <a:buNone/>
             </a:pPr>
@@ -5588,53 +7151,28 @@
                   <a:srgbClr val="0F172A"/>
                 </a:solidFill>
               </a:rPr>
-              <a:t>Balança: −9,5% do peso em 90 dias. Anemia (Hb 10,9). FIT positivo.</a:t>
-            </a:r>
-            <a:endParaRPr lang="en-US" sz="1100" dirty="0"/>
-          </a:p>
-        </p:txBody>
-      </p:sp>
-      <p:sp>
-        <p:nvSpPr>
-          <p:cNvPr id="8" name="Text 6"/>
-          <p:cNvSpPr txBox="1"/>
-          <p:nvPr/>
-        </p:nvSpPr>
-        <p:spPr>
-          <a:xfrm>
-            <a:off x="685800" y="3657600"/>
-            <a:ext cx="3063240" cy="1325880"/>
-          </a:xfrm>
-          <a:prstGeom prst="rect">
-            <a:avLst/>
-          </a:prstGeom>
-          <a:noFill/>
-          <a:ln/>
-        </p:spPr>
-        <p:txBody>
-          <a:bodyPr wrap="square" lIns="0" tIns="0" rIns="0" bIns="0" rtlCol="0" anchor="t"/>
-          <a:lstStyle/>
+              <a:t>(uma anônima): o login fica guardado no navegador e um derruba o outro.</a:t>
+            </a:r>
+            <a:endParaRPr lang="en-US" sz="1400" dirty="0"/>
+          </a:p>
           <a:p>
             <a:pPr indent="0" marL="0">
               <a:spcAft>
-                <a:spcPts val="200"/>
+                <a:spcPts val="400"/>
               </a:spcAft>
               <a:buNone/>
             </a:pPr>
             <a:r>
-              <a:rPr lang="en-US" sz="1100" b="1" spc="100" kern="0" dirty="0">
-                <a:solidFill>
-                  <a:srgbClr val="475569"/>
-                </a:solidFill>
-              </a:rPr>
-              <a:t>A IA RECOMENDA</a:t>
-            </a:r>
-            <a:endParaRPr lang="en-US" sz="1100" dirty="0"/>
-          </a:p>
-          <a:p>
+              <a:rPr lang="en-US" sz="1400" b="1" dirty="0">
+                <a:solidFill>
+                  <a:srgbClr val="003F7E"/>
+                </a:solidFill>
+              </a:rPr>
+              <a:t>Paciente novo: </a:t>
+            </a:r>
             <a:pPr indent="0" marL="0">
               <a:spcAft>
-                <a:spcPts val="200"/>
+                <a:spcPts val="400"/>
               </a:spcAft>
               <a:buNone/>
             </a:pPr>
@@ -5644,649 +7182,9 @@
                   <a:srgbClr val="0F172A"/>
                 </a:solidFill>
               </a:rPr>
-              <a:t>Colonoscopia e consulta. TC de pulmão de baixa dose.</a:t>
-            </a:r>
-            <a:endParaRPr lang="en-US" sz="1100" dirty="0"/>
-          </a:p>
-        </p:txBody>
-      </p:sp>
-      <p:sp>
-        <p:nvSpPr>
-          <p:cNvPr id="9" name="Text 7"/>
-          <p:cNvSpPr txBox="1"/>
-          <p:nvPr/>
-        </p:nvSpPr>
-        <p:spPr>
-          <a:xfrm>
-            <a:off x="685800" y="5029200"/>
-            <a:ext cx="3063240" cy="960120"/>
-          </a:xfrm>
-          <a:prstGeom prst="rect">
-            <a:avLst/>
-          </a:prstGeom>
-          <a:noFill/>
-          <a:ln/>
-        </p:spPr>
-        <p:txBody>
-          <a:bodyPr wrap="square" lIns="0" tIns="0" rIns="0" bIns="0" rtlCol="0" anchor="t"/>
-          <a:lstStyle/>
-          <a:p>
-            <a:pPr indent="0" marL="0">
-              <a:spcAft>
-                <a:spcPts val="200"/>
-              </a:spcAft>
-              <a:buNone/>
-            </a:pPr>
-            <a:r>
-              <a:rPr lang="en-US" sz="1100" b="1" spc="100" kern="0" dirty="0">
-                <a:solidFill>
-                  <a:srgbClr val="475569"/>
-                </a:solidFill>
-              </a:rPr>
-              <a:t>O QUE DEMONSTRA</a:t>
-            </a:r>
-            <a:endParaRPr lang="en-US" sz="1100" dirty="0"/>
-          </a:p>
-          <a:p>
-            <a:pPr indent="0" marL="0">
-              <a:spcAft>
-                <a:spcPts val="200"/>
-              </a:spcAft>
-              <a:buNone/>
-            </a:pPr>
-            <a:r>
-              <a:rPr lang="en-US" sz="1400" dirty="0">
-                <a:solidFill>
-                  <a:srgbClr val="0F172A"/>
-                </a:solidFill>
-              </a:rPr>
-              <a:t>Pulseira, exames e sintomas somando evidência.</a:t>
-            </a:r>
-            <a:endParaRPr lang="en-US" sz="1100" dirty="0"/>
-          </a:p>
-        </p:txBody>
-      </p:sp>
-      <p:sp>
-        <p:nvSpPr>
-          <p:cNvPr id="10" name="paciente-2"/>
-          <p:cNvSpPr/>
-          <p:nvPr/>
-        </p:nvSpPr>
-        <p:spPr>
-          <a:xfrm>
-            <a:off x="4320540" y="1280160"/>
-            <a:ext cx="3520440" cy="4892040"/>
-          </a:xfrm>
-          <a:prstGeom prst="roundRect">
-            <a:avLst>
-              <a:gd name="adj" fmla="val 3117"/>
-            </a:avLst>
-          </a:prstGeom>
-          <a:solidFill>
-            <a:schemeClr val="bg2"/>
-          </a:solidFill>
-          <a:ln w="12700">
-            <a:solidFill>
-              <a:schemeClr val="accent6"/>
-            </a:solidFill>
-            <a:prstDash val="solid"/>
-          </a:ln>
-        </p:spPr>
-      </p:sp>
-      <p:sp>
-        <p:nvSpPr>
-          <p:cNvPr id="11" name="Text 9"/>
-          <p:cNvSpPr txBox="1"/>
-          <p:nvPr/>
-        </p:nvSpPr>
-        <p:spPr>
-          <a:xfrm>
-            <a:off x="4549140" y="1508760"/>
-            <a:ext cx="3063240" cy="411480"/>
-          </a:xfrm>
-          <a:prstGeom prst="rect">
-            <a:avLst/>
-          </a:prstGeom>
-          <a:noFill/>
-          <a:ln/>
-        </p:spPr>
-        <p:txBody>
-          <a:bodyPr wrap="square" lIns="0" tIns="0" rIns="0" bIns="0" rtlCol="0" anchor="ctr"/>
-          <a:lstStyle/>
-          <a:p>
-            <a:pPr indent="0" marL="0">
-              <a:buNone/>
-            </a:pPr>
-            <a:r>
-              <a:rPr lang="en-US" sz="2000" b="1" dirty="0">
-                <a:solidFill>
-                  <a:schemeClr val="tx1"/>
-                </a:solidFill>
-                <a:latin typeface="Arial" pitchFamily="34" charset="0"/>
-                <a:ea typeface="Arial" pitchFamily="34" charset="-122"/>
-                <a:cs typeface="Arial" pitchFamily="34" charset="-120"/>
-              </a:rPr>
-              <a:t>Marina Azevedo, 34</a:t>
-            </a:r>
-            <a:endParaRPr lang="en-US" sz="2000" dirty="0"/>
-          </a:p>
-        </p:txBody>
-      </p:sp>
-      <p:sp>
-        <p:nvSpPr>
-          <p:cNvPr id="12" name="nivel-paciente-2"/>
-          <p:cNvSpPr/>
-          <p:nvPr/>
-        </p:nvSpPr>
-        <p:spPr>
-          <a:xfrm>
-            <a:off x="4549140" y="2011680"/>
-            <a:ext cx="3063240" cy="384048"/>
-          </a:xfrm>
-          <a:prstGeom prst="roundRect">
-            <a:avLst>
-              <a:gd name="adj" fmla="val 50000"/>
-            </a:avLst>
-          </a:prstGeom>
-          <a:solidFill>
-            <a:srgbClr val="FEF3C7"/>
-          </a:solidFill>
-          <a:ln/>
-        </p:spPr>
-      </p:sp>
-      <p:sp>
-        <p:nvSpPr>
-          <p:cNvPr id="13" name="Text 11"/>
-          <p:cNvSpPr txBox="1"/>
-          <p:nvPr/>
-        </p:nvSpPr>
-        <p:spPr>
-          <a:xfrm>
-            <a:off x="4549140" y="2011680"/>
-            <a:ext cx="3063240" cy="384048"/>
-          </a:xfrm>
-          <a:prstGeom prst="rect">
-            <a:avLst/>
-          </a:prstGeom>
-          <a:noFill/>
-          <a:ln/>
-        </p:spPr>
-        <p:txBody>
-          <a:bodyPr wrap="square" lIns="0" tIns="0" rIns="0" bIns="0" rtlCol="0" anchor="ctr"/>
-          <a:lstStyle/>
-          <a:p>
-            <a:pPr algn="ctr" indent="0" marL="0">
-              <a:buNone/>
-            </a:pPr>
-            <a:r>
-              <a:rPr lang="en-US" sz="1400" b="1" spc="100" kern="0" dirty="0">
-                <a:solidFill>
-                  <a:srgbClr val="B45309"/>
-                </a:solidFill>
-              </a:rPr>
-              <a:t>MAMA · ATENÇÃO</a:t>
+              <a:t>"Cadastre-se" com usuário, nome e senha. Entra direto na triagem e fica ligado à Dra. Ana.</a:t>
             </a:r>
             <a:endParaRPr lang="en-US" sz="1400" dirty="0"/>
-          </a:p>
-        </p:txBody>
-      </p:sp>
-      <p:sp>
-        <p:nvSpPr>
-          <p:cNvPr id="14" name="Text 12"/>
-          <p:cNvSpPr txBox="1"/>
-          <p:nvPr/>
-        </p:nvSpPr>
-        <p:spPr>
-          <a:xfrm>
-            <a:off x="4549140" y="2606040"/>
-            <a:ext cx="3063240" cy="1005840"/>
-          </a:xfrm>
-          <a:prstGeom prst="rect">
-            <a:avLst/>
-          </a:prstGeom>
-          <a:noFill/>
-          <a:ln/>
-        </p:spPr>
-        <p:txBody>
-          <a:bodyPr wrap="square" lIns="0" tIns="0" rIns="0" bIns="0" rtlCol="0" anchor="t"/>
-          <a:lstStyle/>
-          <a:p>
-            <a:pPr indent="0" marL="0">
-              <a:spcAft>
-                <a:spcPts val="200"/>
-              </a:spcAft>
-              <a:buNone/>
-            </a:pPr>
-            <a:r>
-              <a:rPr lang="en-US" sz="1100" b="1" spc="100" kern="0" dirty="0">
-                <a:solidFill>
-                  <a:srgbClr val="475569"/>
-                </a:solidFill>
-              </a:rPr>
-              <a:t>OS DADOS</a:t>
-            </a:r>
-            <a:endParaRPr lang="en-US" sz="1100" dirty="0"/>
-          </a:p>
-          <a:p>
-            <a:pPr indent="0" marL="0">
-              <a:spcAft>
-                <a:spcPts val="200"/>
-              </a:spcAft>
-              <a:buNone/>
-            </a:pPr>
-            <a:r>
-              <a:rPr lang="en-US" sz="1400" dirty="0">
-                <a:solidFill>
-                  <a:srgbClr val="0F172A"/>
-                </a:solidFill>
-              </a:rPr>
-              <a:t>Mãe teve câncer de mama aos 41. Preventivo atrasado.</a:t>
-            </a:r>
-            <a:endParaRPr lang="en-US" sz="1100" dirty="0"/>
-          </a:p>
-        </p:txBody>
-      </p:sp>
-      <p:sp>
-        <p:nvSpPr>
-          <p:cNvPr id="15" name="Text 13"/>
-          <p:cNvSpPr txBox="1"/>
-          <p:nvPr/>
-        </p:nvSpPr>
-        <p:spPr>
-          <a:xfrm>
-            <a:off x="4549140" y="3657600"/>
-            <a:ext cx="3063240" cy="1325880"/>
-          </a:xfrm>
-          <a:prstGeom prst="rect">
-            <a:avLst/>
-          </a:prstGeom>
-          <a:noFill/>
-          <a:ln/>
-        </p:spPr>
-        <p:txBody>
-          <a:bodyPr wrap="square" lIns="0" tIns="0" rIns="0" bIns="0" rtlCol="0" anchor="t"/>
-          <a:lstStyle/>
-          <a:p>
-            <a:pPr indent="0" marL="0">
-              <a:spcAft>
-                <a:spcPts val="200"/>
-              </a:spcAft>
-              <a:buNone/>
-            </a:pPr>
-            <a:r>
-              <a:rPr lang="en-US" sz="1100" b="1" spc="100" kern="0" dirty="0">
-                <a:solidFill>
-                  <a:srgbClr val="475569"/>
-                </a:solidFill>
-              </a:rPr>
-              <a:t>A IA RECOMENDA</a:t>
-            </a:r>
-            <a:endParaRPr lang="en-US" sz="1100" dirty="0"/>
-          </a:p>
-          <a:p>
-            <a:pPr indent="0" marL="0">
-              <a:spcAft>
-                <a:spcPts val="200"/>
-              </a:spcAft>
-              <a:buNone/>
-            </a:pPr>
-            <a:r>
-              <a:rPr lang="en-US" sz="1400" dirty="0">
-                <a:solidFill>
-                  <a:srgbClr val="0F172A"/>
-                </a:solidFill>
-              </a:rPr>
-              <a:t>2,2× a média (~1 em 1.000): mamografia a partir dos 31, se o risco alto for confirmado. Teste de DNA-HPV.</a:t>
-            </a:r>
-            <a:endParaRPr lang="en-US" sz="1100" dirty="0"/>
-          </a:p>
-        </p:txBody>
-      </p:sp>
-      <p:sp>
-        <p:nvSpPr>
-          <p:cNvPr id="16" name="Text 14"/>
-          <p:cNvSpPr txBox="1"/>
-          <p:nvPr/>
-        </p:nvSpPr>
-        <p:spPr>
-          <a:xfrm>
-            <a:off x="4549140" y="5029200"/>
-            <a:ext cx="3063240" cy="960120"/>
-          </a:xfrm>
-          <a:prstGeom prst="rect">
-            <a:avLst/>
-          </a:prstGeom>
-          <a:noFill/>
-          <a:ln/>
-        </p:spPr>
-        <p:txBody>
-          <a:bodyPr wrap="square" lIns="0" tIns="0" rIns="0" bIns="0" rtlCol="0" anchor="t"/>
-          <a:lstStyle/>
-          <a:p>
-            <a:pPr indent="0" marL="0">
-              <a:spcAft>
-                <a:spcPts val="200"/>
-              </a:spcAft>
-              <a:buNone/>
-            </a:pPr>
-            <a:r>
-              <a:rPr lang="en-US" sz="1100" b="1" spc="100" kern="0" dirty="0">
-                <a:solidFill>
-                  <a:srgbClr val="475569"/>
-                </a:solidFill>
-              </a:rPr>
-              <a:t>O QUE DEMONSTRA</a:t>
-            </a:r>
-            <a:endParaRPr lang="en-US" sz="1100" dirty="0"/>
-          </a:p>
-          <a:p>
-            <a:pPr indent="0" marL="0">
-              <a:spcAft>
-                <a:spcPts val="200"/>
-              </a:spcAft>
-              <a:buNone/>
-            </a:pPr>
-            <a:r>
-              <a:rPr lang="en-US" sz="1400" dirty="0">
-                <a:solidFill>
-                  <a:srgbClr val="0F172A"/>
-                </a:solidFill>
-              </a:rPr>
-              <a:t>O plano de exames muda pela família, mesmo com risco baixo.</a:t>
-            </a:r>
-            <a:endParaRPr lang="en-US" sz="1100" dirty="0"/>
-          </a:p>
-        </p:txBody>
-      </p:sp>
-      <p:sp>
-        <p:nvSpPr>
-          <p:cNvPr id="17" name="paciente-3"/>
-          <p:cNvSpPr/>
-          <p:nvPr/>
-        </p:nvSpPr>
-        <p:spPr>
-          <a:xfrm>
-            <a:off x="8183880" y="1280160"/>
-            <a:ext cx="3520440" cy="4892040"/>
-          </a:xfrm>
-          <a:prstGeom prst="roundRect">
-            <a:avLst>
-              <a:gd name="adj" fmla="val 3117"/>
-            </a:avLst>
-          </a:prstGeom>
-          <a:solidFill>
-            <a:schemeClr val="bg2"/>
-          </a:solidFill>
-          <a:ln w="12700">
-            <a:solidFill>
-              <a:schemeClr val="accent6"/>
-            </a:solidFill>
-            <a:prstDash val="solid"/>
-          </a:ln>
-        </p:spPr>
-      </p:sp>
-      <p:sp>
-        <p:nvSpPr>
-          <p:cNvPr id="18" name="Text 16"/>
-          <p:cNvSpPr txBox="1"/>
-          <p:nvPr/>
-        </p:nvSpPr>
-        <p:spPr>
-          <a:xfrm>
-            <a:off x="8412480" y="1508760"/>
-            <a:ext cx="3063240" cy="411480"/>
-          </a:xfrm>
-          <a:prstGeom prst="rect">
-            <a:avLst/>
-          </a:prstGeom>
-          <a:noFill/>
-          <a:ln/>
-        </p:spPr>
-        <p:txBody>
-          <a:bodyPr wrap="square" lIns="0" tIns="0" rIns="0" bIns="0" rtlCol="0" anchor="ctr"/>
-          <a:lstStyle/>
-          <a:p>
-            <a:pPr indent="0" marL="0">
-              <a:buNone/>
-            </a:pPr>
-            <a:r>
-              <a:rPr lang="en-US" sz="2000" b="1" dirty="0">
-                <a:solidFill>
-                  <a:schemeClr val="tx1"/>
-                </a:solidFill>
-                <a:latin typeface="Arial" pitchFamily="34" charset="0"/>
-                <a:ea typeface="Arial" pitchFamily="34" charset="-122"/>
-                <a:cs typeface="Arial" pitchFamily="34" charset="-120"/>
-              </a:rPr>
-              <a:t>João Carlos, 58</a:t>
-            </a:r>
-            <a:endParaRPr lang="en-US" sz="2000" dirty="0"/>
-          </a:p>
-        </p:txBody>
-      </p:sp>
-      <p:sp>
-        <p:nvSpPr>
-          <p:cNvPr id="19" name="nivel-paciente-3"/>
-          <p:cNvSpPr/>
-          <p:nvPr/>
-        </p:nvSpPr>
-        <p:spPr>
-          <a:xfrm>
-            <a:off x="8412480" y="2011680"/>
-            <a:ext cx="3063240" cy="384048"/>
-          </a:xfrm>
-          <a:prstGeom prst="roundRect">
-            <a:avLst>
-              <a:gd name="adj" fmla="val 50000"/>
-            </a:avLst>
-          </a:prstGeom>
-          <a:solidFill>
-            <a:srgbClr val="DCFCE7"/>
-          </a:solidFill>
-          <a:ln/>
-        </p:spPr>
-      </p:sp>
-      <p:sp>
-        <p:nvSpPr>
-          <p:cNvPr id="20" name="Text 18"/>
-          <p:cNvSpPr txBox="1"/>
-          <p:nvPr/>
-        </p:nvSpPr>
-        <p:spPr>
-          <a:xfrm>
-            <a:off x="8412480" y="2011680"/>
-            <a:ext cx="3063240" cy="384048"/>
-          </a:xfrm>
-          <a:prstGeom prst="rect">
-            <a:avLst/>
-          </a:prstGeom>
-          <a:noFill/>
-          <a:ln/>
-        </p:spPr>
-        <p:txBody>
-          <a:bodyPr wrap="square" lIns="0" tIns="0" rIns="0" bIns="0" rtlCol="0" anchor="ctr"/>
-          <a:lstStyle/>
-          <a:p>
-            <a:pPr algn="ctr" indent="0" marL="0">
-              <a:buNone/>
-            </a:pPr>
-            <a:r>
-              <a:rPr lang="en-US" sz="1400" b="1" spc="100" kern="0" dirty="0">
-                <a:solidFill>
-                  <a:srgbClr val="15803D"/>
-                </a:solidFill>
-              </a:rPr>
-              <a:t>CÂNCER · ROTINA</a:t>
-            </a:r>
-            <a:endParaRPr lang="en-US" sz="1400" dirty="0"/>
-          </a:p>
-        </p:txBody>
-      </p:sp>
-      <p:sp>
-        <p:nvSpPr>
-          <p:cNvPr id="21" name="Text 19"/>
-          <p:cNvSpPr txBox="1"/>
-          <p:nvPr/>
-        </p:nvSpPr>
-        <p:spPr>
-          <a:xfrm>
-            <a:off x="8412480" y="2606040"/>
-            <a:ext cx="3063240" cy="1005840"/>
-          </a:xfrm>
-          <a:prstGeom prst="rect">
-            <a:avLst/>
-          </a:prstGeom>
-          <a:noFill/>
-          <a:ln/>
-        </p:spPr>
-        <p:txBody>
-          <a:bodyPr wrap="square" lIns="0" tIns="0" rIns="0" bIns="0" rtlCol="0" anchor="t"/>
-          <a:lstStyle/>
-          <a:p>
-            <a:pPr indent="0" marL="0">
-              <a:spcAft>
-                <a:spcPts val="200"/>
-              </a:spcAft>
-              <a:buNone/>
-            </a:pPr>
-            <a:r>
-              <a:rPr lang="en-US" sz="1100" b="1" spc="100" kern="0" dirty="0">
-                <a:solidFill>
-                  <a:srgbClr val="475569"/>
-                </a:solidFill>
-              </a:rPr>
-              <a:t>OS DADOS</a:t>
-            </a:r>
-            <a:endParaRPr lang="en-US" sz="1100" dirty="0"/>
-          </a:p>
-          <a:p>
-            <a:pPr indent="0" marL="0">
-              <a:spcAft>
-                <a:spcPts val="200"/>
-              </a:spcAft>
-              <a:buNone/>
-            </a:pPr>
-            <a:r>
-              <a:rPr lang="en-US" sz="1400" dirty="0">
-                <a:solidFill>
-                  <a:srgbClr val="0F172A"/>
-                </a:solidFill>
-              </a:rPr>
-              <a:t>Diabetes e pressão alta, que o app já acompanha. Nenhum sinal de câncer.</a:t>
-            </a:r>
-            <a:endParaRPr lang="en-US" sz="1100" dirty="0"/>
-          </a:p>
-        </p:txBody>
-      </p:sp>
-      <p:sp>
-        <p:nvSpPr>
-          <p:cNvPr id="22" name="Text 20"/>
-          <p:cNvSpPr txBox="1"/>
-          <p:nvPr/>
-        </p:nvSpPr>
-        <p:spPr>
-          <a:xfrm>
-            <a:off x="8412480" y="3657600"/>
-            <a:ext cx="3063240" cy="1325880"/>
-          </a:xfrm>
-          <a:prstGeom prst="rect">
-            <a:avLst/>
-          </a:prstGeom>
-          <a:noFill/>
-          <a:ln/>
-        </p:spPr>
-        <p:txBody>
-          <a:bodyPr wrap="square" lIns="0" tIns="0" rIns="0" bIns="0" rtlCol="0" anchor="t"/>
-          <a:lstStyle/>
-          <a:p>
-            <a:pPr indent="0" marL="0">
-              <a:spcAft>
-                <a:spcPts val="200"/>
-              </a:spcAft>
-              <a:buNone/>
-            </a:pPr>
-            <a:r>
-              <a:rPr lang="en-US" sz="1100" b="1" spc="100" kern="0" dirty="0">
-                <a:solidFill>
-                  <a:srgbClr val="475569"/>
-                </a:solidFill>
-              </a:rPr>
-              <a:t>A IA RECOMENDA</a:t>
-            </a:r>
-            <a:endParaRPr lang="en-US" sz="1100" dirty="0"/>
-          </a:p>
-          <a:p>
-            <a:pPr indent="0" marL="0">
-              <a:spcAft>
-                <a:spcPts val="200"/>
-              </a:spcAft>
-              <a:buNone/>
-            </a:pPr>
-            <a:r>
-              <a:rPr lang="en-US" sz="1400" dirty="0">
-                <a:solidFill>
-                  <a:srgbClr val="0F172A"/>
-                </a:solidFill>
-              </a:rPr>
-              <a:t>FIT pela idade (50–75). PSA: conversar com o médico.</a:t>
-            </a:r>
-            <a:endParaRPr lang="en-US" sz="1100" dirty="0"/>
-          </a:p>
-        </p:txBody>
-      </p:sp>
-      <p:sp>
-        <p:nvSpPr>
-          <p:cNvPr id="23" name="Text 21"/>
-          <p:cNvSpPr txBox="1"/>
-          <p:nvPr/>
-        </p:nvSpPr>
-        <p:spPr>
-          <a:xfrm>
-            <a:off x="8412480" y="5029200"/>
-            <a:ext cx="3063240" cy="960120"/>
-          </a:xfrm>
-          <a:prstGeom prst="rect">
-            <a:avLst/>
-          </a:prstGeom>
-          <a:noFill/>
-          <a:ln/>
-        </p:spPr>
-        <p:txBody>
-          <a:bodyPr wrap="square" lIns="0" tIns="0" rIns="0" bIns="0" rtlCol="0" anchor="t"/>
-          <a:lstStyle/>
-          <a:p>
-            <a:pPr indent="0" marL="0">
-              <a:spcAft>
-                <a:spcPts val="200"/>
-              </a:spcAft>
-              <a:buNone/>
-            </a:pPr>
-            <a:r>
-              <a:rPr lang="en-US" sz="1100" b="1" spc="100" kern="0" dirty="0">
-                <a:solidFill>
-                  <a:srgbClr val="475569"/>
-                </a:solidFill>
-              </a:rPr>
-              <a:t>O QUE DEMONSTRA</a:t>
-            </a:r>
-            <a:endParaRPr lang="en-US" sz="1100" dirty="0"/>
-          </a:p>
-          <a:p>
-            <a:pPr indent="0" marL="0">
-              <a:spcAft>
-                <a:spcPts val="200"/>
-              </a:spcAft>
-              <a:buNone/>
-            </a:pPr>
-            <a:r>
-              <a:rPr lang="en-US" sz="1400" dirty="0">
-                <a:solidFill>
-                  <a:srgbClr val="0F172A"/>
-                </a:solidFill>
-              </a:rPr>
-              <a:t>A IA também diz quando não há motivo para alarme de câncer.</a:t>
-            </a:r>
-            <a:endParaRPr lang="en-US" sz="1100" dirty="0"/>
           </a:p>
         </p:txBody>
       </p:sp>
@@ -6362,7 +7260,65 @@
       </p:grpSpPr>
       <p:sp>
         <p:nvSpPr>
-          <p:cNvPr id="2" name="Text 0"/>
+          <p:cNvPr id="2" name="selo-tela-medica"/>
+          <p:cNvSpPr/>
+          <p:nvPr/>
+        </p:nvSpPr>
+        <p:spPr>
+          <a:xfrm>
+            <a:off x="457200" y="91440"/>
+            <a:ext cx="1600200" cy="274320"/>
+          </a:xfrm>
+          <a:prstGeom prst="roundRect">
+            <a:avLst>
+              <a:gd name="adj" fmla="val 50000"/>
+            </a:avLst>
+          </a:prstGeom>
+          <a:solidFill>
+            <a:srgbClr val="E6F7FD"/>
+          </a:solidFill>
+          <a:ln/>
+        </p:spPr>
+      </p:sp>
+      <p:sp>
+        <p:nvSpPr>
+          <p:cNvPr id="3" name="Text 1"/>
+          <p:cNvSpPr txBox="1"/>
+          <p:nvPr/>
+        </p:nvSpPr>
+        <p:spPr>
+          <a:xfrm>
+            <a:off x="457200" y="91440"/>
+            <a:ext cx="1600200" cy="274320"/>
+          </a:xfrm>
+          <a:prstGeom prst="rect">
+            <a:avLst/>
+          </a:prstGeom>
+          <a:noFill/>
+          <a:ln/>
+        </p:spPr>
+        <p:txBody>
+          <a:bodyPr wrap="square" lIns="0" tIns="0" rIns="0" bIns="0" rtlCol="0" anchor="ctr"/>
+          <a:lstStyle/>
+          <a:p>
+            <a:pPr algn="ctr" indent="0" marL="0">
+              <a:buNone/>
+            </a:pPr>
+            <a:r>
+              <a:rPr lang="en-US" sz="1000" b="1" spc="100" kern="0" dirty="0">
+                <a:solidFill>
+                  <a:srgbClr val="000000"/>
+                </a:solidFill>
+              </a:rPr>
+              <a:t>TELA DA MÉDICA</a:t>
+            </a:r>
+            <a:endParaRPr lang="en-US" sz="1000" dirty="0"/>
+          </a:p>
+        </p:txBody>
+      </p:sp>
+      <p:sp>
+        <p:nvSpPr>
+          <p:cNvPr id="4" name="Text 0"/>
           <p:cNvSpPr/>
           <p:nvPr>
             <p:ph idx="100" type="title" hasCustomPrompt="1"/>
@@ -6392,15 +7348,1618 @@
                   <a:schemeClr val="tx2"/>
                 </a:solidFill>
               </a:rPr>
-              <a:t>Base da IA: os números foram para o banco</a:t>
+              <a:t>Sr. Roberto, 63: de 2 em 1.000 para INVESTIGAR</a:t>
             </a:r>
             <a:endParaRPr lang="en-US" sz="3400" dirty="0"/>
+          </a:p>
+        </p:txBody>
+      </p:sp>
+      <p:sp>
+        <p:nvSpPr>
+          <p:cNvPr id="5" name="Text 3"/>
+          <p:cNvSpPr txBox="1"/>
+          <p:nvPr/>
+        </p:nvSpPr>
+        <p:spPr>
+          <a:xfrm>
+            <a:off x="457200" y="1097280"/>
+            <a:ext cx="11247120" cy="411480"/>
+          </a:xfrm>
+          <a:prstGeom prst="rect">
+            <a:avLst/>
+          </a:prstGeom>
+          <a:noFill/>
+          <a:ln/>
+        </p:spPr>
+        <p:txBody>
+          <a:bodyPr wrap="square" lIns="0" tIns="0" rIns="0" bIns="0" rtlCol="0" anchor="ctr"/>
+          <a:lstStyle/>
+          <a:p>
+            <a:pPr indent="0" marL="0">
+              <a:buNone/>
+            </a:pPr>
+            <a:r>
+              <a:rPr lang="en-US" sz="1600" dirty="0">
+                <a:solidFill>
+                  <a:schemeClr val="accent5"/>
+                </a:solidFill>
+              </a:rPr>
+              <a:t>Ex-fumante (35 maços-ano, parou há 8 anos). Contou que o intestino mudou e anda cansado.</a:t>
+            </a:r>
+            <a:endParaRPr lang="en-US" sz="1600" dirty="0"/>
+          </a:p>
+        </p:txBody>
+      </p:sp>
+      <p:sp>
+        <p:nvSpPr>
+          <p:cNvPr id="6" name="card-numeros"/>
+          <p:cNvSpPr/>
+          <p:nvPr/>
+        </p:nvSpPr>
+        <p:spPr>
+          <a:xfrm>
+            <a:off x="457200" y="1737360"/>
+            <a:ext cx="4206240" cy="3429000"/>
+          </a:xfrm>
+          <a:prstGeom prst="roundRect">
+            <a:avLst>
+              <a:gd name="adj" fmla="val 3200"/>
+            </a:avLst>
+          </a:prstGeom>
+          <a:solidFill>
+            <a:schemeClr val="bg2"/>
+          </a:solidFill>
+          <a:ln w="12700">
+            <a:solidFill>
+              <a:schemeClr val="accent6"/>
+            </a:solidFill>
+            <a:prstDash val="solid"/>
+          </a:ln>
+        </p:spPr>
+      </p:sp>
+      <p:sp>
+        <p:nvSpPr>
+          <p:cNvPr id="7" name="Text 5"/>
+          <p:cNvSpPr txBox="1"/>
+          <p:nvPr/>
+        </p:nvSpPr>
+        <p:spPr>
+          <a:xfrm>
+            <a:off x="731520" y="1874520"/>
+            <a:ext cx="3657600" cy="731520"/>
+          </a:xfrm>
+          <a:prstGeom prst="rect">
+            <a:avLst/>
+          </a:prstGeom>
+          <a:noFill/>
+          <a:ln/>
+        </p:spPr>
+        <p:txBody>
+          <a:bodyPr wrap="square" lIns="0" tIns="0" rIns="0" bIns="0" rtlCol="0" anchor="ctr"/>
+          <a:lstStyle/>
+          <a:p>
+            <a:pPr indent="0" marL="0">
+              <a:buNone/>
+            </a:pPr>
+            <a:r>
+              <a:rPr lang="en-US" sz="4400" b="1" dirty="0">
+                <a:solidFill>
+                  <a:schemeClr val="tx2"/>
+                </a:solidFill>
+                <a:latin typeface="Arial" pitchFamily="34" charset="0"/>
+                <a:ea typeface="Arial" pitchFamily="34" charset="-122"/>
+                <a:cs typeface="Arial" pitchFamily="34" charset="-120"/>
+              </a:rPr>
+              <a:t>0,16%</a:t>
+            </a:r>
+            <a:endParaRPr lang="en-US" sz="4400" dirty="0"/>
+          </a:p>
+        </p:txBody>
+      </p:sp>
+      <p:sp>
+        <p:nvSpPr>
+          <p:cNvPr id="8" name="Text 6"/>
+          <p:cNvSpPr txBox="1"/>
+          <p:nvPr/>
+        </p:nvSpPr>
+        <p:spPr>
+          <a:xfrm>
+            <a:off x="731520" y="2606040"/>
+            <a:ext cx="3657600" cy="548640"/>
+          </a:xfrm>
+          <a:prstGeom prst="rect">
+            <a:avLst/>
+          </a:prstGeom>
+          <a:noFill/>
+          <a:ln/>
+        </p:spPr>
+        <p:txBody>
+          <a:bodyPr wrap="square" lIns="0" tIns="0" rIns="0" bIns="0" rtlCol="0" anchor="t"/>
+          <a:lstStyle/>
+          <a:p>
+            <a:pPr indent="0" marL="0">
+              <a:buNone/>
+            </a:pPr>
+            <a:r>
+              <a:rPr lang="en-US" sz="1400" dirty="0">
+                <a:solidFill>
+                  <a:schemeClr val="accent5"/>
+                </a:solidFill>
+              </a:rPr>
+              <a:t>média de homens de 60–64 anos em 2 anos (~2 em 1.000)</a:t>
+            </a:r>
+            <a:endParaRPr lang="en-US" sz="1400" dirty="0"/>
+          </a:p>
+        </p:txBody>
+      </p:sp>
+      <p:sp>
+        <p:nvSpPr>
+          <p:cNvPr id="9" name="Text 7"/>
+          <p:cNvSpPr txBox="1"/>
+          <p:nvPr/>
+        </p:nvSpPr>
+        <p:spPr>
+          <a:xfrm>
+            <a:off x="731520" y="3291840"/>
+            <a:ext cx="3657600" cy="731520"/>
+          </a:xfrm>
+          <a:prstGeom prst="rect">
+            <a:avLst/>
+          </a:prstGeom>
+          <a:noFill/>
+          <a:ln/>
+        </p:spPr>
+        <p:txBody>
+          <a:bodyPr wrap="square" lIns="0" tIns="0" rIns="0" bIns="0" rtlCol="0" anchor="ctr"/>
+          <a:lstStyle/>
+          <a:p>
+            <a:pPr indent="0" marL="0">
+              <a:buNone/>
+            </a:pPr>
+            <a:r>
+              <a:rPr lang="en-US" sz="4400" b="1" dirty="0">
+                <a:solidFill>
+                  <a:srgbClr val="C2410C"/>
+                </a:solidFill>
+                <a:latin typeface="Arial" pitchFamily="34" charset="0"/>
+                <a:ea typeface="Arial" pitchFamily="34" charset="-122"/>
+                <a:cs typeface="Arial" pitchFamily="34" charset="-120"/>
+              </a:rPr>
+              <a:t>≥ 20%</a:t>
+            </a:r>
+            <a:endParaRPr lang="en-US" sz="4400" dirty="0"/>
+          </a:p>
+        </p:txBody>
+      </p:sp>
+      <p:sp>
+        <p:nvSpPr>
+          <p:cNvPr id="10" name="Text 8"/>
+          <p:cNvSpPr txBox="1"/>
+          <p:nvPr/>
+        </p:nvSpPr>
+        <p:spPr>
+          <a:xfrm>
+            <a:off x="731520" y="4023360"/>
+            <a:ext cx="3657600" cy="365760"/>
+          </a:xfrm>
+          <a:prstGeom prst="rect">
+            <a:avLst/>
+          </a:prstGeom>
+          <a:noFill/>
+          <a:ln/>
+        </p:spPr>
+        <p:txBody>
+          <a:bodyPr wrap="square" lIns="0" tIns="0" rIns="0" bIns="0" rtlCol="0" anchor="ctr"/>
+          <a:lstStyle/>
+          <a:p>
+            <a:pPr indent="0" marL="0">
+              <a:buNone/>
+            </a:pPr>
+            <a:r>
+              <a:rPr lang="en-US" sz="1400" dirty="0">
+                <a:solidFill>
+                  <a:schemeClr val="accent5"/>
+                </a:solidFill>
+              </a:rPr>
+              <a:t>com as pistas: mais de 1 em 5</a:t>
+            </a:r>
+            <a:endParaRPr lang="en-US" sz="1400" dirty="0"/>
+          </a:p>
+        </p:txBody>
+      </p:sp>
+      <p:sp>
+        <p:nvSpPr>
+          <p:cNvPr id="11" name="selo-roberto"/>
+          <p:cNvSpPr/>
+          <p:nvPr/>
+        </p:nvSpPr>
+        <p:spPr>
+          <a:xfrm>
+            <a:off x="731520" y="4526280"/>
+            <a:ext cx="2926080" cy="384048"/>
+          </a:xfrm>
+          <a:prstGeom prst="roundRect">
+            <a:avLst>
+              <a:gd name="adj" fmla="val 50000"/>
+            </a:avLst>
+          </a:prstGeom>
+          <a:solidFill>
+            <a:srgbClr val="FFEDD5"/>
+          </a:solidFill>
+          <a:ln/>
+        </p:spPr>
+      </p:sp>
+      <p:sp>
+        <p:nvSpPr>
+          <p:cNvPr id="12" name="Text 10"/>
+          <p:cNvSpPr txBox="1"/>
+          <p:nvPr/>
+        </p:nvSpPr>
+        <p:spPr>
+          <a:xfrm>
+            <a:off x="731520" y="4526280"/>
+            <a:ext cx="2926080" cy="384048"/>
+          </a:xfrm>
+          <a:prstGeom prst="rect">
+            <a:avLst/>
+          </a:prstGeom>
+          <a:noFill/>
+          <a:ln/>
+        </p:spPr>
+        <p:txBody>
+          <a:bodyPr wrap="square" lIns="0" tIns="0" rIns="0" bIns="0" rtlCol="0" anchor="ctr"/>
+          <a:lstStyle/>
+          <a:p>
+            <a:pPr algn="ctr" indent="0" marL="0">
+              <a:buNone/>
+            </a:pPr>
+            <a:r>
+              <a:rPr lang="en-US" sz="1400" b="1" spc="100" kern="0" dirty="0">
+                <a:solidFill>
+                  <a:srgbClr val="C2410C"/>
+                </a:solidFill>
+              </a:rPr>
+              <a:t>COLORRETAL · INVESTIGAR</a:t>
+            </a:r>
+            <a:endParaRPr lang="en-US" sz="1400" dirty="0"/>
           </a:p>
         </p:txBody>
       </p:sp>
       <p:graphicFrame>
         <p:nvGraphicFramePr>
-          <p:cNvPr id="7" name="Table 0"/>
+          <p:cNvPr id="13" name="Chart 0" descr=""/>
+          <p:cNvGraphicFramePr/>
+          <p:nvPr/>
+        </p:nvGraphicFramePr>
+        <p:xfrm>
+          <a:off x="4937760" y="1737360"/>
+          <a:ext cx="6766560" cy="3063240"/>
+        </p:xfrm>
+        <a:graphic xmlns:a="http://schemas.openxmlformats.org/drawingml/2006/main">
+          <a:graphicData uri="http://schemas.openxmlformats.org/drawingml/2006/chart">
+            <c:chart xmlns:c="http://schemas.openxmlformats.org/drawingml/2006/chart" r:id="rId1"/>
+          </a:graphicData>
+        </a:graphic>
+      </p:graphicFrame>
+      <p:sp>
+        <p:nvSpPr>
+          <p:cNvPr id="14" name="Text 11"/>
+          <p:cNvSpPr txBox="1"/>
+          <p:nvPr/>
+        </p:nvSpPr>
+        <p:spPr>
+          <a:xfrm>
+            <a:off x="4937760" y="4846320"/>
+            <a:ext cx="6766560" cy="365760"/>
+          </a:xfrm>
+          <a:prstGeom prst="rect">
+            <a:avLst/>
+          </a:prstGeom>
+          <a:noFill/>
+          <a:ln/>
+        </p:spPr>
+        <p:txBody>
+          <a:bodyPr wrap="square" lIns="0" tIns="0" rIns="0" bIns="0" rtlCol="0" anchor="ctr"/>
+          <a:lstStyle/>
+          <a:p>
+            <a:pPr indent="0" marL="0">
+              <a:buNone/>
+            </a:pPr>
+            <a:r>
+              <a:rPr lang="en-US" sz="1100" dirty="0">
+                <a:solidFill>
+                  <a:schemeClr val="accent5"/>
+                </a:solidFill>
+              </a:rPr>
+              <a:t>Fontes: Lee 2014 (FIT, 19 estudos); Hamilton 2005 (CAPER colorretal, 349 casos). Prior: GLOBOCAN 2022 calibrado pelo INCA 2026.</a:t>
+            </a:r>
+            <a:endParaRPr lang="en-US" sz="1100" dirty="0"/>
+          </a:p>
+        </p:txBody>
+      </p:sp>
+      <p:sp>
+        <p:nvSpPr>
+          <p:cNvPr id="15" name="Text 12"/>
+          <p:cNvSpPr txBox="1"/>
+          <p:nvPr/>
+        </p:nvSpPr>
+        <p:spPr>
+          <a:xfrm>
+            <a:off x="457200" y="5486400"/>
+            <a:ext cx="11247120" cy="731520"/>
+          </a:xfrm>
+          <a:prstGeom prst="rect">
+            <a:avLst/>
+          </a:prstGeom>
+          <a:noFill/>
+          <a:ln/>
+        </p:spPr>
+        <p:txBody>
+          <a:bodyPr wrap="square" lIns="0" tIns="0" rIns="0" bIns="0" rtlCol="0" anchor="t"/>
+          <a:lstStyle/>
+          <a:p>
+            <a:pPr indent="0" marL="0">
+              <a:buNone/>
+            </a:pPr>
+            <a:r>
+              <a:rPr lang="en-US" sz="1400" b="1" dirty="0">
+                <a:solidFill>
+                  <a:srgbClr val="003F7E"/>
+                </a:solidFill>
+              </a:rPr>
+              <a:t>Para a médica: </a:t>
+            </a:r>
+            <a:pPr indent="0" marL="0">
+              <a:buNone/>
+            </a:pPr>
+            <a:r>
+              <a:rPr lang="en-US" sz="1400" dirty="0">
+                <a:solidFill>
+                  <a:srgbClr val="0F172A"/>
+                </a:solidFill>
+              </a:rPr>
+              <a:t>avaliação com colonoscopia. Como ex-fumante, também a TC de pulmão de baixa dose (consenso 2024).</a:t>
+            </a:r>
+            <a:endParaRPr lang="en-US" sz="1400" dirty="0"/>
+          </a:p>
+          <a:p>
+            <a:pPr indent="0" marL="0">
+              <a:buNone/>
+            </a:pPr>
+            <a:r>
+              <a:rPr lang="en-US" sz="1400" b="1" dirty="0">
+                <a:solidFill>
+                  <a:srgbClr val="003F7E"/>
+                </a:solidFill>
+              </a:rPr>
+              <a:t>No app do Roberto: </a:t>
+            </a:r>
+            <a:pPr indent="0" marL="0">
+              <a:buNone/>
+            </a:pPr>
+            <a:r>
+              <a:rPr lang="en-US" sz="1400" dirty="0">
+                <a:solidFill>
+                  <a:srgbClr val="0F172A"/>
+                </a:solidFill>
+              </a:rPr>
+              <a:t>o próximo passo ("Agendar consulta"), os exames preventivos e as metas. Nada sobre doença.</a:t>
+            </a:r>
+            <a:endParaRPr lang="en-US" sz="1400" dirty="0"/>
+          </a:p>
+        </p:txBody>
+      </p:sp>
+      <p:sp>
+        <p:nvSpPr>
+          <p:cNvPr id="25" name="Slide Number Placeholder 0"/>
+          <p:cNvSpPr>
+            <a:spLocks noGrp="1"/>
+          </p:cNvSpPr>
+          <p:nvPr>
+            <p:ph type="sldNum" sz="quarter" idx="4294967295"/>
+          </p:nvPr>
+        </p:nvSpPr>
+        <p:spPr>
+          <a:xfrm>
+            <a:off x="11247120" y="6400800"/>
+            <a:ext cx="457200" cy="274320"/>
+          </a:xfrm>
+          <a:prstGeom prst="rect">
+            <a:avLst/>
+          </a:prstGeom>
+          <a:extLst>
+            <a:ext uri="{C572A759-6A51-4108-AA02-DFA0A04FC94B}">
+              <ma14:wrappingTextBoxFlag xmlns:ma14="http://schemas.microsoft.com/office/mac/drawingml/2011/main" val="0"/>
+            </a:ext>
+          </a:extLst>
+        </p:spPr>
+        <p:txBody>
+          <a:bodyPr/>
+          <a:lstStyle>
+            <a:lvl1pPr>
+              <a:defRPr sz="1000">
+                <a:solidFill>
+                  <a:srgbClr val="475569"/>
+                </a:solidFill>
+              </a:defRPr>
+            </a:lvl1pPr>
+          </a:lstStyle>
+          <a:p>
+            <a:pPr algn="r"/>
+            <a:fld id="{F7021451-1387-4CA6-816F-3879F97B5CBC}" type="slidenum">
+              <a:rPr b="0" lang="en-US"/>
+              <a:t>6</a:t>
+            </a:fld>
+            <a:endParaRPr lang="en-US"/>
+          </a:p>
+        </p:txBody>
+      </p:sp>
+    </p:spTree>
+  </p:cSld>
+  <p:clrMapOvr>
+    <a:masterClrMapping/>
+  </p:clrMapOvr>
+</p:sld>
+</file>
+
+<file path=ppt/slides/slide7.xml><?xml version="1.0" encoding="utf-8"?>
+<p:sld xmlns:a="http://schemas.openxmlformats.org/drawingml/2006/main" xmlns:r="http://schemas.openxmlformats.org/officeDocument/2006/relationships" xmlns:p="http://schemas.openxmlformats.org/presentationml/2006/main">
+  <p:cSld name="Slide 7">
+    <p:spTree>
+      <p:nvGrpSpPr>
+        <p:cNvPr id="1" name=""/>
+        <p:cNvGrpSpPr/>
+        <p:nvPr/>
+      </p:nvGrpSpPr>
+      <p:grpSpPr>
+        <a:xfrm>
+          <a:off x="0" y="0"/>
+          <a:ext cx="0" cy="0"/>
+          <a:chOff x="0" y="0"/>
+          <a:chExt cx="0" cy="0"/>
+        </a:xfrm>
+      </p:grpSpPr>
+      <p:sp>
+        <p:nvSpPr>
+          <p:cNvPr id="2" name="selo-tela-medica"/>
+          <p:cNvSpPr/>
+          <p:nvPr/>
+        </p:nvSpPr>
+        <p:spPr>
+          <a:xfrm>
+            <a:off x="457200" y="91440"/>
+            <a:ext cx="1600200" cy="274320"/>
+          </a:xfrm>
+          <a:prstGeom prst="roundRect">
+            <a:avLst>
+              <a:gd name="adj" fmla="val 50000"/>
+            </a:avLst>
+          </a:prstGeom>
+          <a:solidFill>
+            <a:srgbClr val="E6F7FD"/>
+          </a:solidFill>
+          <a:ln/>
+        </p:spPr>
+      </p:sp>
+      <p:sp>
+        <p:nvSpPr>
+          <p:cNvPr id="3" name="Text 1"/>
+          <p:cNvSpPr txBox="1"/>
+          <p:nvPr/>
+        </p:nvSpPr>
+        <p:spPr>
+          <a:xfrm>
+            <a:off x="457200" y="91440"/>
+            <a:ext cx="1600200" cy="274320"/>
+          </a:xfrm>
+          <a:prstGeom prst="rect">
+            <a:avLst/>
+          </a:prstGeom>
+          <a:noFill/>
+          <a:ln/>
+        </p:spPr>
+        <p:txBody>
+          <a:bodyPr wrap="square" lIns="0" tIns="0" rIns="0" bIns="0" rtlCol="0" anchor="ctr"/>
+          <a:lstStyle/>
+          <a:p>
+            <a:pPr algn="ctr" indent="0" marL="0">
+              <a:buNone/>
+            </a:pPr>
+            <a:r>
+              <a:rPr lang="en-US" sz="1000" b="1" spc="100" kern="0" dirty="0">
+                <a:solidFill>
+                  <a:srgbClr val="000000"/>
+                </a:solidFill>
+              </a:rPr>
+              <a:t>TELA DA MÉDICA</a:t>
+            </a:r>
+            <a:endParaRPr lang="en-US" sz="1000" dirty="0"/>
+          </a:p>
+        </p:txBody>
+      </p:sp>
+      <p:sp>
+        <p:nvSpPr>
+          <p:cNvPr id="4" name="Text 0"/>
+          <p:cNvSpPr/>
+          <p:nvPr>
+            <p:ph idx="100" type="title" hasCustomPrompt="1"/>
+          </p:nvPr>
+        </p:nvSpPr>
+        <p:spPr>
+          <a:xfrm>
+            <a:off x="457200" y="320040"/>
+            <a:ext cx="11247120" cy="777240"/>
+          </a:xfrm>
+          <a:prstGeom prst="rect">
+            <a:avLst/>
+          </a:prstGeom>
+          <a:noFill/>
+          <a:ln/>
+        </p:spPr>
+        <p:txBody>
+          <a:bodyPr wrap="square" lIns="0" tIns="0" rIns="0" bIns="0" rtlCol="0" anchor="ctr"/>
+          <a:lstStyle/>
+          <a:p>
+            <a:pPr algn="l" indent="0" marL="0">
+              <a:buNone/>
+            </a:pPr>
+            <a:r>
+              <a:rPr lang="en-US" sz="3400" b="1" dirty="0">
+                <a:solidFill>
+                  <a:schemeClr val="tx2"/>
+                </a:solidFill>
+              </a:rPr>
+              <a:t>Três pacientes, três histórias</a:t>
+            </a:r>
+            <a:endParaRPr lang="en-US" sz="3400" dirty="0"/>
+          </a:p>
+        </p:txBody>
+      </p:sp>
+      <p:sp>
+        <p:nvSpPr>
+          <p:cNvPr id="5" name="paciente-1"/>
+          <p:cNvSpPr/>
+          <p:nvPr/>
+        </p:nvSpPr>
+        <p:spPr>
+          <a:xfrm>
+            <a:off x="457200" y="1280160"/>
+            <a:ext cx="3520440" cy="4892040"/>
+          </a:xfrm>
+          <a:prstGeom prst="roundRect">
+            <a:avLst>
+              <a:gd name="adj" fmla="val 3117"/>
+            </a:avLst>
+          </a:prstGeom>
+          <a:solidFill>
+            <a:schemeClr val="bg2"/>
+          </a:solidFill>
+          <a:ln w="12700">
+            <a:solidFill>
+              <a:schemeClr val="accent6"/>
+            </a:solidFill>
+            <a:prstDash val="solid"/>
+          </a:ln>
+        </p:spPr>
+      </p:sp>
+      <p:sp>
+        <p:nvSpPr>
+          <p:cNvPr id="6" name="Text 4"/>
+          <p:cNvSpPr txBox="1"/>
+          <p:nvPr/>
+        </p:nvSpPr>
+        <p:spPr>
+          <a:xfrm>
+            <a:off x="685800" y="1508760"/>
+            <a:ext cx="3063240" cy="411480"/>
+          </a:xfrm>
+          <a:prstGeom prst="rect">
+            <a:avLst/>
+          </a:prstGeom>
+          <a:noFill/>
+          <a:ln/>
+        </p:spPr>
+        <p:txBody>
+          <a:bodyPr wrap="square" lIns="0" tIns="0" rIns="0" bIns="0" rtlCol="0" anchor="ctr"/>
+          <a:lstStyle/>
+          <a:p>
+            <a:pPr indent="0" marL="0">
+              <a:buNone/>
+            </a:pPr>
+            <a:r>
+              <a:rPr lang="en-US" sz="2000" b="1" dirty="0">
+                <a:solidFill>
+                  <a:schemeClr val="tx1"/>
+                </a:solidFill>
+                <a:latin typeface="Arial" pitchFamily="34" charset="0"/>
+                <a:ea typeface="Arial" pitchFamily="34" charset="-122"/>
+                <a:cs typeface="Arial" pitchFamily="34" charset="-120"/>
+              </a:rPr>
+              <a:t>Roberto Alves, 63</a:t>
+            </a:r>
+            <a:endParaRPr lang="en-US" sz="2000" dirty="0"/>
+          </a:p>
+        </p:txBody>
+      </p:sp>
+      <p:sp>
+        <p:nvSpPr>
+          <p:cNvPr id="7" name="nivel-paciente-1"/>
+          <p:cNvSpPr/>
+          <p:nvPr/>
+        </p:nvSpPr>
+        <p:spPr>
+          <a:xfrm>
+            <a:off x="685800" y="2011680"/>
+            <a:ext cx="3063240" cy="384048"/>
+          </a:xfrm>
+          <a:prstGeom prst="roundRect">
+            <a:avLst>
+              <a:gd name="adj" fmla="val 50000"/>
+            </a:avLst>
+          </a:prstGeom>
+          <a:solidFill>
+            <a:srgbClr val="FFEDD5"/>
+          </a:solidFill>
+          <a:ln/>
+        </p:spPr>
+      </p:sp>
+      <p:sp>
+        <p:nvSpPr>
+          <p:cNvPr id="8" name="Text 6"/>
+          <p:cNvSpPr txBox="1"/>
+          <p:nvPr/>
+        </p:nvSpPr>
+        <p:spPr>
+          <a:xfrm>
+            <a:off x="685800" y="2011680"/>
+            <a:ext cx="3063240" cy="384048"/>
+          </a:xfrm>
+          <a:prstGeom prst="rect">
+            <a:avLst/>
+          </a:prstGeom>
+          <a:noFill/>
+          <a:ln/>
+        </p:spPr>
+        <p:txBody>
+          <a:bodyPr wrap="square" lIns="0" tIns="0" rIns="0" bIns="0" rtlCol="0" anchor="ctr"/>
+          <a:lstStyle/>
+          <a:p>
+            <a:pPr algn="ctr" indent="0" marL="0">
+              <a:buNone/>
+            </a:pPr>
+            <a:r>
+              <a:rPr lang="en-US" sz="1400" b="1" spc="100" kern="0" dirty="0">
+                <a:solidFill>
+                  <a:srgbClr val="C2410C"/>
+                </a:solidFill>
+              </a:rPr>
+              <a:t>COLORRETAL · INVESTIGAR</a:t>
+            </a:r>
+            <a:endParaRPr lang="en-US" sz="1400" dirty="0"/>
+          </a:p>
+        </p:txBody>
+      </p:sp>
+      <p:sp>
+        <p:nvSpPr>
+          <p:cNvPr id="9" name="Text 7"/>
+          <p:cNvSpPr txBox="1"/>
+          <p:nvPr/>
+        </p:nvSpPr>
+        <p:spPr>
+          <a:xfrm>
+            <a:off x="685800" y="2606040"/>
+            <a:ext cx="3063240" cy="1005840"/>
+          </a:xfrm>
+          <a:prstGeom prst="rect">
+            <a:avLst/>
+          </a:prstGeom>
+          <a:noFill/>
+          <a:ln/>
+        </p:spPr>
+        <p:txBody>
+          <a:bodyPr wrap="square" lIns="0" tIns="0" rIns="0" bIns="0" rtlCol="0" anchor="t"/>
+          <a:lstStyle/>
+          <a:p>
+            <a:pPr indent="0" marL="0">
+              <a:spcAft>
+                <a:spcPts val="200"/>
+              </a:spcAft>
+              <a:buNone/>
+            </a:pPr>
+            <a:r>
+              <a:rPr lang="en-US" sz="1100" b="1" spc="100" kern="0" dirty="0">
+                <a:solidFill>
+                  <a:srgbClr val="475569"/>
+                </a:solidFill>
+              </a:rPr>
+              <a:t>OS DADOS</a:t>
+            </a:r>
+            <a:endParaRPr lang="en-US" sz="1100" dirty="0"/>
+          </a:p>
+          <a:p>
+            <a:pPr indent="0" marL="0">
+              <a:spcAft>
+                <a:spcPts val="200"/>
+              </a:spcAft>
+              <a:buNone/>
+            </a:pPr>
+            <a:r>
+              <a:rPr lang="en-US" sz="1400" dirty="0">
+                <a:solidFill>
+                  <a:srgbClr val="0F172A"/>
+                </a:solidFill>
+              </a:rPr>
+              <a:t>Balança: −9,5% do peso em 90 dias. Anemia (Hb 10,9). FIT positivo.</a:t>
+            </a:r>
+            <a:endParaRPr lang="en-US" sz="1100" dirty="0"/>
+          </a:p>
+        </p:txBody>
+      </p:sp>
+      <p:sp>
+        <p:nvSpPr>
+          <p:cNvPr id="10" name="Text 8"/>
+          <p:cNvSpPr txBox="1"/>
+          <p:nvPr/>
+        </p:nvSpPr>
+        <p:spPr>
+          <a:xfrm>
+            <a:off x="685800" y="3657600"/>
+            <a:ext cx="3063240" cy="1325880"/>
+          </a:xfrm>
+          <a:prstGeom prst="rect">
+            <a:avLst/>
+          </a:prstGeom>
+          <a:noFill/>
+          <a:ln/>
+        </p:spPr>
+        <p:txBody>
+          <a:bodyPr wrap="square" lIns="0" tIns="0" rIns="0" bIns="0" rtlCol="0" anchor="t"/>
+          <a:lstStyle/>
+          <a:p>
+            <a:pPr indent="0" marL="0">
+              <a:spcAft>
+                <a:spcPts val="200"/>
+              </a:spcAft>
+              <a:buNone/>
+            </a:pPr>
+            <a:r>
+              <a:rPr lang="en-US" sz="1100" b="1" spc="100" kern="0" dirty="0">
+                <a:solidFill>
+                  <a:srgbClr val="475569"/>
+                </a:solidFill>
+              </a:rPr>
+              <a:t>A IA RECOMENDA</a:t>
+            </a:r>
+            <a:endParaRPr lang="en-US" sz="1100" dirty="0"/>
+          </a:p>
+          <a:p>
+            <a:pPr indent="0" marL="0">
+              <a:spcAft>
+                <a:spcPts val="200"/>
+              </a:spcAft>
+              <a:buNone/>
+            </a:pPr>
+            <a:r>
+              <a:rPr lang="en-US" sz="1400" dirty="0">
+                <a:solidFill>
+                  <a:srgbClr val="0F172A"/>
+                </a:solidFill>
+              </a:rPr>
+              <a:t>Colonoscopia e consulta. TC de pulmão de baixa dose.</a:t>
+            </a:r>
+            <a:endParaRPr lang="en-US" sz="1100" dirty="0"/>
+          </a:p>
+        </p:txBody>
+      </p:sp>
+      <p:sp>
+        <p:nvSpPr>
+          <p:cNvPr id="11" name="Text 9"/>
+          <p:cNvSpPr txBox="1"/>
+          <p:nvPr/>
+        </p:nvSpPr>
+        <p:spPr>
+          <a:xfrm>
+            <a:off x="685800" y="5029200"/>
+            <a:ext cx="3063240" cy="960120"/>
+          </a:xfrm>
+          <a:prstGeom prst="rect">
+            <a:avLst/>
+          </a:prstGeom>
+          <a:noFill/>
+          <a:ln/>
+        </p:spPr>
+        <p:txBody>
+          <a:bodyPr wrap="square" lIns="0" tIns="0" rIns="0" bIns="0" rtlCol="0" anchor="t"/>
+          <a:lstStyle/>
+          <a:p>
+            <a:pPr indent="0" marL="0">
+              <a:spcAft>
+                <a:spcPts val="200"/>
+              </a:spcAft>
+              <a:buNone/>
+            </a:pPr>
+            <a:r>
+              <a:rPr lang="en-US" sz="1100" b="1" spc="100" kern="0" dirty="0">
+                <a:solidFill>
+                  <a:srgbClr val="475569"/>
+                </a:solidFill>
+              </a:rPr>
+              <a:t>O QUE DEMONSTRA</a:t>
+            </a:r>
+            <a:endParaRPr lang="en-US" sz="1100" dirty="0"/>
+          </a:p>
+          <a:p>
+            <a:pPr indent="0" marL="0">
+              <a:spcAft>
+                <a:spcPts val="200"/>
+              </a:spcAft>
+              <a:buNone/>
+            </a:pPr>
+            <a:r>
+              <a:rPr lang="en-US" sz="1400" dirty="0">
+                <a:solidFill>
+                  <a:srgbClr val="0F172A"/>
+                </a:solidFill>
+              </a:rPr>
+              <a:t>Pulseira, exames e sintomas somando evidência.</a:t>
+            </a:r>
+            <a:endParaRPr lang="en-US" sz="1100" dirty="0"/>
+          </a:p>
+        </p:txBody>
+      </p:sp>
+      <p:sp>
+        <p:nvSpPr>
+          <p:cNvPr id="12" name="paciente-2"/>
+          <p:cNvSpPr/>
+          <p:nvPr/>
+        </p:nvSpPr>
+        <p:spPr>
+          <a:xfrm>
+            <a:off x="4320540" y="1280160"/>
+            <a:ext cx="3520440" cy="4892040"/>
+          </a:xfrm>
+          <a:prstGeom prst="roundRect">
+            <a:avLst>
+              <a:gd name="adj" fmla="val 3117"/>
+            </a:avLst>
+          </a:prstGeom>
+          <a:solidFill>
+            <a:schemeClr val="bg2"/>
+          </a:solidFill>
+          <a:ln w="12700">
+            <a:solidFill>
+              <a:schemeClr val="accent6"/>
+            </a:solidFill>
+            <a:prstDash val="solid"/>
+          </a:ln>
+        </p:spPr>
+      </p:sp>
+      <p:sp>
+        <p:nvSpPr>
+          <p:cNvPr id="13" name="Text 11"/>
+          <p:cNvSpPr txBox="1"/>
+          <p:nvPr/>
+        </p:nvSpPr>
+        <p:spPr>
+          <a:xfrm>
+            <a:off x="4549140" y="1508760"/>
+            <a:ext cx="3063240" cy="411480"/>
+          </a:xfrm>
+          <a:prstGeom prst="rect">
+            <a:avLst/>
+          </a:prstGeom>
+          <a:noFill/>
+          <a:ln/>
+        </p:spPr>
+        <p:txBody>
+          <a:bodyPr wrap="square" lIns="0" tIns="0" rIns="0" bIns="0" rtlCol="0" anchor="ctr"/>
+          <a:lstStyle/>
+          <a:p>
+            <a:pPr indent="0" marL="0">
+              <a:buNone/>
+            </a:pPr>
+            <a:r>
+              <a:rPr lang="en-US" sz="2000" b="1" dirty="0">
+                <a:solidFill>
+                  <a:schemeClr val="tx1"/>
+                </a:solidFill>
+                <a:latin typeface="Arial" pitchFamily="34" charset="0"/>
+                <a:ea typeface="Arial" pitchFamily="34" charset="-122"/>
+                <a:cs typeface="Arial" pitchFamily="34" charset="-120"/>
+              </a:rPr>
+              <a:t>Marina Azevedo, 34</a:t>
+            </a:r>
+            <a:endParaRPr lang="en-US" sz="2000" dirty="0"/>
+          </a:p>
+        </p:txBody>
+      </p:sp>
+      <p:sp>
+        <p:nvSpPr>
+          <p:cNvPr id="14" name="nivel-paciente-2"/>
+          <p:cNvSpPr/>
+          <p:nvPr/>
+        </p:nvSpPr>
+        <p:spPr>
+          <a:xfrm>
+            <a:off x="4549140" y="2011680"/>
+            <a:ext cx="3063240" cy="384048"/>
+          </a:xfrm>
+          <a:prstGeom prst="roundRect">
+            <a:avLst>
+              <a:gd name="adj" fmla="val 50000"/>
+            </a:avLst>
+          </a:prstGeom>
+          <a:solidFill>
+            <a:srgbClr val="FEF3C7"/>
+          </a:solidFill>
+          <a:ln/>
+        </p:spPr>
+      </p:sp>
+      <p:sp>
+        <p:nvSpPr>
+          <p:cNvPr id="15" name="Text 13"/>
+          <p:cNvSpPr txBox="1"/>
+          <p:nvPr/>
+        </p:nvSpPr>
+        <p:spPr>
+          <a:xfrm>
+            <a:off x="4549140" y="2011680"/>
+            <a:ext cx="3063240" cy="384048"/>
+          </a:xfrm>
+          <a:prstGeom prst="rect">
+            <a:avLst/>
+          </a:prstGeom>
+          <a:noFill/>
+          <a:ln/>
+        </p:spPr>
+        <p:txBody>
+          <a:bodyPr wrap="square" lIns="0" tIns="0" rIns="0" bIns="0" rtlCol="0" anchor="ctr"/>
+          <a:lstStyle/>
+          <a:p>
+            <a:pPr algn="ctr" indent="0" marL="0">
+              <a:buNone/>
+            </a:pPr>
+            <a:r>
+              <a:rPr lang="en-US" sz="1400" b="1" spc="100" kern="0" dirty="0">
+                <a:solidFill>
+                  <a:srgbClr val="B45309"/>
+                </a:solidFill>
+              </a:rPr>
+              <a:t>MAMA · ATENÇÃO</a:t>
+            </a:r>
+            <a:endParaRPr lang="en-US" sz="1400" dirty="0"/>
+          </a:p>
+        </p:txBody>
+      </p:sp>
+      <p:sp>
+        <p:nvSpPr>
+          <p:cNvPr id="16" name="Text 14"/>
+          <p:cNvSpPr txBox="1"/>
+          <p:nvPr/>
+        </p:nvSpPr>
+        <p:spPr>
+          <a:xfrm>
+            <a:off x="4549140" y="2606040"/>
+            <a:ext cx="3063240" cy="1005840"/>
+          </a:xfrm>
+          <a:prstGeom prst="rect">
+            <a:avLst/>
+          </a:prstGeom>
+          <a:noFill/>
+          <a:ln/>
+        </p:spPr>
+        <p:txBody>
+          <a:bodyPr wrap="square" lIns="0" tIns="0" rIns="0" bIns="0" rtlCol="0" anchor="t"/>
+          <a:lstStyle/>
+          <a:p>
+            <a:pPr indent="0" marL="0">
+              <a:spcAft>
+                <a:spcPts val="200"/>
+              </a:spcAft>
+              <a:buNone/>
+            </a:pPr>
+            <a:r>
+              <a:rPr lang="en-US" sz="1100" b="1" spc="100" kern="0" dirty="0">
+                <a:solidFill>
+                  <a:srgbClr val="475569"/>
+                </a:solidFill>
+              </a:rPr>
+              <a:t>OS DADOS</a:t>
+            </a:r>
+            <a:endParaRPr lang="en-US" sz="1100" dirty="0"/>
+          </a:p>
+          <a:p>
+            <a:pPr indent="0" marL="0">
+              <a:spcAft>
+                <a:spcPts val="200"/>
+              </a:spcAft>
+              <a:buNone/>
+            </a:pPr>
+            <a:r>
+              <a:rPr lang="en-US" sz="1400" dirty="0">
+                <a:solidFill>
+                  <a:srgbClr val="0F172A"/>
+                </a:solidFill>
+              </a:rPr>
+              <a:t>Mãe teve câncer de mama aos 41. Preventivo atrasado.</a:t>
+            </a:r>
+            <a:endParaRPr lang="en-US" sz="1100" dirty="0"/>
+          </a:p>
+        </p:txBody>
+      </p:sp>
+      <p:sp>
+        <p:nvSpPr>
+          <p:cNvPr id="17" name="Text 15"/>
+          <p:cNvSpPr txBox="1"/>
+          <p:nvPr/>
+        </p:nvSpPr>
+        <p:spPr>
+          <a:xfrm>
+            <a:off x="4549140" y="3657600"/>
+            <a:ext cx="3063240" cy="1325880"/>
+          </a:xfrm>
+          <a:prstGeom prst="rect">
+            <a:avLst/>
+          </a:prstGeom>
+          <a:noFill/>
+          <a:ln/>
+        </p:spPr>
+        <p:txBody>
+          <a:bodyPr wrap="square" lIns="0" tIns="0" rIns="0" bIns="0" rtlCol="0" anchor="t"/>
+          <a:lstStyle/>
+          <a:p>
+            <a:pPr indent="0" marL="0">
+              <a:spcAft>
+                <a:spcPts val="200"/>
+              </a:spcAft>
+              <a:buNone/>
+            </a:pPr>
+            <a:r>
+              <a:rPr lang="en-US" sz="1100" b="1" spc="100" kern="0" dirty="0">
+                <a:solidFill>
+                  <a:srgbClr val="475569"/>
+                </a:solidFill>
+              </a:rPr>
+              <a:t>A IA RECOMENDA</a:t>
+            </a:r>
+            <a:endParaRPr lang="en-US" sz="1100" dirty="0"/>
+          </a:p>
+          <a:p>
+            <a:pPr indent="0" marL="0">
+              <a:spcAft>
+                <a:spcPts val="200"/>
+              </a:spcAft>
+              <a:buNone/>
+            </a:pPr>
+            <a:r>
+              <a:rPr lang="en-US" sz="1400" dirty="0">
+                <a:solidFill>
+                  <a:srgbClr val="0F172A"/>
+                </a:solidFill>
+              </a:rPr>
+              <a:t>2,2× a média (~1 em 1.000): mamografia a partir dos 31, se o risco alto for confirmado. Teste de DNA-HPV.</a:t>
+            </a:r>
+            <a:endParaRPr lang="en-US" sz="1100" dirty="0"/>
+          </a:p>
+        </p:txBody>
+      </p:sp>
+      <p:sp>
+        <p:nvSpPr>
+          <p:cNvPr id="18" name="Text 16"/>
+          <p:cNvSpPr txBox="1"/>
+          <p:nvPr/>
+        </p:nvSpPr>
+        <p:spPr>
+          <a:xfrm>
+            <a:off x="4549140" y="5029200"/>
+            <a:ext cx="3063240" cy="960120"/>
+          </a:xfrm>
+          <a:prstGeom prst="rect">
+            <a:avLst/>
+          </a:prstGeom>
+          <a:noFill/>
+          <a:ln/>
+        </p:spPr>
+        <p:txBody>
+          <a:bodyPr wrap="square" lIns="0" tIns="0" rIns="0" bIns="0" rtlCol="0" anchor="t"/>
+          <a:lstStyle/>
+          <a:p>
+            <a:pPr indent="0" marL="0">
+              <a:spcAft>
+                <a:spcPts val="200"/>
+              </a:spcAft>
+              <a:buNone/>
+            </a:pPr>
+            <a:r>
+              <a:rPr lang="en-US" sz="1100" b="1" spc="100" kern="0" dirty="0">
+                <a:solidFill>
+                  <a:srgbClr val="475569"/>
+                </a:solidFill>
+              </a:rPr>
+              <a:t>O QUE DEMONSTRA</a:t>
+            </a:r>
+            <a:endParaRPr lang="en-US" sz="1100" dirty="0"/>
+          </a:p>
+          <a:p>
+            <a:pPr indent="0" marL="0">
+              <a:spcAft>
+                <a:spcPts val="200"/>
+              </a:spcAft>
+              <a:buNone/>
+            </a:pPr>
+            <a:r>
+              <a:rPr lang="en-US" sz="1400" dirty="0">
+                <a:solidFill>
+                  <a:srgbClr val="0F172A"/>
+                </a:solidFill>
+              </a:rPr>
+              <a:t>O plano de exames muda pela família, mesmo com risco baixo.</a:t>
+            </a:r>
+            <a:endParaRPr lang="en-US" sz="1100" dirty="0"/>
+          </a:p>
+        </p:txBody>
+      </p:sp>
+      <p:sp>
+        <p:nvSpPr>
+          <p:cNvPr id="19" name="paciente-3"/>
+          <p:cNvSpPr/>
+          <p:nvPr/>
+        </p:nvSpPr>
+        <p:spPr>
+          <a:xfrm>
+            <a:off x="8183880" y="1280160"/>
+            <a:ext cx="3520440" cy="4892040"/>
+          </a:xfrm>
+          <a:prstGeom prst="roundRect">
+            <a:avLst>
+              <a:gd name="adj" fmla="val 3117"/>
+            </a:avLst>
+          </a:prstGeom>
+          <a:solidFill>
+            <a:schemeClr val="bg2"/>
+          </a:solidFill>
+          <a:ln w="12700">
+            <a:solidFill>
+              <a:schemeClr val="accent6"/>
+            </a:solidFill>
+            <a:prstDash val="solid"/>
+          </a:ln>
+        </p:spPr>
+      </p:sp>
+      <p:sp>
+        <p:nvSpPr>
+          <p:cNvPr id="20" name="Text 18"/>
+          <p:cNvSpPr txBox="1"/>
+          <p:nvPr/>
+        </p:nvSpPr>
+        <p:spPr>
+          <a:xfrm>
+            <a:off x="8412480" y="1508760"/>
+            <a:ext cx="3063240" cy="411480"/>
+          </a:xfrm>
+          <a:prstGeom prst="rect">
+            <a:avLst/>
+          </a:prstGeom>
+          <a:noFill/>
+          <a:ln/>
+        </p:spPr>
+        <p:txBody>
+          <a:bodyPr wrap="square" lIns="0" tIns="0" rIns="0" bIns="0" rtlCol="0" anchor="ctr"/>
+          <a:lstStyle/>
+          <a:p>
+            <a:pPr indent="0" marL="0">
+              <a:buNone/>
+            </a:pPr>
+            <a:r>
+              <a:rPr lang="en-US" sz="2000" b="1" dirty="0">
+                <a:solidFill>
+                  <a:schemeClr val="tx1"/>
+                </a:solidFill>
+                <a:latin typeface="Arial" pitchFamily="34" charset="0"/>
+                <a:ea typeface="Arial" pitchFamily="34" charset="-122"/>
+                <a:cs typeface="Arial" pitchFamily="34" charset="-120"/>
+              </a:rPr>
+              <a:t>João Carlos, 58</a:t>
+            </a:r>
+            <a:endParaRPr lang="en-US" sz="2000" dirty="0"/>
+          </a:p>
+        </p:txBody>
+      </p:sp>
+      <p:sp>
+        <p:nvSpPr>
+          <p:cNvPr id="21" name="nivel-paciente-3"/>
+          <p:cNvSpPr/>
+          <p:nvPr/>
+        </p:nvSpPr>
+        <p:spPr>
+          <a:xfrm>
+            <a:off x="8412480" y="2011680"/>
+            <a:ext cx="3063240" cy="384048"/>
+          </a:xfrm>
+          <a:prstGeom prst="roundRect">
+            <a:avLst>
+              <a:gd name="adj" fmla="val 50000"/>
+            </a:avLst>
+          </a:prstGeom>
+          <a:solidFill>
+            <a:srgbClr val="DCFCE7"/>
+          </a:solidFill>
+          <a:ln/>
+        </p:spPr>
+      </p:sp>
+      <p:sp>
+        <p:nvSpPr>
+          <p:cNvPr id="22" name="Text 20"/>
+          <p:cNvSpPr txBox="1"/>
+          <p:nvPr/>
+        </p:nvSpPr>
+        <p:spPr>
+          <a:xfrm>
+            <a:off x="8412480" y="2011680"/>
+            <a:ext cx="3063240" cy="384048"/>
+          </a:xfrm>
+          <a:prstGeom prst="rect">
+            <a:avLst/>
+          </a:prstGeom>
+          <a:noFill/>
+          <a:ln/>
+        </p:spPr>
+        <p:txBody>
+          <a:bodyPr wrap="square" lIns="0" tIns="0" rIns="0" bIns="0" rtlCol="0" anchor="ctr"/>
+          <a:lstStyle/>
+          <a:p>
+            <a:pPr algn="ctr" indent="0" marL="0">
+              <a:buNone/>
+            </a:pPr>
+            <a:r>
+              <a:rPr lang="en-US" sz="1400" b="1" spc="100" kern="0" dirty="0">
+                <a:solidFill>
+                  <a:srgbClr val="15803D"/>
+                </a:solidFill>
+              </a:rPr>
+              <a:t>CÂNCER · ROTINA</a:t>
+            </a:r>
+            <a:endParaRPr lang="en-US" sz="1400" dirty="0"/>
+          </a:p>
+        </p:txBody>
+      </p:sp>
+      <p:sp>
+        <p:nvSpPr>
+          <p:cNvPr id="23" name="Text 21"/>
+          <p:cNvSpPr txBox="1"/>
+          <p:nvPr/>
+        </p:nvSpPr>
+        <p:spPr>
+          <a:xfrm>
+            <a:off x="8412480" y="2606040"/>
+            <a:ext cx="3063240" cy="1005840"/>
+          </a:xfrm>
+          <a:prstGeom prst="rect">
+            <a:avLst/>
+          </a:prstGeom>
+          <a:noFill/>
+          <a:ln/>
+        </p:spPr>
+        <p:txBody>
+          <a:bodyPr wrap="square" lIns="0" tIns="0" rIns="0" bIns="0" rtlCol="0" anchor="t"/>
+          <a:lstStyle/>
+          <a:p>
+            <a:pPr indent="0" marL="0">
+              <a:spcAft>
+                <a:spcPts val="200"/>
+              </a:spcAft>
+              <a:buNone/>
+            </a:pPr>
+            <a:r>
+              <a:rPr lang="en-US" sz="1100" b="1" spc="100" kern="0" dirty="0">
+                <a:solidFill>
+                  <a:srgbClr val="475569"/>
+                </a:solidFill>
+              </a:rPr>
+              <a:t>OS DADOS</a:t>
+            </a:r>
+            <a:endParaRPr lang="en-US" sz="1100" dirty="0"/>
+          </a:p>
+          <a:p>
+            <a:pPr indent="0" marL="0">
+              <a:spcAft>
+                <a:spcPts val="200"/>
+              </a:spcAft>
+              <a:buNone/>
+            </a:pPr>
+            <a:r>
+              <a:rPr lang="en-US" sz="1400" dirty="0">
+                <a:solidFill>
+                  <a:srgbClr val="0F172A"/>
+                </a:solidFill>
+              </a:rPr>
+              <a:t>STOP-Bang 6 (alto) e FINDRISC 23 (muito alto). Nenhum sinal de câncer.</a:t>
+            </a:r>
+            <a:endParaRPr lang="en-US" sz="1100" dirty="0"/>
+          </a:p>
+        </p:txBody>
+      </p:sp>
+      <p:sp>
+        <p:nvSpPr>
+          <p:cNvPr id="24" name="Text 22"/>
+          <p:cNvSpPr txBox="1"/>
+          <p:nvPr/>
+        </p:nvSpPr>
+        <p:spPr>
+          <a:xfrm>
+            <a:off x="8412480" y="3657600"/>
+            <a:ext cx="3063240" cy="1325880"/>
+          </a:xfrm>
+          <a:prstGeom prst="rect">
+            <a:avLst/>
+          </a:prstGeom>
+          <a:noFill/>
+          <a:ln/>
+        </p:spPr>
+        <p:txBody>
+          <a:bodyPr wrap="square" lIns="0" tIns="0" rIns="0" bIns="0" rtlCol="0" anchor="t"/>
+          <a:lstStyle/>
+          <a:p>
+            <a:pPr indent="0" marL="0">
+              <a:spcAft>
+                <a:spcPts val="200"/>
+              </a:spcAft>
+              <a:buNone/>
+            </a:pPr>
+            <a:r>
+              <a:rPr lang="en-US" sz="1100" b="1" spc="100" kern="0" dirty="0">
+                <a:solidFill>
+                  <a:srgbClr val="475569"/>
+                </a:solidFill>
+              </a:rPr>
+              <a:t>A IA RECOMENDA</a:t>
+            </a:r>
+            <a:endParaRPr lang="en-US" sz="1100" dirty="0"/>
+          </a:p>
+          <a:p>
+            <a:pPr indent="0" marL="0">
+              <a:spcAft>
+                <a:spcPts val="200"/>
+              </a:spcAft>
+              <a:buNone/>
+            </a:pPr>
+            <a:r>
+              <a:rPr lang="en-US" sz="1400" dirty="0">
+                <a:solidFill>
+                  <a:srgbClr val="0F172A"/>
+                </a:solidFill>
+              </a:rPr>
+              <a:t>FIT pela idade (50–75). PSA: conversar com o médico.</a:t>
+            </a:r>
+            <a:endParaRPr lang="en-US" sz="1100" dirty="0"/>
+          </a:p>
+        </p:txBody>
+      </p:sp>
+      <p:sp>
+        <p:nvSpPr>
+          <p:cNvPr id="25" name="Text 23"/>
+          <p:cNvSpPr txBox="1"/>
+          <p:nvPr/>
+        </p:nvSpPr>
+        <p:spPr>
+          <a:xfrm>
+            <a:off x="8412480" y="5029200"/>
+            <a:ext cx="3063240" cy="960120"/>
+          </a:xfrm>
+          <a:prstGeom prst="rect">
+            <a:avLst/>
+          </a:prstGeom>
+          <a:noFill/>
+          <a:ln/>
+        </p:spPr>
+        <p:txBody>
+          <a:bodyPr wrap="square" lIns="0" tIns="0" rIns="0" bIns="0" rtlCol="0" anchor="t"/>
+          <a:lstStyle/>
+          <a:p>
+            <a:pPr indent="0" marL="0">
+              <a:spcAft>
+                <a:spcPts val="200"/>
+              </a:spcAft>
+              <a:buNone/>
+            </a:pPr>
+            <a:r>
+              <a:rPr lang="en-US" sz="1100" b="1" spc="100" kern="0" dirty="0">
+                <a:solidFill>
+                  <a:srgbClr val="475569"/>
+                </a:solidFill>
+              </a:rPr>
+              <a:t>O QUE DEMONSTRA</a:t>
+            </a:r>
+            <a:endParaRPr lang="en-US" sz="1100" dirty="0"/>
+          </a:p>
+          <a:p>
+            <a:pPr indent="0" marL="0">
+              <a:spcAft>
+                <a:spcPts val="200"/>
+              </a:spcAft>
+              <a:buNone/>
+            </a:pPr>
+            <a:r>
+              <a:rPr lang="en-US" sz="1400" dirty="0">
+                <a:solidFill>
+                  <a:srgbClr val="0F172A"/>
+                </a:solidFill>
+              </a:rPr>
+              <a:t>Escores crônicos altos sem alarme de câncer. No app dele: "Agendar consulta".</a:t>
+            </a:r>
+            <a:endParaRPr lang="en-US" sz="1100" dirty="0"/>
+          </a:p>
+        </p:txBody>
+      </p:sp>
+      <p:sp>
+        <p:nvSpPr>
+          <p:cNvPr id="25" name="Slide Number Placeholder 0"/>
+          <p:cNvSpPr>
+            <a:spLocks noGrp="1"/>
+          </p:cNvSpPr>
+          <p:nvPr>
+            <p:ph type="sldNum" sz="quarter" idx="4294967295"/>
+          </p:nvPr>
+        </p:nvSpPr>
+        <p:spPr>
+          <a:xfrm>
+            <a:off x="11247120" y="6400800"/>
+            <a:ext cx="457200" cy="274320"/>
+          </a:xfrm>
+          <a:prstGeom prst="rect">
+            <a:avLst/>
+          </a:prstGeom>
+          <a:extLst>
+            <a:ext uri="{C572A759-6A51-4108-AA02-DFA0A04FC94B}">
+              <ma14:wrappingTextBoxFlag xmlns:ma14="http://schemas.microsoft.com/office/mac/drawingml/2011/main" val="0"/>
+            </a:ext>
+          </a:extLst>
+        </p:spPr>
+        <p:txBody>
+          <a:bodyPr/>
+          <a:lstStyle>
+            <a:lvl1pPr>
+              <a:defRPr sz="1000">
+                <a:solidFill>
+                  <a:srgbClr val="475569"/>
+                </a:solidFill>
+              </a:defRPr>
+            </a:lvl1pPr>
+          </a:lstStyle>
+          <a:p>
+            <a:pPr algn="r"/>
+            <a:fld id="{F7021451-1387-4CA6-816F-3879F97B5CBC}" type="slidenum">
+              <a:rPr b="0" lang="en-US"/>
+              <a:t>7</a:t>
+            </a:fld>
+            <a:endParaRPr lang="en-US"/>
+          </a:p>
+        </p:txBody>
+      </p:sp>
+    </p:spTree>
+  </p:cSld>
+  <p:clrMapOvr>
+    <a:masterClrMapping/>
+  </p:clrMapOvr>
+</p:sld>
+</file>
+
+<file path=ppt/slides/slide8.xml><?xml version="1.0" encoding="utf-8"?>
+<p:sld xmlns:a="http://schemas.openxmlformats.org/drawingml/2006/main" xmlns:r="http://schemas.openxmlformats.org/officeDocument/2006/relationships" xmlns:p="http://schemas.openxmlformats.org/presentationml/2006/main">
+  <p:cSld name="Slide 8">
+    <p:spTree>
+      <p:nvGrpSpPr>
+        <p:cNvPr id="1" name=""/>
+        <p:cNvGrpSpPr/>
+        <p:nvPr/>
+      </p:nvGrpSpPr>
+      <p:grpSpPr>
+        <a:xfrm>
+          <a:off x="0" y="0"/>
+          <a:ext cx="0" cy="0"/>
+          <a:chOff x="0" y="0"/>
+          <a:chExt cx="0" cy="0"/>
+        </a:xfrm>
+      </p:grpSpPr>
+      <p:sp>
+        <p:nvSpPr>
+          <p:cNvPr id="2" name="selo-tela-medica"/>
+          <p:cNvSpPr/>
+          <p:nvPr/>
+        </p:nvSpPr>
+        <p:spPr>
+          <a:xfrm>
+            <a:off x="457200" y="91440"/>
+            <a:ext cx="1600200" cy="274320"/>
+          </a:xfrm>
+          <a:prstGeom prst="roundRect">
+            <a:avLst>
+              <a:gd name="adj" fmla="val 50000"/>
+            </a:avLst>
+          </a:prstGeom>
+          <a:solidFill>
+            <a:srgbClr val="E6F7FD"/>
+          </a:solidFill>
+          <a:ln/>
+        </p:spPr>
+      </p:sp>
+      <p:sp>
+        <p:nvSpPr>
+          <p:cNvPr id="3" name="Text 1"/>
+          <p:cNvSpPr txBox="1"/>
+          <p:nvPr/>
+        </p:nvSpPr>
+        <p:spPr>
+          <a:xfrm>
+            <a:off x="457200" y="91440"/>
+            <a:ext cx="1600200" cy="274320"/>
+          </a:xfrm>
+          <a:prstGeom prst="rect">
+            <a:avLst/>
+          </a:prstGeom>
+          <a:noFill/>
+          <a:ln/>
+        </p:spPr>
+        <p:txBody>
+          <a:bodyPr wrap="square" lIns="0" tIns="0" rIns="0" bIns="0" rtlCol="0" anchor="ctr"/>
+          <a:lstStyle/>
+          <a:p>
+            <a:pPr algn="ctr" indent="0" marL="0">
+              <a:buNone/>
+            </a:pPr>
+            <a:r>
+              <a:rPr lang="en-US" sz="1000" b="1" spc="100" kern="0" dirty="0">
+                <a:solidFill>
+                  <a:srgbClr val="000000"/>
+                </a:solidFill>
+              </a:rPr>
+              <a:t>TELA DA MÉDICA</a:t>
+            </a:r>
+            <a:endParaRPr lang="en-US" sz="1000" dirty="0"/>
+          </a:p>
+        </p:txBody>
+      </p:sp>
+      <p:sp>
+        <p:nvSpPr>
+          <p:cNvPr id="4" name="Text 0"/>
+          <p:cNvSpPr/>
+          <p:nvPr>
+            <p:ph idx="100" type="title" hasCustomPrompt="1"/>
+          </p:nvPr>
+        </p:nvSpPr>
+        <p:spPr>
+          <a:xfrm>
+            <a:off x="457200" y="320040"/>
+            <a:ext cx="11247120" cy="777240"/>
+          </a:xfrm>
+          <a:prstGeom prst="rect">
+            <a:avLst/>
+          </a:prstGeom>
+          <a:noFill/>
+          <a:ln/>
+        </p:spPr>
+        <p:txBody>
+          <a:bodyPr wrap="square" lIns="0" tIns="0" rIns="0" bIns="0" rtlCol="0" anchor="ctr"/>
+          <a:lstStyle/>
+          <a:p>
+            <a:pPr algn="l" indent="0" marL="0">
+              <a:buNone/>
+            </a:pPr>
+            <a:r>
+              <a:rPr lang="en-US" sz="3400" b="1" dirty="0">
+                <a:solidFill>
+                  <a:schemeClr val="tx2"/>
+                </a:solidFill>
+              </a:rPr>
+              <a:t>Base da IA: os números foram para o banco</a:t>
+            </a:r>
+            <a:endParaRPr lang="en-US" sz="3400" dirty="0"/>
+          </a:p>
+        </p:txBody>
+      </p:sp>
+      <p:graphicFrame>
+        <p:nvGraphicFramePr>
+          <p:cNvPr id="9" name="Table 0"/>
           <p:cNvGraphicFramePr>
             <a:graphicFrameLocks noGrp="1"/>
           </p:cNvGraphicFramePr>
@@ -8200,7 +10759,7 @@
       </p:graphicFrame>
       <p:sp>
         <p:nvSpPr>
-          <p:cNvPr id="4" name="Text 1"/>
+          <p:cNvPr id="6" name="Text 3"/>
           <p:cNvSpPr txBox="1"/>
           <p:nvPr/>
         </p:nvSpPr>
@@ -8236,7 +10795,7 @@
       </p:sp>
       <p:sp>
         <p:nvSpPr>
-          <p:cNvPr id="5" name="fluxo-1"/>
+          <p:cNvPr id="7" name="fluxo-1"/>
           <p:cNvSpPr/>
           <p:nvPr/>
         </p:nvSpPr>
@@ -8263,7 +10822,7 @@
       </p:sp>
       <p:sp>
         <p:nvSpPr>
-          <p:cNvPr id="6" name="fluxo-num-1"/>
+          <p:cNvPr id="8" name="fluxo-num-1"/>
           <p:cNvSpPr/>
           <p:nvPr/>
         </p:nvSpPr>
@@ -8283,7 +10842,7 @@
       </p:sp>
       <p:sp>
         <p:nvSpPr>
-          <p:cNvPr id="7" name="Text 4"/>
+          <p:cNvPr id="9" name="Text 6"/>
           <p:cNvSpPr txBox="1"/>
           <p:nvPr/>
         </p:nvSpPr>
@@ -8322,7 +10881,7 @@
       </p:sp>
       <p:sp>
         <p:nvSpPr>
-          <p:cNvPr id="8" name="Text 5"/>
+          <p:cNvPr id="10" name="Text 7"/>
           <p:cNvSpPr txBox="1"/>
           <p:nvPr/>
         </p:nvSpPr>
@@ -8358,7 +10917,7 @@
       </p:sp>
       <p:sp>
         <p:nvSpPr>
-          <p:cNvPr id="9" name="fluxo-2"/>
+          <p:cNvPr id="11" name="fluxo-2"/>
           <p:cNvSpPr/>
           <p:nvPr/>
         </p:nvSpPr>
@@ -8385,7 +10944,7 @@
       </p:sp>
       <p:sp>
         <p:nvSpPr>
-          <p:cNvPr id="10" name="fluxo-num-2"/>
+          <p:cNvPr id="12" name="fluxo-num-2"/>
           <p:cNvSpPr/>
           <p:nvPr/>
         </p:nvSpPr>
@@ -8405,7 +10964,7 @@
       </p:sp>
       <p:sp>
         <p:nvSpPr>
-          <p:cNvPr id="11" name="Text 8"/>
+          <p:cNvPr id="13" name="Text 10"/>
           <p:cNvSpPr txBox="1"/>
           <p:nvPr/>
         </p:nvSpPr>
@@ -8444,7 +11003,7 @@
       </p:sp>
       <p:sp>
         <p:nvSpPr>
-          <p:cNvPr id="12" name="Text 9"/>
+          <p:cNvPr id="14" name="Text 11"/>
           <p:cNvSpPr txBox="1"/>
           <p:nvPr/>
         </p:nvSpPr>
@@ -8480,7 +11039,7 @@
       </p:sp>
       <p:sp>
         <p:nvSpPr>
-          <p:cNvPr id="13" name="fluxo-3"/>
+          <p:cNvPr id="15" name="fluxo-3"/>
           <p:cNvSpPr/>
           <p:nvPr/>
         </p:nvSpPr>
@@ -8507,7 +11066,7 @@
       </p:sp>
       <p:sp>
         <p:nvSpPr>
-          <p:cNvPr id="14" name="fluxo-num-3"/>
+          <p:cNvPr id="16" name="fluxo-num-3"/>
           <p:cNvSpPr/>
           <p:nvPr/>
         </p:nvSpPr>
@@ -8527,7 +11086,7 @@
       </p:sp>
       <p:sp>
         <p:nvSpPr>
-          <p:cNvPr id="15" name="Text 12"/>
+          <p:cNvPr id="17" name="Text 14"/>
           <p:cNvSpPr txBox="1"/>
           <p:nvPr/>
         </p:nvSpPr>
@@ -8566,7 +11125,7 @@
       </p:sp>
       <p:sp>
         <p:nvSpPr>
-          <p:cNvPr id="16" name="Text 13"/>
+          <p:cNvPr id="18" name="Text 15"/>
           <p:cNvSpPr txBox="1"/>
           <p:nvPr/>
         </p:nvSpPr>
@@ -8602,7 +11161,7 @@
       </p:sp>
       <p:sp>
         <p:nvSpPr>
-          <p:cNvPr id="17" name="fluxo-4"/>
+          <p:cNvPr id="19" name="fluxo-4"/>
           <p:cNvSpPr/>
           <p:nvPr/>
         </p:nvSpPr>
@@ -8629,7 +11188,7 @@
       </p:sp>
       <p:sp>
         <p:nvSpPr>
-          <p:cNvPr id="18" name="fluxo-num-4"/>
+          <p:cNvPr id="20" name="fluxo-num-4"/>
           <p:cNvSpPr/>
           <p:nvPr/>
         </p:nvSpPr>
@@ -8649,7 +11208,7 @@
       </p:sp>
       <p:sp>
         <p:nvSpPr>
-          <p:cNvPr id="19" name="Text 16"/>
+          <p:cNvPr id="21" name="Text 18"/>
           <p:cNvSpPr txBox="1"/>
           <p:nvPr/>
         </p:nvSpPr>
@@ -8688,7 +11247,7 @@
       </p:sp>
       <p:sp>
         <p:nvSpPr>
-          <p:cNvPr id="20" name="Text 17"/>
+          <p:cNvPr id="22" name="Text 19"/>
           <p:cNvSpPr txBox="1"/>
           <p:nvPr/>
         </p:nvSpPr>
@@ -8724,7 +11283,7 @@
       </p:sp>
       <p:sp>
         <p:nvSpPr>
-          <p:cNvPr id="21" name="Text 18"/>
+          <p:cNvPr id="23" name="Text 20"/>
           <p:cNvSpPr txBox="1"/>
           <p:nvPr/>
         </p:nvSpPr>
@@ -8763,7 +11322,7 @@
                   <a:srgbClr val="0F172A"/>
                 </a:solidFill>
               </a:rPr>
-              <a:t>as 8 crônicas respondem igual à versão anterior (golden master); a soma das contribuições é testada em 400 perfis; os testes rodam em Windows, macOS e Linux a cada mudança.</a:t>
+              <a:t>auditoria de fontes: cada número tem fonte do nível do Guyton, e o que não tinha saiu do motor; a soma das contribuições é testada em 400 perfis; os testes rodam em Windows, macOS e Linux a cada mudança.</a:t>
             </a:r>
             <a:endParaRPr lang="en-US" sz="1400" dirty="0"/>
           </a:p>
@@ -8808,7 +11367,7 @@
             <a:pPr algn="r"/>
             <a:fld id="{F7021451-1387-4CA6-816F-3879F97B5CBC}" type="slidenum">
               <a:rPr b="0" lang="en-US"/>
-              <a:t>6</a:t>
+              <a:t>8</a:t>
             </a:fld>
             <a:endParaRPr lang="en-US"/>
           </a:p>
@@ -8822,9 +11381,9 @@
 </p:sld>
 </file>
 
-<file path=ppt/slides/slide7.xml><?xml version="1.0" encoding="utf-8"?>
+<file path=ppt/slides/slide9.xml><?xml version="1.0" encoding="utf-8"?>
 <p:sld xmlns:a="http://schemas.openxmlformats.org/drawingml/2006/main" xmlns:r="http://schemas.openxmlformats.org/officeDocument/2006/relationships" xmlns:p="http://schemas.openxmlformats.org/presentationml/2006/main">
-  <p:cSld name="Slide 7">
+  <p:cSld name="Slide 9">
     <p:spTree>
       <p:nvGrpSpPr>
         <p:cNvPr id="1" name=""/>
@@ -8965,7 +11524,7 @@
                   <a:schemeClr val="bg1"/>
                 </a:solidFill>
               </a:rPr>
-              <a:t>Naive Bayes supõe pistas independentes: com pistas que andam juntas, a tela mostra "≥ 20%".</a:t>
+              <a:t>O paciente nunca ouve doença: o risco é ferramenta da médica.</a:t>
             </a:r>
             <a:endParaRPr lang="en-US" sz="1500" dirty="0"/>
           </a:p>
@@ -8983,7 +11542,7 @@
                   <a:schemeClr val="bg1"/>
                 </a:solidFill>
               </a:rPr>
-              <a:t>Boa parte das pistas vem de estudos de atenção primária (CAPER, Reino Unido) e de meta-análises.</a:t>
+              <a:t>Naive Bayes supõe pistas independentes: com pistas que andam juntas, a tela mostra "≥ 20%".</a:t>
             </a:r>
             <a:endParaRPr lang="en-US" sz="1500" dirty="0"/>
           </a:p>
@@ -9001,7 +11560,7 @@
                   <a:schemeClr val="bg1"/>
                 </a:solidFill>
               </a:rPr>
-              <a:t>LGPD: o teste público não grava nada. Dado de saúde é sensível.</a:t>
+              <a:t>Boa parte das pistas vem de estudos de atenção primária (CAPER, Reino Unido) e de meta-análises.</a:t>
             </a:r>
             <a:endParaRPr lang="en-US" sz="1500" dirty="0"/>
           </a:p>
@@ -9019,68 +11578,10 @@
                   <a:schemeClr val="bg1"/>
                 </a:solidFill>
               </a:rPr>
-              <a:t>Produto exigiria registro na ANVISA como software dispositivo médico (RDC 657/2022).</a:t>
+              <a:t>LGPD: o teste público não grava nada. Dado de saúde é sensível.</a:t>
             </a:r>
             <a:endParaRPr lang="en-US" sz="1500" dirty="0"/>
           </a:p>
-        </p:txBody>
-      </p:sp>
-      <p:sp>
-        <p:nvSpPr>
-          <p:cNvPr id="5" name="col-proximos"/>
-          <p:cNvSpPr txBox="1"/>
-          <p:nvPr/>
-        </p:nvSpPr>
-        <p:spPr>
-          <a:xfrm>
-            <a:off x="4937760" y="1325880"/>
-            <a:ext cx="3291840" cy="411480"/>
-          </a:xfrm>
-          <a:prstGeom prst="rect">
-            <a:avLst/>
-          </a:prstGeom>
-          <a:noFill/>
-          <a:ln/>
-        </p:spPr>
-        <p:txBody>
-          <a:bodyPr wrap="square" lIns="0" tIns="0" rIns="0" bIns="0" rtlCol="0" anchor="ctr"/>
-          <a:lstStyle/>
-          <a:p>
-            <a:pPr indent="0" marL="0">
-              <a:buNone/>
-            </a:pPr>
-            <a:r>
-              <a:rPr lang="en-US" sz="1800" b="1" dirty="0">
-                <a:solidFill>
-                  <a:schemeClr val="accent6"/>
-                </a:solidFill>
-              </a:rPr>
-              <a:t>Próximos passos</a:t>
-            </a:r>
-            <a:endParaRPr lang="en-US" sz="1800" dirty="0"/>
-          </a:p>
-        </p:txBody>
-      </p:sp>
-      <p:sp>
-        <p:nvSpPr>
-          <p:cNvPr id="6" name="Text 4"/>
-          <p:cNvSpPr txBox="1"/>
-          <p:nvPr/>
-        </p:nvSpPr>
-        <p:spPr>
-          <a:xfrm>
-            <a:off x="4937760" y="1828800"/>
-            <a:ext cx="3291840" cy="4206240"/>
-          </a:xfrm>
-          <a:prstGeom prst="rect">
-            <a:avLst/>
-          </a:prstGeom>
-          <a:noFill/>
-          <a:ln/>
-        </p:spPr>
-        <p:txBody>
-          <a:bodyPr wrap="square" lIns="0" tIns="0" rIns="0" bIns="0" rtlCol="0" anchor="t"/>
-          <a:lstStyle/>
           <a:p>
             <a:pPr marL="342900" indent="-342900">
               <a:spcAft>
@@ -9095,10 +11596,68 @@
                   <a:schemeClr val="bg1"/>
                 </a:solidFill>
               </a:rPr>
-              <a:t>Calibrar com prontuários anonimizados, com aprovação ética.</a:t>
+              <a:t>Produto exigiria registro na ANVISA como software dispositivo médico (RDC 657/2022).</a:t>
             </a:r>
             <a:endParaRPr lang="en-US" sz="1500" dirty="0"/>
           </a:p>
+        </p:txBody>
+      </p:sp>
+      <p:sp>
+        <p:nvSpPr>
+          <p:cNvPr id="5" name="col-proximos"/>
+          <p:cNvSpPr txBox="1"/>
+          <p:nvPr/>
+        </p:nvSpPr>
+        <p:spPr>
+          <a:xfrm>
+            <a:off x="4937760" y="1325880"/>
+            <a:ext cx="3291840" cy="411480"/>
+          </a:xfrm>
+          <a:prstGeom prst="rect">
+            <a:avLst/>
+          </a:prstGeom>
+          <a:noFill/>
+          <a:ln/>
+        </p:spPr>
+        <p:txBody>
+          <a:bodyPr wrap="square" lIns="0" tIns="0" rIns="0" bIns="0" rtlCol="0" anchor="ctr"/>
+          <a:lstStyle/>
+          <a:p>
+            <a:pPr indent="0" marL="0">
+              <a:buNone/>
+            </a:pPr>
+            <a:r>
+              <a:rPr lang="en-US" sz="1800" b="1" dirty="0">
+                <a:solidFill>
+                  <a:schemeClr val="accent6"/>
+                </a:solidFill>
+              </a:rPr>
+              <a:t>Próximos passos</a:t>
+            </a:r>
+            <a:endParaRPr lang="en-US" sz="1800" dirty="0"/>
+          </a:p>
+        </p:txBody>
+      </p:sp>
+      <p:sp>
+        <p:nvSpPr>
+          <p:cNvPr id="6" name="Text 4"/>
+          <p:cNvSpPr txBox="1"/>
+          <p:nvPr/>
+        </p:nvSpPr>
+        <p:spPr>
+          <a:xfrm>
+            <a:off x="4937760" y="1828800"/>
+            <a:ext cx="3291840" cy="4206240"/>
+          </a:xfrm>
+          <a:prstGeom prst="rect">
+            <a:avLst/>
+          </a:prstGeom>
+          <a:noFill/>
+          <a:ln/>
+        </p:spPr>
+        <p:txBody>
+          <a:bodyPr wrap="square" lIns="0" tIns="0" rIns="0" bIns="0" rtlCol="0" anchor="t"/>
+          <a:lstStyle/>
           <a:p>
             <a:pPr marL="342900" indent="-342900">
               <a:spcAft>
@@ -9113,7 +11672,7 @@
                   <a:schemeClr val="bg1"/>
                 </a:solidFill>
               </a:rPr>
-              <a:t>Modelar pistas correlacionadas.</a:t>
+              <a:t>Calibrar com prontuários anonimizados, com aprovação ética.</a:t>
             </a:r>
             <a:endParaRPr lang="en-US" sz="1500" dirty="0"/>
           </a:p>
@@ -9131,7 +11690,43 @@
                   <a:schemeClr val="bg1"/>
                 </a:solidFill>
               </a:rPr>
+              <a:t>Modelar pistas correlacionadas.</a:t>
+            </a:r>
+            <a:endParaRPr lang="en-US" sz="1500" dirty="0"/>
+          </a:p>
+          <a:p>
+            <a:pPr marL="342900" indent="-342900">
+              <a:spcAft>
+                <a:spcPts val="900"/>
+              </a:spcAft>
+              <a:buSzPct val="100000"/>
+              <a:buChar char="•"/>
+            </a:pPr>
+            <a:r>
+              <a:rPr lang="en-US" sz="1500" dirty="0">
+                <a:solidFill>
+                  <a:schemeClr val="bg1"/>
+                </a:solidFill>
+              </a:rPr>
               <a:t>Validação clínica prospectiva.</a:t>
+            </a:r>
+            <a:endParaRPr lang="en-US" sz="1500" dirty="0"/>
+          </a:p>
+          <a:p>
+            <a:pPr marL="342900" indent="-342900">
+              <a:spcAft>
+                <a:spcPts val="900"/>
+              </a:spcAft>
+              <a:buSzPct val="100000"/>
+              <a:buChar char="•"/>
+            </a:pPr>
+            <a:r>
+              <a:rPr lang="en-US" sz="1500" dirty="0">
+                <a:solidFill>
+                  <a:schemeClr val="bg1"/>
+                </a:solidFill>
+              </a:rPr>
+              <a:t>Recolocar crônicas que saíram (CV, arritmia, DPOC…) só com fonte do mesmo nível.</a:t>
             </a:r>
             <a:endParaRPr lang="en-US" sz="1500" dirty="0"/>
           </a:p>
@@ -9354,7 +11949,7 @@
             <a:pPr algn="r"/>
             <a:fld id="{F7021451-1387-4CA6-816F-3879F97B5CBC}" type="slidenum">
               <a:rPr b="0" lang="en-US"/>
-              <a:t>7</a:t>
+              <a:t>9</a:t>
             </a:fld>
             <a:endParaRPr lang="en-US"/>
           </a:p>

--- a/Docs/feira/slides.pptx
+++ b/Docs/feira/slides.pptx
@@ -115,39 +115,39 @@
   <p:extLst>
     <p:ext uri="{521415D9-36F7-43E2-AB2F-B90AF26B5E84}">
       <p14:sectionLst xmlns:p14="http://schemas.microsoft.com/office/powerpoint/2010/main">
-        <p14:section name="Abertura" id="{423085fa-e94b-7b4e-8f0e-08a5ad8bd51b}">
+        <p14:section name="Abertura" id="{d3421418-10df-0948-3680-656ab9211e1d}">
           <p14:sldIdLst>
             <p14:sldId id="256"/>
           </p14:sldIdLst>
         </p14:section>
-        <p14:section name="Problema" id="{88cb2771-e419-6f17-dee5-51d4d8a2a28c}">
+        <p14:section name="Problema" id="{087c251b-73b1-25cf-0de5-3ef31b5d768e}">
           <p14:sldIdLst>
             <p14:sldId id="257"/>
           </p14:sldIdLst>
         </p14:section>
-        <p14:section name="Proposta" id="{7510d9d3-124f-def0-81ff-f973ba025c4a}">
+        <p14:section name="Proposta" id="{1e8e36ac-c30e-f7e6-2780-b4b9b369418c}">
           <p14:sldIdLst>
             <p14:sldId id="258"/>
           </p14:sldIdLst>
         </p14:section>
-        <p14:section name="Como funciona" id="{884f7b98-c009-0fa8-7c22-2dbee7d709f3}">
+        <p14:section name="Como funciona" id="{f3082416-0eb6-0ef0-2927-400d9150b1d5}">
           <p14:sldIdLst>
             <p14:sldId id="259"/>
           </p14:sldIdLst>
         </p14:section>
-        <p14:section name="Demonstração" id="{c73d1047-e062-b5e0-8763-4fe139c184fd}">
+        <p14:section name="Demonstração" id="{5c4ba5b2-72a6-0753-68b4-4cc59aa89897}">
           <p14:sldIdLst>
             <p14:sldId id="260"/>
             <p14:sldId id="261"/>
             <p14:sldId id="262"/>
           </p14:sldIdLst>
         </p14:section>
-        <p14:section name="Base da IA" id="{cf8f482e-2333-f795-0c1c-124b6702df57}">
+        <p14:section name="Base da IA" id="{f64beec4-5ef4-67ff-ef66-a948be0b0fe6}">
           <p14:sldIdLst>
             <p14:sldId id="263"/>
           </p14:sldIdLst>
         </p14:section>
-        <p14:section name="Fecho" id="{f93b621f-ef02-124b-26d1-e9901ea6c6dd}">
+        <p14:section name="Fecho" id="{213b48a7-1db2-eb64-2fa8-da449c1f5d0c}">
           <p14:sldIdLst>
             <p14:sldId id="264"/>
           </p14:sldIdLst>
@@ -11774,7 +11774,7 @@
       </p:sp>
       <p:pic>
         <p:nvPicPr>
-          <p:cNvPr id="8" name="Image 0" descr="QR code para https://healthinpulse.onrender.com/teste">    </p:cNvPr>
+          <p:cNvPr id="8" name="Image 0" descr="QR code para https://healthinpulse-ib33.onrender.com/teste">    </p:cNvPr>
           <p:cNvPicPr>
             <a:picLocks noChangeAspect="1"/>
           </p:cNvPicPr>
@@ -11904,7 +11904,7 @@
                 <a:ea typeface="Courier New" pitchFamily="34" charset="-122"/>
                 <a:cs typeface="Courier New" pitchFamily="34" charset="-120"/>
               </a:rPr>
-              <a:t>healthinpulse.onrender.com/teste</a:t>
+              <a:t>healthinpulse-ib33.onrender.com/teste</a:t>
             </a:r>
             <a:endParaRPr lang="en-US" sz="1100" dirty="0"/>
           </a:p>
